--- a/private/proces/praesentation.pptx
+++ b/private/proces/praesentation.pptx
@@ -159,7 +159,7 @@
   <p:extLst>
     <p:ext uri="{521415D9-36F7-43E2-AB2F-B90AF26B5E84}">
       <p14:sectionLst xmlns:p14="http://schemas.microsoft.com/office/powerpoint/2010/main">
-        <p14:section name="Åbning" id="{b610639a-fc5a-fb7f-7d3f-caeb8d97647b}">
+        <p14:section name="Åbning" id="{eb990407-c02a-97b5-ed7c-88d9286979ba}">
           <p14:sldIdLst>
             <p14:sldId id="256"/>
             <p14:sldId id="257"/>
@@ -169,7 +169,7 @@
             <p14:sldId id="261"/>
           </p14:sldIdLst>
         </p14:section>
-        <p14:section name="Som studerende" id="{57e69c30-a36c-c03f-f763-3bdf9396fb7e}">
+        <p14:section name="Som studerende" id="{094d6789-afa2-f4a3-5607-2ddc26630260}">
           <p14:sldIdLst>
             <p14:sldId id="262"/>
             <p14:sldId id="263"/>
@@ -181,7 +181,7 @@
             <p14:sldId id="269"/>
           </p14:sldIdLst>
         </p14:section>
-        <p14:section name="Prompting" id="{3f79edf1-3658-2fd3-5ead-22f0d4852d26}">
+        <p14:section name="Prompting" id="{b227591a-07a0-a95f-8174-2dcb39ee9b45}">
           <p14:sldIdLst>
             <p14:sldId id="270"/>
             <p14:sldId id="271"/>
@@ -192,7 +192,7 @@
             <p14:sldId id="276"/>
           </p14:sldIdLst>
         </p14:section>
-        <p14:section name="Excel og data" id="{edda8065-a145-53db-a581-96b91bfc0a29}">
+        <p14:section name="Excel og data" id="{83069563-adb9-0514-37b8-9c0b39d261f7}">
           <p14:sldIdLst>
             <p14:sldId id="277"/>
             <p14:sldId id="278"/>
@@ -210,7 +210,7 @@
             <p14:sldId id="290"/>
           </p14:sldIdLst>
         </p14:section>
-        <p14:section name="AI i jobbet" id="{e2b9087a-4e14-d71b-ce6c-941a43a02214}">
+        <p14:section name="AI i jobbet" id="{412b98cb-57c5-7b5b-482c-e244ec141cad}">
           <p14:sldIdLst>
             <p14:sldId id="291"/>
             <p14:sldId id="292"/>
@@ -223,7 +223,7 @@
             <p14:sldId id="299"/>
           </p14:sldIdLst>
         </p14:section>
-        <p14:section name="Vibecoding" id="{1368bc20-f583-4a1f-70b8-fddee5d0724e}">
+        <p14:section name="Vibecoding" id="{b12517eb-4eda-49d1-8816-b17a5ce30805}">
           <p14:sldIdLst>
             <p14:sldId id="300"/>
             <p14:sldId id="301"/>
@@ -233,7 +233,7 @@
             <p14:sldId id="305"/>
           </p14:sldIdLst>
         </p14:section>
-        <p14:section name="Afrunding" id="{a2c4487b-1fad-a382-243c-2f09ba38f5c9}">
+        <p14:section name="Afrunding" id="{a5493ed2-9afb-d53d-654f-cfcdd34c2190}">
           <p14:sldIdLst>
             <p14:sldId id="306"/>
             <p14:sldId id="307"/>
@@ -278,7 +278,7 @@
               <c:strCache>
                 <c:ptCount val="1"/>
                 <c:pt idx="0">
-                  <c:v>Øvre kontrolgrænse</c:v>
+                  <c:v>Grænse korn</c:v>
                 </c:pt>
               </c:strCache>
             </c:strRef>
@@ -340,12 +340,12 @@
           </c:marker>
           <c:cat>
             <c:multiLvlStrRef>
-              <c:f>Sheet1!$A$2:$A$81</c:f>
+              <c:f>Sheet1!$A$2:$A$34</c:f>
               <c:multiLvlStrCache>
-                <c:ptCount val="80"/>
+                <c:ptCount val="33"/>
                 <c:lvl>
                   <c:pt idx="0">
-                    <c:v/>
+                    <c:v>0 t</c:v>
                   </c:pt>
                   <c:pt idx="1">
                     <c:v/>
@@ -363,13 +363,13 @@
                     <c:v/>
                   </c:pt>
                   <c:pt idx="6">
-                    <c:v/>
+                    <c:v>24 t</c:v>
                   </c:pt>
                   <c:pt idx="7">
                     <c:v/>
                   </c:pt>
                   <c:pt idx="8">
-                    <c:v>Man</c:v>
+                    <c:v/>
                   </c:pt>
                   <c:pt idx="9">
                     <c:v/>
@@ -381,7 +381,7 @@
                     <c:v/>
                   </c:pt>
                   <c:pt idx="12">
-                    <c:v/>
+                    <c:v>48 t</c:v>
                   </c:pt>
                   <c:pt idx="13">
                     <c:v/>
@@ -399,7 +399,7 @@
                     <c:v/>
                   </c:pt>
                   <c:pt idx="18">
-                    <c:v/>
+                    <c:v>72 t</c:v>
                   </c:pt>
                   <c:pt idx="19">
                     <c:v/>
@@ -417,7 +417,7 @@
                     <c:v/>
                   </c:pt>
                   <c:pt idx="24">
-                    <c:v>Tir</c:v>
+                    <c:v>96 t</c:v>
                   </c:pt>
                   <c:pt idx="25">
                     <c:v/>
@@ -435,153 +435,12 @@
                     <c:v/>
                   </c:pt>
                   <c:pt idx="30">
-                    <c:v/>
+                    <c:v>120 t</c:v>
                   </c:pt>
                   <c:pt idx="31">
                     <c:v/>
                   </c:pt>
                   <c:pt idx="32">
-                    <c:v/>
-                  </c:pt>
-                  <c:pt idx="33">
-                    <c:v/>
-                  </c:pt>
-                  <c:pt idx="34">
-                    <c:v/>
-                  </c:pt>
-                  <c:pt idx="35">
-                    <c:v/>
-                  </c:pt>
-                  <c:pt idx="36">
-                    <c:v/>
-                  </c:pt>
-                  <c:pt idx="37">
-                    <c:v/>
-                  </c:pt>
-                  <c:pt idx="38">
-                    <c:v/>
-                  </c:pt>
-                  <c:pt idx="39">
-                    <c:v/>
-                  </c:pt>
-                  <c:pt idx="40">
-                    <c:v>Ons</c:v>
-                  </c:pt>
-                  <c:pt idx="41">
-                    <c:v/>
-                  </c:pt>
-                  <c:pt idx="42">
-                    <c:v/>
-                  </c:pt>
-                  <c:pt idx="43">
-                    <c:v/>
-                  </c:pt>
-                  <c:pt idx="44">
-                    <c:v/>
-                  </c:pt>
-                  <c:pt idx="45">
-                    <c:v/>
-                  </c:pt>
-                  <c:pt idx="46">
-                    <c:v/>
-                  </c:pt>
-                  <c:pt idx="47">
-                    <c:v/>
-                  </c:pt>
-                  <c:pt idx="48">
-                    <c:v/>
-                  </c:pt>
-                  <c:pt idx="49">
-                    <c:v/>
-                  </c:pt>
-                  <c:pt idx="50">
-                    <c:v/>
-                  </c:pt>
-                  <c:pt idx="51">
-                    <c:v/>
-                  </c:pt>
-                  <c:pt idx="52">
-                    <c:v/>
-                  </c:pt>
-                  <c:pt idx="53">
-                    <c:v/>
-                  </c:pt>
-                  <c:pt idx="54">
-                    <c:v/>
-                  </c:pt>
-                  <c:pt idx="55">
-                    <c:v/>
-                  </c:pt>
-                  <c:pt idx="56">
-                    <c:v>Tor</c:v>
-                  </c:pt>
-                  <c:pt idx="57">
-                    <c:v/>
-                  </c:pt>
-                  <c:pt idx="58">
-                    <c:v/>
-                  </c:pt>
-                  <c:pt idx="59">
-                    <c:v/>
-                  </c:pt>
-                  <c:pt idx="60">
-                    <c:v/>
-                  </c:pt>
-                  <c:pt idx="61">
-                    <c:v/>
-                  </c:pt>
-                  <c:pt idx="62">
-                    <c:v/>
-                  </c:pt>
-                  <c:pt idx="63">
-                    <c:v/>
-                  </c:pt>
-                  <c:pt idx="64">
-                    <c:v/>
-                  </c:pt>
-                  <c:pt idx="65">
-                    <c:v/>
-                  </c:pt>
-                  <c:pt idx="66">
-                    <c:v/>
-                  </c:pt>
-                  <c:pt idx="67">
-                    <c:v/>
-                  </c:pt>
-                  <c:pt idx="68">
-                    <c:v/>
-                  </c:pt>
-                  <c:pt idx="69">
-                    <c:v/>
-                  </c:pt>
-                  <c:pt idx="70">
-                    <c:v/>
-                  </c:pt>
-                  <c:pt idx="71">
-                    <c:v/>
-                  </c:pt>
-                  <c:pt idx="72">
-                    <c:v>Fre</c:v>
-                  </c:pt>
-                  <c:pt idx="73">
-                    <c:v/>
-                  </c:pt>
-                  <c:pt idx="74">
-                    <c:v/>
-                  </c:pt>
-                  <c:pt idx="75">
-                    <c:v/>
-                  </c:pt>
-                  <c:pt idx="76">
-                    <c:v/>
-                  </c:pt>
-                  <c:pt idx="77">
-                    <c:v/>
-                  </c:pt>
-                  <c:pt idx="78">
-                    <c:v/>
-                  </c:pt>
-                  <c:pt idx="79">
                     <c:v/>
                   </c:pt>
                 </c:lvl>
@@ -590,249 +449,108 @@
           </c:cat>
           <c:val>
             <c:numRef>
-              <c:f>Sheet1!$B$2:$B$81</c:f>
+              <c:f>Sheet1!$B$2:$B$34</c:f>
               <c:numCache>
                 <c:formatCode>General</c:formatCode>
-                <c:ptCount val="80"/>
+                <c:ptCount val="33"/>
                 <c:pt idx="0">
-                  <c:v>1038.47</c:v>
+                  <c:v>15.5</c:v>
                 </c:pt>
                 <c:pt idx="1">
-                  <c:v>1038.47</c:v>
+                  <c:v>15.5</c:v>
                 </c:pt>
                 <c:pt idx="2">
-                  <c:v>1038.47</c:v>
+                  <c:v>15.5</c:v>
                 </c:pt>
                 <c:pt idx="3">
-                  <c:v>1038.47</c:v>
+                  <c:v>15.5</c:v>
                 </c:pt>
                 <c:pt idx="4">
-                  <c:v>1038.47</c:v>
+                  <c:v>15.5</c:v>
                 </c:pt>
                 <c:pt idx="5">
-                  <c:v>1038.47</c:v>
+                  <c:v>15.5</c:v>
                 </c:pt>
                 <c:pt idx="6">
-                  <c:v>1038.47</c:v>
+                  <c:v>15.5</c:v>
                 </c:pt>
                 <c:pt idx="7">
-                  <c:v>1038.47</c:v>
+                  <c:v>15.5</c:v>
                 </c:pt>
                 <c:pt idx="8">
-                  <c:v>1038.47</c:v>
+                  <c:v>15.5</c:v>
                 </c:pt>
                 <c:pt idx="9">
-                  <c:v>1038.47</c:v>
+                  <c:v>15.5</c:v>
                 </c:pt>
                 <c:pt idx="10">
-                  <c:v>1038.47</c:v>
+                  <c:v>15.5</c:v>
                 </c:pt>
                 <c:pt idx="11">
-                  <c:v>1038.47</c:v>
+                  <c:v>15.5</c:v>
                 </c:pt>
                 <c:pt idx="12">
-                  <c:v>1038.47</c:v>
+                  <c:v>15.5</c:v>
                 </c:pt>
                 <c:pt idx="13">
-                  <c:v>1038.47</c:v>
+                  <c:v>15.5</c:v>
                 </c:pt>
                 <c:pt idx="14">
-                  <c:v>1038.47</c:v>
+                  <c:v>15.5</c:v>
                 </c:pt>
                 <c:pt idx="15">
-                  <c:v>1038.47</c:v>
+                  <c:v>15.5</c:v>
                 </c:pt>
                 <c:pt idx="16">
-                  <c:v>1038.47</c:v>
+                  <c:v>15.5</c:v>
                 </c:pt>
                 <c:pt idx="17">
-                  <c:v>1038.47</c:v>
+                  <c:v>15.5</c:v>
                 </c:pt>
                 <c:pt idx="18">
-                  <c:v>1038.47</c:v>
+                  <c:v>15.5</c:v>
                 </c:pt>
                 <c:pt idx="19">
-                  <c:v>1038.47</c:v>
+                  <c:v>15.5</c:v>
                 </c:pt>
                 <c:pt idx="20">
-                  <c:v>1038.47</c:v>
+                  <c:v>15.5</c:v>
                 </c:pt>
                 <c:pt idx="21">
-                  <c:v>1038.47</c:v>
+                  <c:v>15.5</c:v>
                 </c:pt>
                 <c:pt idx="22">
-                  <c:v>1038.47</c:v>
+                  <c:v>15.5</c:v>
                 </c:pt>
                 <c:pt idx="23">
-                  <c:v>1038.47</c:v>
+                  <c:v>15.5</c:v>
                 </c:pt>
                 <c:pt idx="24">
-                  <c:v>1038.47</c:v>
+                  <c:v>15.5</c:v>
                 </c:pt>
                 <c:pt idx="25">
-                  <c:v>1038.47</c:v>
+                  <c:v>15.5</c:v>
                 </c:pt>
                 <c:pt idx="26">
-                  <c:v>1038.47</c:v>
+                  <c:v>15.5</c:v>
                 </c:pt>
                 <c:pt idx="27">
-                  <c:v>1038.47</c:v>
+                  <c:v>15.5</c:v>
                 </c:pt>
                 <c:pt idx="28">
-                  <c:v>1038.47</c:v>
+                  <c:v>15.5</c:v>
                 </c:pt>
                 <c:pt idx="29">
-                  <c:v>1038.47</c:v>
+                  <c:v>15.5</c:v>
                 </c:pt>
                 <c:pt idx="30">
-                  <c:v>1038.47</c:v>
+                  <c:v>15.5</c:v>
                 </c:pt>
                 <c:pt idx="31">
-                  <c:v>1038.47</c:v>
+                  <c:v>15.5</c:v>
                 </c:pt>
                 <c:pt idx="32">
-                  <c:v>1038.47</c:v>
-                </c:pt>
-                <c:pt idx="33">
-                  <c:v>1038.47</c:v>
-                </c:pt>
-                <c:pt idx="34">
-                  <c:v>1038.47</c:v>
-                </c:pt>
-                <c:pt idx="35">
-                  <c:v>1038.47</c:v>
-                </c:pt>
-                <c:pt idx="36">
-                  <c:v>1038.47</c:v>
-                </c:pt>
-                <c:pt idx="37">
-                  <c:v>1038.47</c:v>
-                </c:pt>
-                <c:pt idx="38">
-                  <c:v>1038.47</c:v>
-                </c:pt>
-                <c:pt idx="39">
-                  <c:v>1038.47</c:v>
-                </c:pt>
-                <c:pt idx="40">
-                  <c:v>1038.47</c:v>
-                </c:pt>
-                <c:pt idx="41">
-                  <c:v>1038.47</c:v>
-                </c:pt>
-                <c:pt idx="42">
-                  <c:v>1038.47</c:v>
-                </c:pt>
-                <c:pt idx="43">
-                  <c:v>1038.47</c:v>
-                </c:pt>
-                <c:pt idx="44">
-                  <c:v>1038.47</c:v>
-                </c:pt>
-                <c:pt idx="45">
-                  <c:v>1038.47</c:v>
-                </c:pt>
-                <c:pt idx="46">
-                  <c:v>1038.47</c:v>
-                </c:pt>
-                <c:pt idx="47">
-                  <c:v>1038.47</c:v>
-                </c:pt>
-                <c:pt idx="48">
-                  <c:v>1038.47</c:v>
-                </c:pt>
-                <c:pt idx="49">
-                  <c:v>1038.47</c:v>
-                </c:pt>
-                <c:pt idx="50">
-                  <c:v>1038.47</c:v>
-                </c:pt>
-                <c:pt idx="51">
-                  <c:v>1038.47</c:v>
-                </c:pt>
-                <c:pt idx="52">
-                  <c:v>1038.47</c:v>
-                </c:pt>
-                <c:pt idx="53">
-                  <c:v>1038.47</c:v>
-                </c:pt>
-                <c:pt idx="54">
-                  <c:v>1038.47</c:v>
-                </c:pt>
-                <c:pt idx="55">
-                  <c:v>1038.47</c:v>
-                </c:pt>
-                <c:pt idx="56">
-                  <c:v>1038.47</c:v>
-                </c:pt>
-                <c:pt idx="57">
-                  <c:v>1038.47</c:v>
-                </c:pt>
-                <c:pt idx="58">
-                  <c:v>1038.47</c:v>
-                </c:pt>
-                <c:pt idx="59">
-                  <c:v>1038.47</c:v>
-                </c:pt>
-                <c:pt idx="60">
-                  <c:v>1038.47</c:v>
-                </c:pt>
-                <c:pt idx="61">
-                  <c:v>1038.47</c:v>
-                </c:pt>
-                <c:pt idx="62">
-                  <c:v>1038.47</c:v>
-                </c:pt>
-                <c:pt idx="63">
-                  <c:v>1038.47</c:v>
-                </c:pt>
-                <c:pt idx="64">
-                  <c:v>1038.47</c:v>
-                </c:pt>
-                <c:pt idx="65">
-                  <c:v>1038.47</c:v>
-                </c:pt>
-                <c:pt idx="66">
-                  <c:v>1038.47</c:v>
-                </c:pt>
-                <c:pt idx="67">
-                  <c:v>1038.47</c:v>
-                </c:pt>
-                <c:pt idx="68">
-                  <c:v>1038.47</c:v>
-                </c:pt>
-                <c:pt idx="69">
-                  <c:v>1038.47</c:v>
-                </c:pt>
-                <c:pt idx="70">
-                  <c:v>1038.47</c:v>
-                </c:pt>
-                <c:pt idx="71">
-                  <c:v>1038.47</c:v>
-                </c:pt>
-                <c:pt idx="72">
-                  <c:v>1038.47</c:v>
-                </c:pt>
-                <c:pt idx="73">
-                  <c:v>1038.47</c:v>
-                </c:pt>
-                <c:pt idx="74">
-                  <c:v>1038.47</c:v>
-                </c:pt>
-                <c:pt idx="75">
-                  <c:v>1038.47</c:v>
-                </c:pt>
-                <c:pt idx="76">
-                  <c:v>1038.47</c:v>
-                </c:pt>
-                <c:pt idx="77">
-                  <c:v>1038.47</c:v>
-                </c:pt>
-                <c:pt idx="78">
-                  <c:v>1038.47</c:v>
-                </c:pt>
-                <c:pt idx="79">
-                  <c:v>1038.47</c:v>
+                  <c:v>15.5</c:v>
                 </c:pt>
               </c:numCache>
             </c:numRef>
@@ -848,18 +566,18 @@
               <c:strCache>
                 <c:ptCount val="1"/>
                 <c:pt idx="0">
-                  <c:v>Nedre kontrolgrænse</c:v>
+                  <c:v>T-07 hvede</c:v>
                 </c:pt>
               </c:strCache>
             </c:strRef>
           </c:tx>
           <c:spPr>
             <a:solidFill>
-              <a:srgbClr val="6E6E73"/>
+              <a:srgbClr val="A1A1A6"/>
             </a:solidFill>
             <a:ln w="19050" cap="flat">
               <a:solidFill>
-                <a:srgbClr val="6E6E73"/>
+                <a:srgbClr val="A1A1A6"/>
               </a:solidFill>
               <a:prstDash val="solid"/>
               <a:round/>
@@ -896,11 +614,11 @@
             <c:size val="6"/>
             <c:spPr>
               <a:solidFill>
-                <a:srgbClr val="6E6E73"/>
+                <a:srgbClr val="A1A1A6"/>
               </a:solidFill>
               <a:ln w="9525" cap="flat">
                 <a:solidFill>
-                  <a:srgbClr val="6E6E73"/>
+                  <a:srgbClr val="A1A1A6"/>
                 </a:solidFill>
                 <a:prstDash val="solid"/>
                 <a:round/>
@@ -910,12 +628,12 @@
           </c:marker>
           <c:cat>
             <c:multiLvlStrRef>
-              <c:f>Sheet1!$A$2:$A$81</c:f>
+              <c:f>Sheet1!$A$2:$A$34</c:f>
               <c:multiLvlStrCache>
-                <c:ptCount val="80"/>
+                <c:ptCount val="33"/>
                 <c:lvl>
                   <c:pt idx="0">
-                    <c:v/>
+                    <c:v>0 t</c:v>
                   </c:pt>
                   <c:pt idx="1">
                     <c:v/>
@@ -933,13 +651,13 @@
                     <c:v/>
                   </c:pt>
                   <c:pt idx="6">
-                    <c:v/>
+                    <c:v>24 t</c:v>
                   </c:pt>
                   <c:pt idx="7">
                     <c:v/>
                   </c:pt>
                   <c:pt idx="8">
-                    <c:v>Man</c:v>
+                    <c:v/>
                   </c:pt>
                   <c:pt idx="9">
                     <c:v/>
@@ -951,7 +669,7 @@
                     <c:v/>
                   </c:pt>
                   <c:pt idx="12">
-                    <c:v/>
+                    <c:v>48 t</c:v>
                   </c:pt>
                   <c:pt idx="13">
                     <c:v/>
@@ -969,7 +687,7 @@
                     <c:v/>
                   </c:pt>
                   <c:pt idx="18">
-                    <c:v/>
+                    <c:v>72 t</c:v>
                   </c:pt>
                   <c:pt idx="19">
                     <c:v/>
@@ -987,7 +705,7 @@
                     <c:v/>
                   </c:pt>
                   <c:pt idx="24">
-                    <c:v>Tir</c:v>
+                    <c:v>96 t</c:v>
                   </c:pt>
                   <c:pt idx="25">
                     <c:v/>
@@ -1005,153 +723,12 @@
                     <c:v/>
                   </c:pt>
                   <c:pt idx="30">
-                    <c:v/>
+                    <c:v>120 t</c:v>
                   </c:pt>
                   <c:pt idx="31">
                     <c:v/>
                   </c:pt>
                   <c:pt idx="32">
-                    <c:v/>
-                  </c:pt>
-                  <c:pt idx="33">
-                    <c:v/>
-                  </c:pt>
-                  <c:pt idx="34">
-                    <c:v/>
-                  </c:pt>
-                  <c:pt idx="35">
-                    <c:v/>
-                  </c:pt>
-                  <c:pt idx="36">
-                    <c:v/>
-                  </c:pt>
-                  <c:pt idx="37">
-                    <c:v/>
-                  </c:pt>
-                  <c:pt idx="38">
-                    <c:v/>
-                  </c:pt>
-                  <c:pt idx="39">
-                    <c:v/>
-                  </c:pt>
-                  <c:pt idx="40">
-                    <c:v>Ons</c:v>
-                  </c:pt>
-                  <c:pt idx="41">
-                    <c:v/>
-                  </c:pt>
-                  <c:pt idx="42">
-                    <c:v/>
-                  </c:pt>
-                  <c:pt idx="43">
-                    <c:v/>
-                  </c:pt>
-                  <c:pt idx="44">
-                    <c:v/>
-                  </c:pt>
-                  <c:pt idx="45">
-                    <c:v/>
-                  </c:pt>
-                  <c:pt idx="46">
-                    <c:v/>
-                  </c:pt>
-                  <c:pt idx="47">
-                    <c:v/>
-                  </c:pt>
-                  <c:pt idx="48">
-                    <c:v/>
-                  </c:pt>
-                  <c:pt idx="49">
-                    <c:v/>
-                  </c:pt>
-                  <c:pt idx="50">
-                    <c:v/>
-                  </c:pt>
-                  <c:pt idx="51">
-                    <c:v/>
-                  </c:pt>
-                  <c:pt idx="52">
-                    <c:v/>
-                  </c:pt>
-                  <c:pt idx="53">
-                    <c:v/>
-                  </c:pt>
-                  <c:pt idx="54">
-                    <c:v/>
-                  </c:pt>
-                  <c:pt idx="55">
-                    <c:v/>
-                  </c:pt>
-                  <c:pt idx="56">
-                    <c:v>Tor</c:v>
-                  </c:pt>
-                  <c:pt idx="57">
-                    <c:v/>
-                  </c:pt>
-                  <c:pt idx="58">
-                    <c:v/>
-                  </c:pt>
-                  <c:pt idx="59">
-                    <c:v/>
-                  </c:pt>
-                  <c:pt idx="60">
-                    <c:v/>
-                  </c:pt>
-                  <c:pt idx="61">
-                    <c:v/>
-                  </c:pt>
-                  <c:pt idx="62">
-                    <c:v/>
-                  </c:pt>
-                  <c:pt idx="63">
-                    <c:v/>
-                  </c:pt>
-                  <c:pt idx="64">
-                    <c:v/>
-                  </c:pt>
-                  <c:pt idx="65">
-                    <c:v/>
-                  </c:pt>
-                  <c:pt idx="66">
-                    <c:v/>
-                  </c:pt>
-                  <c:pt idx="67">
-                    <c:v/>
-                  </c:pt>
-                  <c:pt idx="68">
-                    <c:v/>
-                  </c:pt>
-                  <c:pt idx="69">
-                    <c:v/>
-                  </c:pt>
-                  <c:pt idx="70">
-                    <c:v/>
-                  </c:pt>
-                  <c:pt idx="71">
-                    <c:v/>
-                  </c:pt>
-                  <c:pt idx="72">
-                    <c:v>Fre</c:v>
-                  </c:pt>
-                  <c:pt idx="73">
-                    <c:v/>
-                  </c:pt>
-                  <c:pt idx="74">
-                    <c:v/>
-                  </c:pt>
-                  <c:pt idx="75">
-                    <c:v/>
-                  </c:pt>
-                  <c:pt idx="76">
-                    <c:v/>
-                  </c:pt>
-                  <c:pt idx="77">
-                    <c:v/>
-                  </c:pt>
-                  <c:pt idx="78">
-                    <c:v/>
-                  </c:pt>
-                  <c:pt idx="79">
                     <c:v/>
                   </c:pt>
                 </c:lvl>
@@ -1160,249 +737,108 @@
           </c:cat>
           <c:val>
             <c:numRef>
-              <c:f>Sheet1!$C$2:$C$81</c:f>
+              <c:f>Sheet1!$C$2:$C$34</c:f>
               <c:numCache>
                 <c:formatCode>General</c:formatCode>
-                <c:ptCount val="80"/>
+                <c:ptCount val="33"/>
                 <c:pt idx="0">
-                  <c:v>1030.87</c:v>
+                  <c:v>20.2</c:v>
                 </c:pt>
                 <c:pt idx="1">
-                  <c:v>1030.87</c:v>
+                  <c:v>19.8</c:v>
                 </c:pt>
                 <c:pt idx="2">
-                  <c:v>1030.87</c:v>
+                  <c:v>19.4</c:v>
                 </c:pt>
                 <c:pt idx="3">
-                  <c:v>1030.87</c:v>
+                  <c:v>19.1</c:v>
                 </c:pt>
                 <c:pt idx="4">
-                  <c:v>1030.87</c:v>
+                  <c:v>18.6</c:v>
                 </c:pt>
                 <c:pt idx="5">
-                  <c:v>1030.87</c:v>
+                  <c:v>18.1</c:v>
                 </c:pt>
                 <c:pt idx="6">
-                  <c:v>1030.87</c:v>
+                  <c:v>17.9</c:v>
                 </c:pt>
                 <c:pt idx="7">
-                  <c:v>1030.87</c:v>
+                  <c:v>17.6</c:v>
                 </c:pt>
                 <c:pt idx="8">
-                  <c:v>1030.87</c:v>
+                  <c:v>17.3</c:v>
                 </c:pt>
                 <c:pt idx="9">
-                  <c:v>1030.87</c:v>
+                  <c:v>17.1</c:v>
                 </c:pt>
                 <c:pt idx="10">
-                  <c:v>1030.87</c:v>
+                  <c:v>17.2</c:v>
                 </c:pt>
                 <c:pt idx="11">
-                  <c:v>1030.87</c:v>
+                  <c:v>16.7</c:v>
                 </c:pt>
                 <c:pt idx="12">
-                  <c:v>1030.87</c:v>
+                  <c:v>16.7</c:v>
                 </c:pt>
                 <c:pt idx="13">
-                  <c:v>1030.87</c:v>
+                  <c:v>16.4</c:v>
                 </c:pt>
                 <c:pt idx="14">
-                  <c:v>1030.87</c:v>
+                  <c:v>16.1</c:v>
                 </c:pt>
                 <c:pt idx="15">
-                  <c:v>1030.87</c:v>
+                  <c:v>16.2</c:v>
                 </c:pt>
                 <c:pt idx="16">
-                  <c:v>1030.87</c:v>
+                  <c:v>16.1</c:v>
                 </c:pt>
                 <c:pt idx="17">
-                  <c:v>1030.87</c:v>
+                  <c:v>16</c:v>
                 </c:pt>
                 <c:pt idx="18">
-                  <c:v>1030.87</c:v>
+                  <c:v>15.7</c:v>
                 </c:pt>
                 <c:pt idx="19">
-                  <c:v>1030.87</c:v>
+                  <c:v>15.8</c:v>
                 </c:pt>
                 <c:pt idx="20">
-                  <c:v>1030.87</c:v>
+                  <c:v>15.6</c:v>
                 </c:pt>
                 <c:pt idx="21">
-                  <c:v>1030.87</c:v>
+                  <c:v>15.6</c:v>
                 </c:pt>
                 <c:pt idx="22">
-                  <c:v>1030.87</c:v>
+                  <c:v>15.7</c:v>
                 </c:pt>
                 <c:pt idx="23">
-                  <c:v>1030.87</c:v>
+                  <c:v>15.3</c:v>
                 </c:pt>
                 <c:pt idx="24">
-                  <c:v>1030.87</c:v>
+                  <c:v>15.3</c:v>
                 </c:pt>
                 <c:pt idx="25">
-                  <c:v>1030.87</c:v>
+                  <c:v>15.3</c:v>
                 </c:pt>
                 <c:pt idx="26">
-                  <c:v>1030.87</c:v>
+                  <c:v>15.3</c:v>
                 </c:pt>
                 <c:pt idx="27">
-                  <c:v>1030.87</c:v>
+                  <c:v>15.5</c:v>
                 </c:pt>
                 <c:pt idx="28">
-                  <c:v>1030.87</c:v>
+                  <c:v>15.3</c:v>
                 </c:pt>
                 <c:pt idx="29">
-                  <c:v>1030.87</c:v>
+                  <c:v>15.2</c:v>
                 </c:pt>
                 <c:pt idx="30">
-                  <c:v>1030.87</c:v>
+                  <c:v>15.1</c:v>
                 </c:pt>
                 <c:pt idx="31">
-                  <c:v>1030.87</c:v>
+                  <c:v>15</c:v>
                 </c:pt>
                 <c:pt idx="32">
-                  <c:v>1030.87</c:v>
-                </c:pt>
-                <c:pt idx="33">
-                  <c:v>1030.87</c:v>
-                </c:pt>
-                <c:pt idx="34">
-                  <c:v>1030.87</c:v>
-                </c:pt>
-                <c:pt idx="35">
-                  <c:v>1030.87</c:v>
-                </c:pt>
-                <c:pt idx="36">
-                  <c:v>1030.87</c:v>
-                </c:pt>
-                <c:pt idx="37">
-                  <c:v>1030.87</c:v>
-                </c:pt>
-                <c:pt idx="38">
-                  <c:v>1030.87</c:v>
-                </c:pt>
-                <c:pt idx="39">
-                  <c:v>1030.87</c:v>
-                </c:pt>
-                <c:pt idx="40">
-                  <c:v>1030.87</c:v>
-                </c:pt>
-                <c:pt idx="41">
-                  <c:v>1030.87</c:v>
-                </c:pt>
-                <c:pt idx="42">
-                  <c:v>1030.87</c:v>
-                </c:pt>
-                <c:pt idx="43">
-                  <c:v>1030.87</c:v>
-                </c:pt>
-                <c:pt idx="44">
-                  <c:v>1030.87</c:v>
-                </c:pt>
-                <c:pt idx="45">
-                  <c:v>1030.87</c:v>
-                </c:pt>
-                <c:pt idx="46">
-                  <c:v>1030.87</c:v>
-                </c:pt>
-                <c:pt idx="47">
-                  <c:v>1030.87</c:v>
-                </c:pt>
-                <c:pt idx="48">
-                  <c:v>1030.87</c:v>
-                </c:pt>
-                <c:pt idx="49">
-                  <c:v>1030.87</c:v>
-                </c:pt>
-                <c:pt idx="50">
-                  <c:v>1030.87</c:v>
-                </c:pt>
-                <c:pt idx="51">
-                  <c:v>1030.87</c:v>
-                </c:pt>
-                <c:pt idx="52">
-                  <c:v>1030.87</c:v>
-                </c:pt>
-                <c:pt idx="53">
-                  <c:v>1030.87</c:v>
-                </c:pt>
-                <c:pt idx="54">
-                  <c:v>1030.87</c:v>
-                </c:pt>
-                <c:pt idx="55">
-                  <c:v>1030.87</c:v>
-                </c:pt>
-                <c:pt idx="56">
-                  <c:v>1030.87</c:v>
-                </c:pt>
-                <c:pt idx="57">
-                  <c:v>1030.87</c:v>
-                </c:pt>
-                <c:pt idx="58">
-                  <c:v>1030.87</c:v>
-                </c:pt>
-                <c:pt idx="59">
-                  <c:v>1030.87</c:v>
-                </c:pt>
-                <c:pt idx="60">
-                  <c:v>1030.87</c:v>
-                </c:pt>
-                <c:pt idx="61">
-                  <c:v>1030.87</c:v>
-                </c:pt>
-                <c:pt idx="62">
-                  <c:v>1030.87</c:v>
-                </c:pt>
-                <c:pt idx="63">
-                  <c:v>1030.87</c:v>
-                </c:pt>
-                <c:pt idx="64">
-                  <c:v>1030.87</c:v>
-                </c:pt>
-                <c:pt idx="65">
-                  <c:v>1030.87</c:v>
-                </c:pt>
-                <c:pt idx="66">
-                  <c:v>1030.87</c:v>
-                </c:pt>
-                <c:pt idx="67">
-                  <c:v>1030.87</c:v>
-                </c:pt>
-                <c:pt idx="68">
-                  <c:v>1030.87</c:v>
-                </c:pt>
-                <c:pt idx="69">
-                  <c:v>1030.87</c:v>
-                </c:pt>
-                <c:pt idx="70">
-                  <c:v>1030.87</c:v>
-                </c:pt>
-                <c:pt idx="71">
-                  <c:v>1030.87</c:v>
-                </c:pt>
-                <c:pt idx="72">
-                  <c:v>1030.87</c:v>
-                </c:pt>
-                <c:pt idx="73">
-                  <c:v>1030.87</c:v>
-                </c:pt>
-                <c:pt idx="74">
-                  <c:v>1030.87</c:v>
-                </c:pt>
-                <c:pt idx="75">
-                  <c:v>1030.87</c:v>
-                </c:pt>
-                <c:pt idx="76">
-                  <c:v>1030.87</c:v>
-                </c:pt>
-                <c:pt idx="77">
-                  <c:v>1030.87</c:v>
-                </c:pt>
-                <c:pt idx="78">
-                  <c:v>1030.87</c:v>
-                </c:pt>
-                <c:pt idx="79">
-                  <c:v>1030.87</c:v>
+                  <c:v>15.1</c:v>
                 </c:pt>
               </c:numCache>
             </c:numRef>
@@ -1418,7 +854,7 @@
               <c:strCache>
                 <c:ptCount val="1"/>
                 <c:pt idx="0">
-                  <c:v>Gennemsnit pr. time</c:v>
+                  <c:v>T-14 havre</c:v>
                 </c:pt>
               </c:strCache>
             </c:strRef>
@@ -1480,12 +916,12 @@
           </c:marker>
           <c:cat>
             <c:multiLvlStrRef>
-              <c:f>Sheet1!$A$2:$A$81</c:f>
+              <c:f>Sheet1!$A$2:$A$34</c:f>
               <c:multiLvlStrCache>
-                <c:ptCount val="80"/>
+                <c:ptCount val="33"/>
                 <c:lvl>
                   <c:pt idx="0">
-                    <c:v/>
+                    <c:v>0 t</c:v>
                   </c:pt>
                   <c:pt idx="1">
                     <c:v/>
@@ -1503,13 +939,13 @@
                     <c:v/>
                   </c:pt>
                   <c:pt idx="6">
-                    <c:v/>
+                    <c:v>24 t</c:v>
                   </c:pt>
                   <c:pt idx="7">
                     <c:v/>
                   </c:pt>
                   <c:pt idx="8">
-                    <c:v>Man</c:v>
+                    <c:v/>
                   </c:pt>
                   <c:pt idx="9">
                     <c:v/>
@@ -1521,7 +957,7 @@
                     <c:v/>
                   </c:pt>
                   <c:pt idx="12">
-                    <c:v/>
+                    <c:v>48 t</c:v>
                   </c:pt>
                   <c:pt idx="13">
                     <c:v/>
@@ -1539,7 +975,7 @@
                     <c:v/>
                   </c:pt>
                   <c:pt idx="18">
-                    <c:v/>
+                    <c:v>72 t</c:v>
                   </c:pt>
                   <c:pt idx="19">
                     <c:v/>
@@ -1557,7 +993,7 @@
                     <c:v/>
                   </c:pt>
                   <c:pt idx="24">
-                    <c:v>Tir</c:v>
+                    <c:v>96 t</c:v>
                   </c:pt>
                   <c:pt idx="25">
                     <c:v/>
@@ -1575,153 +1011,12 @@
                     <c:v/>
                   </c:pt>
                   <c:pt idx="30">
-                    <c:v/>
+                    <c:v>120 t</c:v>
                   </c:pt>
                   <c:pt idx="31">
                     <c:v/>
                   </c:pt>
                   <c:pt idx="32">
-                    <c:v/>
-                  </c:pt>
-                  <c:pt idx="33">
-                    <c:v/>
-                  </c:pt>
-                  <c:pt idx="34">
-                    <c:v/>
-                  </c:pt>
-                  <c:pt idx="35">
-                    <c:v/>
-                  </c:pt>
-                  <c:pt idx="36">
-                    <c:v/>
-                  </c:pt>
-                  <c:pt idx="37">
-                    <c:v/>
-                  </c:pt>
-                  <c:pt idx="38">
-                    <c:v/>
-                  </c:pt>
-                  <c:pt idx="39">
-                    <c:v/>
-                  </c:pt>
-                  <c:pt idx="40">
-                    <c:v>Ons</c:v>
-                  </c:pt>
-                  <c:pt idx="41">
-                    <c:v/>
-                  </c:pt>
-                  <c:pt idx="42">
-                    <c:v/>
-                  </c:pt>
-                  <c:pt idx="43">
-                    <c:v/>
-                  </c:pt>
-                  <c:pt idx="44">
-                    <c:v/>
-                  </c:pt>
-                  <c:pt idx="45">
-                    <c:v/>
-                  </c:pt>
-                  <c:pt idx="46">
-                    <c:v/>
-                  </c:pt>
-                  <c:pt idx="47">
-                    <c:v/>
-                  </c:pt>
-                  <c:pt idx="48">
-                    <c:v/>
-                  </c:pt>
-                  <c:pt idx="49">
-                    <c:v/>
-                  </c:pt>
-                  <c:pt idx="50">
-                    <c:v/>
-                  </c:pt>
-                  <c:pt idx="51">
-                    <c:v/>
-                  </c:pt>
-                  <c:pt idx="52">
-                    <c:v/>
-                  </c:pt>
-                  <c:pt idx="53">
-                    <c:v/>
-                  </c:pt>
-                  <c:pt idx="54">
-                    <c:v/>
-                  </c:pt>
-                  <c:pt idx="55">
-                    <c:v/>
-                  </c:pt>
-                  <c:pt idx="56">
-                    <c:v>Tor</c:v>
-                  </c:pt>
-                  <c:pt idx="57">
-                    <c:v/>
-                  </c:pt>
-                  <c:pt idx="58">
-                    <c:v/>
-                  </c:pt>
-                  <c:pt idx="59">
-                    <c:v/>
-                  </c:pt>
-                  <c:pt idx="60">
-                    <c:v/>
-                  </c:pt>
-                  <c:pt idx="61">
-                    <c:v/>
-                  </c:pt>
-                  <c:pt idx="62">
-                    <c:v/>
-                  </c:pt>
-                  <c:pt idx="63">
-                    <c:v/>
-                  </c:pt>
-                  <c:pt idx="64">
-                    <c:v/>
-                  </c:pt>
-                  <c:pt idx="65">
-                    <c:v/>
-                  </c:pt>
-                  <c:pt idx="66">
-                    <c:v/>
-                  </c:pt>
-                  <c:pt idx="67">
-                    <c:v/>
-                  </c:pt>
-                  <c:pt idx="68">
-                    <c:v/>
-                  </c:pt>
-                  <c:pt idx="69">
-                    <c:v/>
-                  </c:pt>
-                  <c:pt idx="70">
-                    <c:v/>
-                  </c:pt>
-                  <c:pt idx="71">
-                    <c:v/>
-                  </c:pt>
-                  <c:pt idx="72">
-                    <c:v>Fre</c:v>
-                  </c:pt>
-                  <c:pt idx="73">
-                    <c:v/>
-                  </c:pt>
-                  <c:pt idx="74">
-                    <c:v/>
-                  </c:pt>
-                  <c:pt idx="75">
-                    <c:v/>
-                  </c:pt>
-                  <c:pt idx="76">
-                    <c:v/>
-                  </c:pt>
-                  <c:pt idx="77">
-                    <c:v/>
-                  </c:pt>
-                  <c:pt idx="78">
-                    <c:v/>
-                  </c:pt>
-                  <c:pt idx="79">
                     <c:v/>
                   </c:pt>
                 </c:lvl>
@@ -1730,249 +1025,108 @@
           </c:cat>
           <c:val>
             <c:numRef>
-              <c:f>Sheet1!$D$2:$D$81</c:f>
+              <c:f>Sheet1!$D$2:$D$34</c:f>
               <c:numCache>
                 <c:formatCode>General</c:formatCode>
-                <c:ptCount val="80"/>
+                <c:ptCount val="33"/>
                 <c:pt idx="0">
-                  <c:v>1034.62</c:v>
+                  <c:v>20.8</c:v>
                 </c:pt>
                 <c:pt idx="1">
-                  <c:v>1032.28</c:v>
+                  <c:v>20.3</c:v>
                 </c:pt>
                 <c:pt idx="2">
-                  <c:v>1033.8</c:v>
+                  <c:v>19.6</c:v>
                 </c:pt>
                 <c:pt idx="3">
-                  <c:v>1033.28</c:v>
+                  <c:v>18.9</c:v>
                 </c:pt>
                 <c:pt idx="4">
-                  <c:v>1035.7</c:v>
+                  <c:v>18.9</c:v>
                 </c:pt>
                 <c:pt idx="5">
-                  <c:v>1035</c:v>
+                  <c:v>18.6</c:v>
                 </c:pt>
                 <c:pt idx="6">
-                  <c:v>1034.24</c:v>
+                  <c:v>18.1</c:v>
                 </c:pt>
                 <c:pt idx="7">
-                  <c:v>1036.82</c:v>
+                  <c:v>18.3</c:v>
                 </c:pt>
                 <c:pt idx="8">
-                  <c:v>1037.18</c:v>
+                  <c:v>18</c:v>
                 </c:pt>
                 <c:pt idx="9">
-                  <c:v>1033.98</c:v>
+                  <c:v>17.9</c:v>
                 </c:pt>
                 <c:pt idx="10">
-                  <c:v>1034.64</c:v>
+                  <c:v>17.8</c:v>
                 </c:pt>
                 <c:pt idx="11">
-                  <c:v>1036.14</c:v>
+                  <c:v>17.9</c:v>
                 </c:pt>
                 <c:pt idx="12">
-                  <c:v>1038.16</c:v>
+                  <c:v>17.8</c:v>
                 </c:pt>
                 <c:pt idx="13">
-                  <c:v>1034.1</c:v>
+                  <c:v>17.7</c:v>
                 </c:pt>
                 <c:pt idx="14">
-                  <c:v>1033.48</c:v>
+                  <c:v>17.8</c:v>
                 </c:pt>
                 <c:pt idx="15">
-                  <c:v>1033.6</c:v>
+                  <c:v>17.5</c:v>
                 </c:pt>
                 <c:pt idx="16">
-                  <c:v>1033.32</c:v>
+                  <c:v>17.7</c:v>
                 </c:pt>
                 <c:pt idx="17">
-                  <c:v>1036.16</c:v>
+                  <c:v>17.5</c:v>
                 </c:pt>
                 <c:pt idx="18">
-                  <c:v>1035.92</c:v>
+                  <c:v>17.5</c:v>
                 </c:pt>
                 <c:pt idx="19">
-                  <c:v>1035.82</c:v>
+                  <c:v>17.6</c:v>
                 </c:pt>
                 <c:pt idx="20">
-                  <c:v>1031.9</c:v>
+                  <c:v>17.6</c:v>
                 </c:pt>
                 <c:pt idx="21">
-                  <c:v>1033.26</c:v>
+                  <c:v>17.6</c:v>
                 </c:pt>
                 <c:pt idx="22">
-                  <c:v>1037.64</c:v>
+                  <c:v>17.5</c:v>
                 </c:pt>
                 <c:pt idx="23">
-                  <c:v>1034.38</c:v>
+                  <c:v>17.5</c:v>
                 </c:pt>
                 <c:pt idx="24">
-                  <c:v>1032.6</c:v>
+                  <c:v>17.5</c:v>
                 </c:pt>
                 <c:pt idx="25">
-                  <c:v>1033.36</c:v>
+                  <c:v>17.5</c:v>
                 </c:pt>
                 <c:pt idx="26">
-                  <c:v>1033.86</c:v>
+                  <c:v>17.7</c:v>
                 </c:pt>
                 <c:pt idx="27">
-                  <c:v>1035.86</c:v>
+                  <c:v>17.5</c:v>
                 </c:pt>
                 <c:pt idx="28">
-                  <c:v>1033.34</c:v>
+                  <c:v>17.5</c:v>
                 </c:pt>
                 <c:pt idx="29">
-                  <c:v>1035.72</c:v>
+                  <c:v>17.6</c:v>
                 </c:pt>
                 <c:pt idx="30">
-                  <c:v>1036.08</c:v>
+                  <c:v>17.6</c:v>
                 </c:pt>
                 <c:pt idx="31">
-                  <c:v>1033.2</c:v>
+                  <c:v>17.5</c:v>
                 </c:pt>
                 <c:pt idx="32">
-                  <c:v>1034.18</c:v>
-                </c:pt>
-                <c:pt idx="33">
-                  <c:v>1036.48</c:v>
-                </c:pt>
-                <c:pt idx="34">
-                  <c:v>1034.22</c:v>
-                </c:pt>
-                <c:pt idx="35">
-                  <c:v>1034.22</c:v>
-                </c:pt>
-                <c:pt idx="36">
-                  <c:v>1034.36</c:v>
-                </c:pt>
-                <c:pt idx="37">
-                  <c:v>1035.42</c:v>
-                </c:pt>
-                <c:pt idx="38">
-                  <c:v>1038.26</c:v>
-                </c:pt>
-                <c:pt idx="39">
-                  <c:v>1034.48</c:v>
-                </c:pt>
-                <c:pt idx="40">
-                  <c:v>1032</c:v>
-                </c:pt>
-                <c:pt idx="41">
-                  <c:v>1031.2</c:v>
-                </c:pt>
-                <c:pt idx="42">
-                  <c:v>1029</c:v>
-                </c:pt>
-                <c:pt idx="43">
-                  <c:v>1029.22</c:v>
-                </c:pt>
-                <c:pt idx="44">
-                  <c:v>1024.66</c:v>
-                </c:pt>
-                <c:pt idx="45">
-                  <c:v>1023.04</c:v>
-                </c:pt>
-                <c:pt idx="46">
-                  <c:v>1019.74</c:v>
-                </c:pt>
-                <c:pt idx="47">
-                  <c:v>1021.12</c:v>
-                </c:pt>
-                <c:pt idx="48">
-                  <c:v>1033.58</c:v>
-                </c:pt>
-                <c:pt idx="49">
-                  <c:v>1036.36</c:v>
-                </c:pt>
-                <c:pt idx="50">
-                  <c:v>1036.06</c:v>
-                </c:pt>
-                <c:pt idx="51">
-                  <c:v>1035.34</c:v>
-                </c:pt>
-                <c:pt idx="52">
-                  <c:v>1034.5</c:v>
-                </c:pt>
-                <c:pt idx="53">
-                  <c:v>1037.16</c:v>
-                </c:pt>
-                <c:pt idx="54">
-                  <c:v>1033.1</c:v>
-                </c:pt>
-                <c:pt idx="55">
-                  <c:v>1034.84</c:v>
-                </c:pt>
-                <c:pt idx="56">
-                  <c:v>1034.42</c:v>
-                </c:pt>
-                <c:pt idx="57">
-                  <c:v>1032.14</c:v>
-                </c:pt>
-                <c:pt idx="58">
-                  <c:v>1035.64</c:v>
-                </c:pt>
-                <c:pt idx="59">
-                  <c:v>1037.98</c:v>
-                </c:pt>
-                <c:pt idx="60">
-                  <c:v>1035.64</c:v>
-                </c:pt>
-                <c:pt idx="61">
-                  <c:v>1036.7</c:v>
-                </c:pt>
-                <c:pt idx="62">
-                  <c:v>1034.76</c:v>
-                </c:pt>
-                <c:pt idx="63">
-                  <c:v>1034.72</c:v>
-                </c:pt>
-                <c:pt idx="64">
-                  <c:v>1034.38</c:v>
-                </c:pt>
-                <c:pt idx="65">
-                  <c:v>1035.06</c:v>
-                </c:pt>
-                <c:pt idx="66">
-                  <c:v>1035.66</c:v>
-                </c:pt>
-                <c:pt idx="67">
-                  <c:v>1036.24</c:v>
-                </c:pt>
-                <c:pt idx="68">
-                  <c:v>1034.72</c:v>
-                </c:pt>
-                <c:pt idx="69">
-                  <c:v>1033.06</c:v>
-                </c:pt>
-                <c:pt idx="70">
-                  <c:v>1035.78</c:v>
-                </c:pt>
-                <c:pt idx="71">
-                  <c:v>1034.3</c:v>
-                </c:pt>
-                <c:pt idx="72">
-                  <c:v>1034.48</c:v>
-                </c:pt>
-                <c:pt idx="73">
-                  <c:v>1035.66</c:v>
-                </c:pt>
-                <c:pt idx="74">
-                  <c:v>1034.8</c:v>
-                </c:pt>
-                <c:pt idx="75">
-                  <c:v>1032.86</c:v>
-                </c:pt>
-                <c:pt idx="76">
-                  <c:v>1036.38</c:v>
-                </c:pt>
-                <c:pt idx="77">
-                  <c:v>1035.54</c:v>
-                </c:pt>
-                <c:pt idx="78">
-                  <c:v>1034.96</c:v>
-                </c:pt>
-                <c:pt idx="79">
-                  <c:v>1035.48</c:v>
+                  <c:v>17.6</c:v>
                 </c:pt>
               </c:numCache>
             </c:numRef>
@@ -2054,8 +1208,8 @@
         <c:axId val="2094734552"/>
         <c:scaling>
           <c:orientation val="minMax"/>
-          <c:max val="1042"/>
-          <c:min val="1018"/>
+          <c:max val="21"/>
+          <c:min val="14"/>
         </c:scaling>
         <c:delete val="0"/>
         <c:axPos val="l"/>
@@ -2070,7 +1224,7 @@
             </a:ln>
           </c:spPr>
         </c:majorGridlines>
-        <c:numFmt formatCode="General" sourceLinked="0"/>
+        <c:numFmt formatCode="0&quot; %&quot;" sourceLinked="0"/>
         <c:majorTickMark val="out"/>
         <c:minorTickMark val="none"/>
         <c:tickLblPos val="nextTo"/>
@@ -2099,7 +1253,7 @@
         <c:crossAx val="2094734554"/>
         <c:crosses val="autoZero"/>
         <c:crossBetween val="between"/>
-        <c:majorUnit val="4"/>
+        <c:majorUnit val="1"/>
       </c:valAx>
       <c:spPr>
         <a:noFill/>
@@ -2132,507 +1286,6 @@
   <c:chart>
     <c:autoTitleDeleted val="1"/>
     <c:plotArea>
-      <c:layout>
-        <c:manualLayout>
-          <c:layoutTarget val="inner"/>
-          <c:xMode val="edge"/>
-          <c:yMode val="edge"/>
-          <c:x val="0.08"/>
-          <c:y val="0.06"/>
-          <c:w val="0.9"/>
-          <c:h val="0.8"/>
-        </c:manualLayout>
-      </c:layout>
-      <c:lineChart>
-        <c:varyColors val="0"/>
-        <c:ser>
-          <c:idx val="0"/>
-          <c:order val="0"/>
-          <c:tx>
-            <c:strRef>
-              <c:f>Sheet1!$B$1</c:f>
-              <c:strCache>
-                <c:ptCount val="1"/>
-                <c:pt idx="0">
-                  <c:v>Grænse</c:v>
-                </c:pt>
-              </c:strCache>
-            </c:strRef>
-          </c:tx>
-          <c:spPr>
-            <a:solidFill>
-              <a:srgbClr val="6E6E73"/>
-            </a:solidFill>
-            <a:ln w="25400" cap="flat">
-              <a:solidFill>
-                <a:srgbClr val="6E6E73"/>
-              </a:solidFill>
-              <a:prstDash val="solid"/>
-              <a:round/>
-            </a:ln>
-            <a:effectLst/>
-          </c:spPr>
-          <c:invertIfNegative val="0"/>
-          <c:dLbls>
-            <c:numFmt formatCode="#,##0" sourceLinked="0"/>
-            <c:txPr>
-              <a:bodyPr/>
-              <a:lstStyle/>
-              <a:p>
-                <a:pPr>
-                  <a:defRPr b="0" i="0" strike="noStrike" sz="1300" u="none">
-                    <a:solidFill>
-                      <a:srgbClr val="FFFFFF"/>
-                    </a:solidFill>
-                    <a:latin typeface="+mn-lt"/>
-                  </a:defRPr>
-                </a:pPr>
-              </a:p>
-            </c:txPr>
-            <c:showLegendKey val="0"/>
-            <c:showVal val="0"/>
-            <c:showCatName val="0"/>
-            <c:showSerName val="0"/>
-            <c:showPercent val="0"/>
-            <c:showBubbleSize val="0"/>
-            <c:showLeaderLines val="0"/>
-          </c:dLbls>
-          <c:marker>
-            <c:symbol val="none"/>
-            <c:size val="6"/>
-            <c:spPr>
-              <a:solidFill>
-                <a:srgbClr val="6E6E73"/>
-              </a:solidFill>
-              <a:ln w="9525" cap="flat">
-                <a:solidFill>
-                  <a:srgbClr val="6E6E73"/>
-                </a:solidFill>
-                <a:prstDash val="solid"/>
-                <a:round/>
-              </a:ln>
-              <a:effectLst/>
-            </c:spPr>
-          </c:marker>
-          <c:cat>
-            <c:multiLvlStrRef>
-              <c:f>Sheet1!$A$2:$A$14</c:f>
-              <c:multiLvlStrCache>
-                <c:ptCount val="13"/>
-                <c:lvl>
-                  <c:pt idx="0">
-                    <c:v>00.00</c:v>
-                  </c:pt>
-                  <c:pt idx="1">
-                    <c:v>01.00</c:v>
-                  </c:pt>
-                  <c:pt idx="2">
-                    <c:v>02.00</c:v>
-                  </c:pt>
-                  <c:pt idx="3">
-                    <c:v>03.00</c:v>
-                  </c:pt>
-                  <c:pt idx="4">
-                    <c:v>04.00</c:v>
-                  </c:pt>
-                  <c:pt idx="5">
-                    <c:v>05.00</c:v>
-                  </c:pt>
-                  <c:pt idx="6">
-                    <c:v>06.00</c:v>
-                  </c:pt>
-                  <c:pt idx="7">
-                    <c:v>07.00</c:v>
-                  </c:pt>
-                  <c:pt idx="8">
-                    <c:v>08.00</c:v>
-                  </c:pt>
-                  <c:pt idx="9">
-                    <c:v>09.00</c:v>
-                  </c:pt>
-                  <c:pt idx="10">
-                    <c:v>10.00</c:v>
-                  </c:pt>
-                  <c:pt idx="11">
-                    <c:v>11.00</c:v>
-                  </c:pt>
-                  <c:pt idx="12">
-                    <c:v>12.00</c:v>
-                  </c:pt>
-                </c:lvl>
-              </c:multiLvlStrCache>
-            </c:multiLvlStrRef>
-          </c:cat>
-          <c:val>
-            <c:numRef>
-              <c:f>Sheet1!$B$2:$B$14</c:f>
-              <c:numCache>
-                <c:formatCode>General</c:formatCode>
-                <c:ptCount val="13"/>
-                <c:pt idx="0">
-                  <c:v>5</c:v>
-                </c:pt>
-                <c:pt idx="1">
-                  <c:v>5</c:v>
-                </c:pt>
-                <c:pt idx="2">
-                  <c:v>5</c:v>
-                </c:pt>
-                <c:pt idx="3">
-                  <c:v>5</c:v>
-                </c:pt>
-                <c:pt idx="4">
-                  <c:v>5</c:v>
-                </c:pt>
-                <c:pt idx="5">
-                  <c:v>5</c:v>
-                </c:pt>
-                <c:pt idx="6">
-                  <c:v>5</c:v>
-                </c:pt>
-                <c:pt idx="7">
-                  <c:v>5</c:v>
-                </c:pt>
-                <c:pt idx="8">
-                  <c:v>5</c:v>
-                </c:pt>
-                <c:pt idx="9">
-                  <c:v>5</c:v>
-                </c:pt>
-                <c:pt idx="10">
-                  <c:v>5</c:v>
-                </c:pt>
-                <c:pt idx="11">
-                  <c:v>5</c:v>
-                </c:pt>
-                <c:pt idx="12">
-                  <c:v>5</c:v>
-                </c:pt>
-              </c:numCache>
-            </c:numRef>
-          </c:val>
-          <c:smooth val="0"/>
-        </c:ser>
-        <c:ser>
-          <c:idx val="1"/>
-          <c:order val="1"/>
-          <c:tx>
-            <c:strRef>
-              <c:f>Sheet1!$C$1</c:f>
-              <c:strCache>
-                <c:ptCount val="1"/>
-                <c:pt idx="0">
-                  <c:v>Kølerum 2</c:v>
-                </c:pt>
-              </c:strCache>
-            </c:strRef>
-          </c:tx>
-          <c:spPr>
-            <a:solidFill>
-              <a:srgbClr val="FFFFFF"/>
-            </a:solidFill>
-            <a:ln w="25400" cap="flat">
-              <a:solidFill>
-                <a:srgbClr val="FFFFFF"/>
-              </a:solidFill>
-              <a:prstDash val="solid"/>
-              <a:round/>
-            </a:ln>
-            <a:effectLst/>
-          </c:spPr>
-          <c:invertIfNegative val="0"/>
-          <c:dLbls>
-            <c:numFmt formatCode="#,##0" sourceLinked="0"/>
-            <c:txPr>
-              <a:bodyPr/>
-              <a:lstStyle/>
-              <a:p>
-                <a:pPr>
-                  <a:defRPr b="0" i="0" strike="noStrike" sz="1300" u="none">
-                    <a:solidFill>
-                      <a:srgbClr val="FFFFFF"/>
-                    </a:solidFill>
-                    <a:latin typeface="+mn-lt"/>
-                  </a:defRPr>
-                </a:pPr>
-              </a:p>
-            </c:txPr>
-            <c:showLegendKey val="0"/>
-            <c:showVal val="0"/>
-            <c:showCatName val="0"/>
-            <c:showSerName val="0"/>
-            <c:showPercent val="0"/>
-            <c:showBubbleSize val="0"/>
-            <c:showLeaderLines val="0"/>
-          </c:dLbls>
-          <c:marker>
-            <c:symbol val="none"/>
-            <c:size val="6"/>
-            <c:spPr>
-              <a:solidFill>
-                <a:srgbClr val="FFFFFF"/>
-              </a:solidFill>
-              <a:ln w="9525" cap="flat">
-                <a:solidFill>
-                  <a:srgbClr val="FFFFFF"/>
-                </a:solidFill>
-                <a:prstDash val="solid"/>
-                <a:round/>
-              </a:ln>
-              <a:effectLst/>
-            </c:spPr>
-          </c:marker>
-          <c:cat>
-            <c:multiLvlStrRef>
-              <c:f>Sheet1!$A$2:$A$14</c:f>
-              <c:multiLvlStrCache>
-                <c:ptCount val="13"/>
-                <c:lvl>
-                  <c:pt idx="0">
-                    <c:v>00.00</c:v>
-                  </c:pt>
-                  <c:pt idx="1">
-                    <c:v>01.00</c:v>
-                  </c:pt>
-                  <c:pt idx="2">
-                    <c:v>02.00</c:v>
-                  </c:pt>
-                  <c:pt idx="3">
-                    <c:v>03.00</c:v>
-                  </c:pt>
-                  <c:pt idx="4">
-                    <c:v>04.00</c:v>
-                  </c:pt>
-                  <c:pt idx="5">
-                    <c:v>05.00</c:v>
-                  </c:pt>
-                  <c:pt idx="6">
-                    <c:v>06.00</c:v>
-                  </c:pt>
-                  <c:pt idx="7">
-                    <c:v>07.00</c:v>
-                  </c:pt>
-                  <c:pt idx="8">
-                    <c:v>08.00</c:v>
-                  </c:pt>
-                  <c:pt idx="9">
-                    <c:v>09.00</c:v>
-                  </c:pt>
-                  <c:pt idx="10">
-                    <c:v>10.00</c:v>
-                  </c:pt>
-                  <c:pt idx="11">
-                    <c:v>11.00</c:v>
-                  </c:pt>
-                  <c:pt idx="12">
-                    <c:v>12.00</c:v>
-                  </c:pt>
-                </c:lvl>
-              </c:multiLvlStrCache>
-            </c:multiLvlStrRef>
-          </c:cat>
-          <c:val>
-            <c:numRef>
-              <c:f>Sheet1!$C$2:$C$14</c:f>
-              <c:numCache>
-                <c:formatCode>General</c:formatCode>
-                <c:ptCount val="13"/>
-                <c:pt idx="0">
-                  <c:v>3.8</c:v>
-                </c:pt>
-                <c:pt idx="1">
-                  <c:v>5.4</c:v>
-                </c:pt>
-                <c:pt idx="2">
-                  <c:v>6.8</c:v>
-                </c:pt>
-                <c:pt idx="3">
-                  <c:v>7.4</c:v>
-                </c:pt>
-                <c:pt idx="4">
-                  <c:v>6.1</c:v>
-                </c:pt>
-                <c:pt idx="5">
-                  <c:v>5.2</c:v>
-                </c:pt>
-                <c:pt idx="6">
-                  <c:v>4.3</c:v>
-                </c:pt>
-                <c:pt idx="7">
-                  <c:v>3.7</c:v>
-                </c:pt>
-                <c:pt idx="8">
-                  <c:v>3.6</c:v>
-                </c:pt>
-                <c:pt idx="9">
-                  <c:v>3.5</c:v>
-                </c:pt>
-                <c:pt idx="10">
-                  <c:v>3.4</c:v>
-                </c:pt>
-                <c:pt idx="11">
-                  <c:v>3.6</c:v>
-                </c:pt>
-                <c:pt idx="12">
-                  <c:v>3.8</c:v>
-                </c:pt>
-              </c:numCache>
-            </c:numRef>
-          </c:val>
-          <c:smooth val="0"/>
-        </c:ser>
-        <c:dLbls>
-          <c:numFmt formatCode="#,##0" sourceLinked="0"/>
-          <c:txPr>
-            <a:bodyPr/>
-            <a:lstStyle/>
-            <a:p>
-              <a:pPr>
-                <a:defRPr b="0" i="0" strike="noStrike" sz="1300" u="none">
-                  <a:solidFill>
-                    <a:srgbClr val="FFFFFF"/>
-                  </a:solidFill>
-                  <a:latin typeface="+mn-lt"/>
-                </a:defRPr>
-              </a:pPr>
-            </a:p>
-          </c:txPr>
-          <c:showLegendKey val="0"/>
-          <c:showVal val="0"/>
-          <c:showCatName val="0"/>
-          <c:showSerName val="0"/>
-          <c:showPercent val="0"/>
-          <c:showBubbleSize val="0"/>
-          <c:showLeaderLines val="0"/>
-        </c:dLbls>
-        <c:marker val="1"/>
-        <c:axId val="2094734554"/>
-        <c:axId val="2094734552"/>
-        <c:axId val="2094734556"/>
-      </c:lineChart>
-      <c:catAx>
-        <c:axId val="2094734554"/>
-        <c:scaling>
-          <c:orientation val="minMax"/>
-        </c:scaling>
-        <c:delete val="0"/>
-        <c:axPos val="b"/>
-        <c:numFmt formatCode="General" sourceLinked="1"/>
-        <c:majorTickMark val="none"/>
-        <c:minorTickMark val="none"/>
-        <c:tickLblPos val="low"/>
-        <c:spPr>
-          <a:ln w="12700" cap="flat">
-            <a:solidFill>
-              <a:srgbClr val="3A3A3C"/>
-            </a:solidFill>
-            <a:prstDash val="solid"/>
-            <a:round/>
-          </a:ln>
-        </c:spPr>
-        <c:txPr>
-          <a:bodyPr/>
-          <a:lstStyle/>
-          <a:p>
-            <a:pPr>
-              <a:defRPr sz="1300" b="0" i="0" u="none" strike="noStrike">
-                <a:solidFill>
-                  <a:srgbClr val="A1A1A6"/>
-                </a:solidFill>
-                <a:latin typeface="+mn-lt"/>
-              </a:defRPr>
-            </a:pPr>
-            <a:endParaRPr lang="en-US"/>
-          </a:p>
-        </c:txPr>
-        <c:crossAx val="2094734552"/>
-        <c:crosses val="autoZero"/>
-        <c:auto val="1"/>
-        <c:lblAlgn val="ctr"/>
-        <c:noMultiLvlLbl val="1"/>
-      </c:catAx>
-      <c:valAx>
-        <c:axId val="2094734552"/>
-        <c:scaling>
-          <c:orientation val="minMax"/>
-          <c:max val="8"/>
-          <c:min val="2"/>
-        </c:scaling>
-        <c:delete val="0"/>
-        <c:axPos val="l"/>
-        <c:majorGridlines>
-          <c:spPr>
-            <a:ln w="9525" cap="flat">
-              <a:solidFill>
-                <a:srgbClr val="2C2C2E"/>
-              </a:solidFill>
-              <a:prstDash val="solid"/>
-              <a:round/>
-            </a:ln>
-          </c:spPr>
-        </c:majorGridlines>
-        <c:numFmt formatCode="General" sourceLinked="0"/>
-        <c:majorTickMark val="out"/>
-        <c:minorTickMark val="none"/>
-        <c:tickLblPos val="nextTo"/>
-        <c:spPr>
-          <a:ln w="12700" cap="flat">
-            <a:noFill/>
-            <a:prstDash val="solid"/>
-            <a:round/>
-          </a:ln>
-        </c:spPr>
-        <c:txPr>
-          <a:bodyPr/>
-          <a:lstStyle/>
-          <a:p>
-            <a:pPr>
-              <a:defRPr sz="1200" b="0" i="0" u="none" strike="noStrike">
-                <a:solidFill>
-                  <a:srgbClr val="A1A1A6"/>
-                </a:solidFill>
-                <a:latin typeface="+mn-lt"/>
-              </a:defRPr>
-            </a:pPr>
-            <a:endParaRPr lang="en-US"/>
-          </a:p>
-        </c:txPr>
-        <c:crossAx val="2094734554"/>
-        <c:crosses val="autoZero"/>
-        <c:crossBetween val="between"/>
-        <c:majorUnit val="1"/>
-      </c:valAx>
-      <c:spPr>
-        <a:noFill/>
-        <a:ln>
-          <a:noFill/>
-        </a:ln>
-        <a:effectLst/>
-      </c:spPr>
-    </c:plotArea>
-    <c:plotVisOnly val="1"/>
-    <c:dispBlanksAs val="span"/>
-  </c:chart>
-  <c:spPr>
-    <a:noFill/>
-    <a:ln>
-      <a:noFill/>
-    </a:ln>
-    <a:effectLst/>
-  </c:spPr>
-  <c:externalData r:id="rId1">
-    <c:autoUpdate val="0"/>
-  </c:externalData>
-</c:chartSpace>
-</file>
-
-<file path=ppt/charts/chart3.xml><?xml version="1.0" encoding="utf-8"?>
-<c:chartSpace xmlns:c="http://schemas.openxmlformats.org/drawingml/2006/chart" xmlns:a="http://schemas.openxmlformats.org/drawingml/2006/main" xmlns:r="http://schemas.openxmlformats.org/officeDocument/2006/relationships">
-  <c:date1904 val="0"/>
-  <c:roundedCorners val="1"/>
-  <c:chart>
-    <c:autoTitleDeleted val="1"/>
-    <c:plotArea>
       <c:layout/>
       <c:barChart>
         <c:barDir val="bar"/>
@@ -2647,26 +1300,26 @@
               <c:strCache>
                 <c:ptCount val="1"/>
                 <c:pt idx="0">
-                  <c:v>Svind</c:v>
+                  <c:v>Kr. pr. ton</c:v>
                 </c:pt>
               </c:strCache>
             </c:strRef>
           </c:tx>
           <c:spPr>
             <a:solidFill>
-              <a:srgbClr val="3D74FF"/>
+              <a:srgbClr val="2C2C2E"/>
             </a:solidFill>
             <a:effectLst/>
           </c:spPr>
           <c:invertIfNegative val="0"/>
           <c:dLbls>
-            <c:numFmt formatCode="0.00&quot; %&quot;" sourceLinked="0"/>
+            <c:numFmt formatCode="0&quot; kr.&quot;" sourceLinked="0"/>
             <c:txPr>
               <a:bodyPr/>
               <a:lstStyle/>
               <a:p>
                 <a:pPr>
-                  <a:defRPr b="0" i="0" strike="noStrike" sz="1500" u="none">
+                  <a:defRPr b="0" i="0" strike="noStrike" sz="1200" u="none">
                     <a:solidFill>
                       <a:srgbClr val="FFFFFF"/>
                     </a:solidFill>
@@ -2689,7 +1342,7 @@
             <c:bubble3D val="0"/>
             <c:spPr>
               <a:solidFill>
-                <a:srgbClr val="3D74FF"/>
+                <a:srgbClr val="2C2C2E"/>
               </a:solidFill>
               <a:effectLst/>
             </c:spPr>
@@ -2738,26 +1391,152 @@
               <a:effectLst/>
             </c:spPr>
           </c:dPt>
+          <c:dPt>
+            <c:idx val="5"/>
+            <c:invertIfNegative val="0"/>
+            <c:bubble3D val="0"/>
+            <c:spPr>
+              <a:solidFill>
+                <a:srgbClr val="2C2C2E"/>
+              </a:solidFill>
+              <a:effectLst/>
+            </c:spPr>
+          </c:dPt>
+          <c:dPt>
+            <c:idx val="6"/>
+            <c:invertIfNegative val="0"/>
+            <c:bubble3D val="0"/>
+            <c:spPr>
+              <a:solidFill>
+                <a:srgbClr val="2C2C2E"/>
+              </a:solidFill>
+              <a:effectLst/>
+            </c:spPr>
+          </c:dPt>
+          <c:dPt>
+            <c:idx val="7"/>
+            <c:invertIfNegative val="0"/>
+            <c:bubble3D val="0"/>
+            <c:spPr>
+              <a:solidFill>
+                <a:srgbClr val="2C2C2E"/>
+              </a:solidFill>
+              <a:effectLst/>
+            </c:spPr>
+          </c:dPt>
+          <c:dPt>
+            <c:idx val="8"/>
+            <c:invertIfNegative val="0"/>
+            <c:bubble3D val="0"/>
+            <c:spPr>
+              <a:solidFill>
+                <a:srgbClr val="2C2C2E"/>
+              </a:solidFill>
+              <a:effectLst/>
+            </c:spPr>
+          </c:dPt>
+          <c:dPt>
+            <c:idx val="9"/>
+            <c:invertIfNegative val="0"/>
+            <c:bubble3D val="0"/>
+            <c:spPr>
+              <a:solidFill>
+                <a:srgbClr val="2C2C2E"/>
+              </a:solidFill>
+              <a:effectLst/>
+            </c:spPr>
+          </c:dPt>
+          <c:dPt>
+            <c:idx val="10"/>
+            <c:invertIfNegative val="0"/>
+            <c:bubble3D val="0"/>
+            <c:spPr>
+              <a:solidFill>
+                <a:srgbClr val="2C2C2E"/>
+              </a:solidFill>
+              <a:effectLst/>
+            </c:spPr>
+          </c:dPt>
+          <c:dPt>
+            <c:idx val="11"/>
+            <c:invertIfNegative val="0"/>
+            <c:bubble3D val="0"/>
+            <c:spPr>
+              <a:solidFill>
+                <a:srgbClr val="3D74FF"/>
+              </a:solidFill>
+              <a:effectLst/>
+            </c:spPr>
+          </c:dPt>
+          <c:dPt>
+            <c:idx val="12"/>
+            <c:invertIfNegative val="0"/>
+            <c:bubble3D val="0"/>
+            <c:spPr>
+              <a:solidFill>
+                <a:srgbClr val="2C2C2E"/>
+              </a:solidFill>
+              <a:effectLst/>
+            </c:spPr>
+          </c:dPt>
+          <c:dPt>
+            <c:idx val="13"/>
+            <c:invertIfNegative val="0"/>
+            <c:bubble3D val="0"/>
+            <c:spPr>
+              <a:solidFill>
+                <a:srgbClr val="2C2C2E"/>
+              </a:solidFill>
+              <a:effectLst/>
+            </c:spPr>
+          </c:dPt>
           <c:cat>
             <c:multiLvlStrRef>
-              <c:f>Sheet1!$A$2:$A$6</c:f>
+              <c:f>Sheet1!$A$2:$A$15</c:f>
               <c:multiLvlStrCache>
-                <c:ptCount val="5"/>
+                <c:ptCount val="14"/>
                 <c:lvl>
                   <c:pt idx="0">
-                    <c:v>Sødmælk</c:v>
+                    <c:v>T-01</c:v>
                   </c:pt>
                   <c:pt idx="1">
-                    <c:v>Letmælk</c:v>
+                    <c:v>T-02</c:v>
                   </c:pt>
                   <c:pt idx="2">
-                    <c:v>Skummetmælk</c:v>
+                    <c:v>T-03</c:v>
                   </c:pt>
                   <c:pt idx="3">
-                    <c:v>Minimælk</c:v>
+                    <c:v>T-04</c:v>
                   </c:pt>
                   <c:pt idx="4">
-                    <c:v>Kærnemælk</c:v>
+                    <c:v>T-05</c:v>
+                  </c:pt>
+                  <c:pt idx="5">
+                    <c:v>T-06</c:v>
+                  </c:pt>
+                  <c:pt idx="6">
+                    <c:v>T-07</c:v>
+                  </c:pt>
+                  <c:pt idx="7">
+                    <c:v>T-08</c:v>
+                  </c:pt>
+                  <c:pt idx="8">
+                    <c:v>T-09</c:v>
+                  </c:pt>
+                  <c:pt idx="9">
+                    <c:v>T-10</c:v>
+                  </c:pt>
+                  <c:pt idx="10">
+                    <c:v>T-11</c:v>
+                  </c:pt>
+                  <c:pt idx="11">
+                    <c:v>T-12</c:v>
+                  </c:pt>
+                  <c:pt idx="12">
+                    <c:v>T-13</c:v>
+                  </c:pt>
+                  <c:pt idx="13">
+                    <c:v>T-14</c:v>
                   </c:pt>
                 </c:lvl>
               </c:multiLvlStrCache>
@@ -2765,37 +1544,64 @@
           </c:cat>
           <c:val>
             <c:numRef>
-              <c:f>Sheet1!$B$2:$B$6</c:f>
+              <c:f>Sheet1!$B$2:$B$15</c:f>
               <c:numCache>
                 <c:formatCode>General</c:formatCode>
-                <c:ptCount val="5"/>
+                <c:ptCount val="14"/>
                 <c:pt idx="0">
-                  <c:v>1.7</c:v>
+                  <c:v>27</c:v>
                 </c:pt>
                 <c:pt idx="1">
-                  <c:v>1.37</c:v>
+                  <c:v>64</c:v>
                 </c:pt>
                 <c:pt idx="2">
-                  <c:v>1.29</c:v>
+                  <c:v>35</c:v>
                 </c:pt>
                 <c:pt idx="3">
-                  <c:v>1.28</c:v>
+                  <c:v>33</c:v>
                 </c:pt>
                 <c:pt idx="4">
-                  <c:v>1.15</c:v>
+                  <c:v>66</c:v>
+                </c:pt>
+                <c:pt idx="5">
+                  <c:v>24</c:v>
+                </c:pt>
+                <c:pt idx="6">
+                  <c:v>32</c:v>
+                </c:pt>
+                <c:pt idx="7">
+                  <c:v>30</c:v>
+                </c:pt>
+                <c:pt idx="8">
+                  <c:v>25</c:v>
+                </c:pt>
+                <c:pt idx="9">
+                  <c:v>77</c:v>
+                </c:pt>
+                <c:pt idx="10">
+                  <c:v>58</c:v>
+                </c:pt>
+                <c:pt idx="11">
+                  <c:v>104</c:v>
+                </c:pt>
+                <c:pt idx="12">
+                  <c:v>33</c:v>
+                </c:pt>
+                <c:pt idx="13">
+                  <c:v>52</c:v>
                 </c:pt>
               </c:numCache>
             </c:numRef>
           </c:val>
         </c:ser>
         <c:dLbls>
-          <c:numFmt formatCode="0.00&quot; %&quot;" sourceLinked="0"/>
+          <c:numFmt formatCode="0&quot; kr.&quot;" sourceLinked="0"/>
           <c:txPr>
             <a:bodyPr/>
             <a:lstStyle/>
             <a:p>
               <a:pPr>
-                <a:defRPr b="0" i="0" strike="noStrike" sz="1500" u="none">
+                <a:defRPr b="0" i="0" strike="noStrike" sz="1200" u="none">
                   <a:solidFill>
                     <a:srgbClr val="FFFFFF"/>
                   </a:solidFill>
@@ -2812,7 +1618,7 @@
           <c:showBubbleSize val="0"/>
           <c:showLeaderLines val="0"/>
         </c:dLbls>
-        <c:gapWidth val="45"/>
+        <c:gapWidth val="35"/>
         <c:overlap val="0"/>
         <c:axId val="2094734554"/>
         <c:axId val="2094734552"/>
@@ -2843,7 +1649,7 @@
           <a:lstStyle/>
           <a:p>
             <a:pPr>
-              <a:defRPr sz="1600" b="0" i="0" u="none" strike="noStrike">
+              <a:defRPr sz="1200" b="0" i="0" u="none" strike="noStrike">
                 <a:solidFill>
                   <a:srgbClr val="A1A1A6"/>
                 </a:solidFill>
@@ -2863,7 +1669,7 @@
         <c:axId val="2094734552"/>
         <c:scaling>
           <c:orientation val="minMax"/>
-          <c:max val="2.1"/>
+          <c:max val="125"/>
           <c:min val="0"/>
         </c:scaling>
         <c:delete val="1"/>
@@ -4725,7 +3531,7 @@
           <a:p>
             <a:r>
               <a:rPr lang="en-US" dirty="0"/>
-              <a:t>Åbn Procesteknolog_Fjordmejeriet_uge41.xlsx i Excel, og vis fanerne kort. Upload derefter filen til Claude, og kør prompterne én ad gangen. Spørg salen undervejs, hvor lang tid det ville tage dem i hånden.</a:t>
+              <a:t>Åbn Procesteknolog_Fjordtoerreriet_2026.xlsx i Excel, og vis fanerne kort. Upload derefter filen til Claude, og kør prompterne én ad gangen. Spørg salen undervejs, hvor lang tid det ville tage dem i hånden.</a:t>
             </a:r>
             <a:endParaRPr lang="en-US" dirty="0"/>
           </a:p>
@@ -4901,7 +3707,7 @@
           <a:p>
             <a:r>
               <a:rPr lang="en-US" dirty="0"/>
-              <a:t>Det skal AI finde i overblikket, sorteret efter alvor. Fredag 10.05 under 72 °C uden flowomstilling er det alvorligste. Derudover holdetid under 15 sekunder torsdag 16.00 til 16.25, dyk med omstilling tirsdag 14.20 til 14.30, Kølerum 2 op til 7,4 °C onsdag nat, undervægt på Fylder 3 onsdag aften, svind på 4,6 procent i batch 41-024 og fedt på 1,62 procent i batch 41-007.</a:t>
+              <a:t>Det skal AI finde i overblikket, sorteret efter alvor. Batch T-14 havre i PL2 har ligget på 17,6 procent siden 2. oktober, og lagtemperaturen er steget fra 14 til 29 grader på fire døgn. Det er begyndende varmgang og skal håndteres i dag. Derefter T-12 dild, der er tørret til 9,2 procent og dermed under grænsen, og brovægten, der mangler 4.100 kg på T-08 og 1.900 kg på T-10.</a:t>
             </a:r>
             <a:endParaRPr lang="en-US" dirty="0"/>
           </a:p>
@@ -4989,7 +3795,7 @@
           <a:p>
             <a:r>
               <a:rPr lang="en-US" dirty="0"/>
-              <a:t>Det skal AI finde. 7,36 °C torsdag 11.15 er en kommafejl. Operatørnoten siger, at temperaturen blev tastet manuelt, fordi skærmen frøs. Målingen mangler onsdag 09.40, hvor føleren faldt ud.</a:t>
+              <a:t>Det skal AI finde. 1,6 procent i T-04 mandag 17. august klokken 15 er en kommafejl. Målingerne før og efter er 16,1 og 16,0, og operatørnoten siger, at fugtmåleren døde, og at der blev tastet manuelt. Målingen mangler i T-05 tirsdag 18. august klokken 14, hvor prøven ikke blev taget.</a:t>
             </a:r>
             <a:endParaRPr lang="en-US" dirty="0"/>
           </a:p>
@@ -5077,7 +3883,7 @@
           <a:p>
             <a:r>
               <a:rPr lang="en-US" dirty="0"/>
-              <a:t>Det skal AI finde. Onsdag aften fra 16.30 til 21.30 ligger gennemsnittet under nedre kontrolgrænse, og seks prøver er under 1020 g. Operatørnoten onsdag 19.30 siger, at vægtene var lave, og torsdag morgen blev dysen skiftet. Kapabilitet. Ppk for hele ugen er 1,15 med samlet spredning. Uden onsdag aften er den 1,76. Cpk med spredning inden for prøverne er ca. 1,65. AI kan regne lidt anderledes afhængigt af metoden.</a:t>
+              <a:t>Det skal AI finde. Tørstof er ind gange 1 minus vandindhold ind. Masse ud er tørstof delt med 1 minus vandindhold ud. Vand fjernet er forskellen. For T-07 giver det 183.540 kg tørstof, 216.184 kg ud og 13.816 kg vand, altså 108 kg i timen over 128 timer. Med 1.500 kg vand mere fjernet ville tørstofprocenten være 85,5. Tallene er de samme som i Opgave 13, så de studerende kan tjekke AI mod deres egen udregning. Spørg salen, hvor lang tid 14 batches ville tage i hånden.</a:t>
             </a:r>
             <a:endParaRPr lang="en-US" dirty="0"/>
           </a:p>
@@ -5165,7 +3971,7 @@
           <a:p>
             <a:r>
               <a:rPr lang="en-US" dirty="0"/>
-              <a:t>Det skal AI finde. Kølerum 2 lå over 5,0 °C fra 01.00 til 05.00 med top på 7,4 °C kl. 03.00 og var tilbage under grænsen kl. 06.00. Operatørnoten siger, at døren stod på klem efter natlevering, og at varerne blev flyttet til Kølerum 1. Kølerum 1 havde 5,1 °C fredag 13.00 under modtagelse. Spørg AI, hvad der skal stå i egenkontrollen.</a:t>
+              <a:t>Det skal AI finde. T-14 gik i stå fredag 2. oktober om aftenen ved 17,5 til 17,7 procent, mens T-07 nåede grænsen på samme tid. Fanen Luft forklarer det. Den relative luftfugtighed lå på 91 procent fra 1. til 7. oktober med 37 millimeter regn, og omgivelsesluft kan ikke tørre korn i den luft. Lagtemperaturen begynder at stige 5. oktober og passerer 25 grader 8. oktober. Det er varmgang, og batchen skal flyttes eller have varme på nu.</a:t>
             </a:r>
             <a:endParaRPr lang="en-US" dirty="0"/>
           </a:p>
@@ -5341,7 +4147,7 @@
           <a:p>
             <a:r>
               <a:rPr lang="en-US" dirty="0"/>
-              <a:t>Det skal AI finde. Samlet svind 1,37 procent svarende til 4.522 kg. Sødmælk ligger højest på grund af batch 41-024 torsdag aften med 4,6 procent svind. Batch 41-007 letmælk tirsdag har 1,62 procent fedt, hvor specifikationen er 1,45 til 1,55.</a:t>
+              <a:t>Det skal AI finde. Strøm pr. ton færdig vare. Tang koster 24 til 25 kroner, korn 27 til 35 og krydderurter 58 til 77, fordi de tørres med varme. T-12 dild skiller sig ud med 104 kroner pr. ton. Batchen kørte 72 timer, hvor T-02 med samme vare tog 44, fordi ingen slukkede fredag. Det ekstra døgn svarer til cirka 1.350 kilowatttimer og 2.500 kroner, og dilden endte på 9,2 procent, under grænsen på 10. T-14 har brugt 6.420 kilowatttimer og er ikke færdig. Uden for grænserne er altså T-12 og T-14.</a:t>
             </a:r>
             <a:endParaRPr lang="en-US" dirty="0"/>
           </a:p>
@@ -5429,7 +4235,7 @@
           <a:p>
             <a:r>
               <a:rPr lang="en-US" dirty="0"/>
-              <a:t>Kopiér formlen ind i Excel live i kolonne F i fanen Pasteur, og træk den ned. Vis, at den markerer de rigtige rækker.</a:t>
+              <a:t>Kopiér formlen ind i Excel live i en ny kolonne i fanen Batches, og træk den ned. Vis, at den giver 13.816 for T-07, som er facit i Opgave 13.</a:t>
             </a:r>
             <a:endParaRPr lang="en-US" dirty="0"/>
           </a:p>
@@ -5517,7 +4323,7 @@
           <a:p>
             <a:r>
               <a:rPr lang="en-US" dirty="0"/>
-              <a:t>Det skal AI finde. Noterne forklarer dampventilen tirsdag, døren til Kølerum 2 onsdag nat, dysen på Fylder 3 onsdag aften, kommafejlen torsdag 11.15, flowet torsdag eftermiddag og CIP-tabet torsdag aften. Fredag 10.05 har kun en note om, at der ikke kom omstilling, og ingen forklaring. Den skal undersøges.</a:t>
+              <a:t>Det skal AI finde. Noterne forklarer regnen i uge 33, kommafejlen og den glemte prøve i uge 34, de 1.900 kg frasorteret timian i uge 36, weekenden med dilden i uge 37 og den tunge luft i uge 40. T-08 i uge 36 mangler 4.100 kg på brovægten, og ingen note forklarer det. Det er 2,2 procent af batchen, og grænsen er 1 procent. Den skal undersøges. Vejning, spild eller svind.</a:t>
             </a:r>
             <a:endParaRPr lang="en-US" dirty="0"/>
           </a:p>
@@ -5605,7 +4411,7 @@
           <a:p>
             <a:r>
               <a:rPr lang="en-US" dirty="0"/>
-              <a:t>Bed AI om et Excel-dashboard til morgenmødet og et udkast til afvigelsesrapport for fredag 10.05 med 5 x hvorfor. Mockuppen viser opbygningen. Selve indholdet i 5 x hvorfor skriver AI ud fra data og noter, og teamet tager det derfra.</a:t>
+              <a:t>Bed AI om et Excel-dashboard til morgenmødet og et udkast til afvigelsesrapport for T-14 med 5 x hvorfor. Mockuppen viser opbygningen. Selve indholdet i 5 x hvorfor skriver AI ud fra fugtlog, vejrdata og noter, og teamet tager det derfra.</a:t>
             </a:r>
             <a:endParaRPr lang="en-US" dirty="0"/>
           </a:p>
@@ -7101,7 +5907,7 @@
           <a:p>
             <a:r>
               <a:rPr lang="en-US" dirty="0"/>
-              <a:t>Live build. Indsæt prompten i Claude Code, og fortæl, hvad der sker, mens den arbejder. Vis ændringerne kort, før du committer. Push til GitHub, og Vercel lægger appen online. Prompten lyder sådan. Kontekst. Jeg underviser procesteknologer i egenkontrol. Appen skal bruges på Fjordmejeriet, en fiktiv case fra undervisningen. Rolle. Du er en erfaren frontend-udvikler. Opgave. Byg en webapp i én fil, index.html, med HTML, CSS og JavaScript og uden frameworks. Brugeren registrerer målinger med målepunkt, temperatur og initialer. Dato og tid sættes automatisk. Forudfyld Kølerum 1 og Kølerum 2 med højst 5,0 °C og Pasteur P1 med mindst 72,0 °C, og lad brugeren rette og tilføje målepunkter. Målinger uden for grænserne markeres med rødt, og appen kræver en korrigerende handling, før målingen kan gemmes. Vis antal afvigelser i dag øverst. Gem data i localStorage, og lav en knap, der eksporterer alt som CSV til Excel. Format. Dansk tekst, mobilvenlig og store knapper, der kan bruges med handsker. Tjek. Test selv med 4,2 °C og 6,1 °C i Kølerum 2. Den sidste skal blive rød. Skriv til sidst, hvad jeg skal teste. Backup. Fejler nettet eller Claude Code, så kør samme prompt i Claude i browseren, eller vis den version, du har bygget på forhånd.</a:t>
+              <a:t>Live build. Indsæt prompten i Claude Code, og fortæl, hvad der sker, mens den arbejder. Vis ændringerne kort, før du committer. Push til GitHub, og Vercel lægger appen online. Prompten lyder sådan. Kontekst. Jeg underviser procesteknologer i egenkontrol. Appen skal bruges på Fjordtørreriet, en fiktiv case fra undervisningen, hvor korn, tang og krydderurter tørres på planlagre. Rolle. Du er en erfaren frontend-udvikler. Opgave. Byg en webapp i én fil, index.html, med HTML, CSS og JavaScript og uden frameworks. Brugeren registrerer målinger med planlager, vare, vandindhold i procent, lagtemperatur og initialer. Dato og tid sættes automatisk. Forudfyld grænserne korn højst 15,5 %, tang højst 16,5 %, krydderurter 10,0 til 12,5 % og lagtemperatur højst 25 °C for korn og tang, og lad brugeren rette og tilføje. Målinger uden for grænserne markeres med rødt, og appen kræver en korrigerende handling, før målingen kan gemmes. Vis antal afvigelser i dag øverst. Gem data i localStorage, og lav en knap, der eksporterer alt som CSV til Excel. Format. Dansk tekst, mobilvenlig og store knapper, der kan bruges med handsker. Tjek. Test selv med korn på 14,8 % og korn på 17,6 % i PL2. Den sidste skal blive rød. Skriv til sidst, hvad jeg skal teste. Backup. Fejler nettet eller Claude Code, så kør samme prompt i Claude i browseren, eller vis den version, du har bygget på forhånd.</a:t>
             </a:r>
             <a:endParaRPr lang="en-US" dirty="0"/>
           </a:p>
@@ -12681,7 +11487,7 @@
                   <a:schemeClr val="accent1"/>
                 </a:solidFill>
               </a:rPr>
-              <a:t>Procesteknolog_Fjordmejeriet_uge41.xlsx</a:t>
+              <a:t>Procesteknolog_Fjordtoerreriet_2026.xlsx</a:t>
             </a:r>
             <a:pPr indent="0" marL="0">
               <a:buNone/>
@@ -13711,7 +12517,7 @@
                   <a:schemeClr val="accent1"/>
                 </a:solidFill>
               </a:rPr>
-              <a:t>1.643</a:t>
+              <a:t>1.860</a:t>
             </a:r>
             <a:endParaRPr lang="en-US" sz="15000" dirty="0"/>
           </a:p>
@@ -13747,7 +12553,7 @@
                   <a:schemeClr val="accent3"/>
                 </a:solidFill>
               </a:rPr>
-              <a:t>rækker rådata fra én uge på Fjordmejeriet.</a:t>
+              <a:t>rækker rådata fra én tørresæson på Fjordtørreriet.</a:t>
             </a:r>
             <a:endParaRPr lang="en-US" sz="2200" dirty="0"/>
           </a:p>
@@ -13761,7 +12567,7 @@
                   <a:schemeClr val="accent3"/>
                 </a:solidFill>
               </a:rPr>
-              <a:t>Pasteur  ·  Påfyldning  ·  Batches  ·  Kølerum  ·  Operatørnoter</a:t>
+              <a:t>Batches  ·  Fugtlog  ·  Luft  ·  Operatørnoter</a:t>
             </a:r>
             <a:endParaRPr lang="en-US" sz="2200" dirty="0"/>
           </a:p>
@@ -14093,7 +12899,7 @@
                   <a:schemeClr val="bg1"/>
                 </a:solidFill>
               </a:rPr>
-              <a:t>Kontrolkort og Cpk</a:t>
+              <a:t>Massebalance</a:t>
             </a:r>
             <a:endParaRPr lang="en-US" sz="2800" dirty="0"/>
           </a:p>
@@ -14165,7 +12971,7 @@
                   <a:schemeClr val="bg1"/>
                 </a:solidFill>
               </a:rPr>
-              <a:t>Kølerum</a:t>
+              <a:t>Tørrekurve</a:t>
             </a:r>
             <a:endParaRPr lang="en-US" sz="2800" dirty="0"/>
           </a:p>
@@ -14237,7 +13043,7 @@
                   <a:schemeClr val="bg1"/>
                 </a:solidFill>
               </a:rPr>
-              <a:t>Svind og kvalitet</a:t>
+              <a:t>Energi og kvalitet</a:t>
             </a:r>
             <a:endParaRPr lang="en-US" sz="2800" dirty="0"/>
           </a:p>
@@ -14495,7 +13301,7 @@
                   <a:schemeClr val="bg1"/>
                 </a:solidFill>
               </a:rPr>
-              <a:t>Fredag 10.05 </a:t>
+              <a:t>Havren i PL2 har </a:t>
             </a:r>
             <a:pPr indent="0" marL="0">
               <a:lnSpc>
@@ -14509,7 +13315,7 @@
                   <a:schemeClr val="accent1"/>
                 </a:solidFill>
               </a:rPr>
-              <a:t>svigtede flowomstillingen</a:t>
+              <a:t>stået stille i en uge</a:t>
             </a:r>
             <a:endParaRPr lang="en-US" sz="3400" dirty="0"/>
           </a:p>
@@ -14548,7 +13354,7 @@
                   <a:schemeClr val="accent1"/>
                 </a:solidFill>
               </a:rPr>
-              <a:t>71,88 °C</a:t>
+              <a:t>29 °C</a:t>
             </a:r>
             <a:endParaRPr lang="en-US" sz="15000" dirty="0"/>
           </a:p>
@@ -14584,7 +13390,7 @@
                   <a:schemeClr val="accent3"/>
                 </a:solidFill>
               </a:rPr>
-              <a:t>Under grænsen på 72,0 °C, uden at mælken blev omstillet. Ugens alvorligste hændelse.</a:t>
+              <a:t>Lagtemperaturen er steget 15 grader på fire døgn, og vandindholdet sidder fast på 17,6 %. Begyndende varmgang. Sæsonens alvorligste fund.</a:t>
             </a:r>
             <a:endParaRPr lang="en-US" sz="2200" dirty="0"/>
           </a:p>
@@ -14722,16 +13528,17 @@
         </p:nvGraphicFramePr>
         <p:xfrm>
           <a:off x="685800" y="2331720"/>
-          <a:ext cx="8595360" cy="914400"/>
+          <a:ext cx="9692640" cy="914400"/>
         </p:xfrm>
         <a:graphic>
           <a:graphicData uri="http://schemas.openxmlformats.org/drawingml/2006/table">
             <a:tbl>
               <a:tblPr/>
               <a:tblGrid>
-                <a:gridCol w="2011680"/>
-                <a:gridCol w="2377440"/>
-                <a:gridCol w="4206240"/>
+                <a:gridCol w="2651760"/>
+                <a:gridCol w="1097280"/>
+                <a:gridCol w="1828800"/>
+                <a:gridCol w="4114800"/>
               </a:tblGrid>
               <a:tr h="475488">
                 <a:tc>
@@ -14801,7 +13608,57 @@
                           <a:ea typeface="+mn-lt" pitchFamily="34" charset="-122"/>
                           <a:cs typeface="+mn-lt" pitchFamily="34" charset="-120"/>
                         </a:rPr>
-                        <a:t>Temperatur (°C)</a:t>
+                        <a:t>Batch</a:t>
+                      </a:r>
+                      <a:endParaRPr lang="en-US" sz="1200" dirty="0">
+                        <a:latin typeface="+mn-lt" charset="0"/>
+                        <a:ea typeface="+mn-lt" charset="0"/>
+                        <a:cs typeface="+mn-lt" charset="0"/>
+                      </a:endParaRPr>
+                    </a:p>
+                  </a:txBody>
+                  <a:tcPr marL="137160" marR="137160" marT="73152" marB="73152" anchor="ctr">
+                    <a:lnL w="0" cap="flat" cmpd="sng" algn="ctr">
+                      <a:noFill/>
+                    </a:lnL>
+                    <a:lnR w="0" cap="flat" cmpd="sng" algn="ctr">
+                      <a:noFill/>
+                    </a:lnR>
+                    <a:lnT w="0" cap="flat" cmpd="sng" algn="ctr">
+                      <a:noFill/>
+                    </a:lnT>
+                    <a:lnB w="9525" cap="flat" cmpd="sng" algn="ctr">
+                      <a:solidFill>
+                        <a:srgbClr val="3A3A3C"/>
+                      </a:solidFill>
+                      <a:prstDash val="solid"/>
+                      <a:round/>
+                      <a:headEnd type="none" w="med" len="med"/>
+                      <a:tailEnd type="none" w="med" len="med"/>
+                    </a:lnB>
+                    <a:solidFill>
+                      <a:srgbClr val="0B0B0C"/>
+                    </a:solidFill>
+                  </a:tcPr>
+                </a:tc>
+                <a:tc>
+                  <a:txBody>
+                    <a:bodyPr/>
+                    <a:lstStyle/>
+                    <a:p>
+                      <a:pPr indent="0" marL="0">
+                        <a:buNone/>
+                      </a:pPr>
+                      <a:r>
+                        <a:rPr lang="en-US" sz="1200" b="1" dirty="0">
+                          <a:solidFill>
+                            <a:srgbClr val="A1A1A6"/>
+                          </a:solidFill>
+                          <a:latin typeface="+mn-lt" pitchFamily="34" charset="0"/>
+                          <a:ea typeface="+mn-lt" pitchFamily="34" charset="-122"/>
+                          <a:cs typeface="+mn-lt" pitchFamily="34" charset="-120"/>
+                        </a:rPr>
+                        <a:t>Vandindhold</a:t>
                       </a:r>
                       <a:endParaRPr lang="en-US" sz="1200" dirty="0">
                         <a:latin typeface="+mn-lt" charset="0"/>
@@ -14903,7 +13760,7 @@
                           <a:ea typeface="+mn-lt" pitchFamily="34" charset="-122"/>
                           <a:cs typeface="+mn-lt" pitchFamily="34" charset="-120"/>
                         </a:rPr>
-                        <a:t>Tor 11.10</a:t>
+                        <a:t>Man 17. aug 11.00</a:t>
                       </a:r>
                       <a:endParaRPr lang="en-US" sz="1800" dirty="0">
                         <a:latin typeface="+mn-lt" charset="0"/>
@@ -14953,7 +13810,57 @@
                           <a:ea typeface="+mn-lt" pitchFamily="34" charset="-122"/>
                           <a:cs typeface="+mn-lt" pitchFamily="34" charset="-120"/>
                         </a:rPr>
-                        <a:t>73,48</a:t>
+                        <a:t>T-04</a:t>
+                      </a:r>
+                      <a:endParaRPr lang="en-US" sz="1800" dirty="0">
+                        <a:latin typeface="+mn-lt" charset="0"/>
+                        <a:ea typeface="+mn-lt" charset="0"/>
+                        <a:cs typeface="+mn-lt" charset="0"/>
+                      </a:endParaRPr>
+                    </a:p>
+                  </a:txBody>
+                  <a:tcPr marL="137160" marR="137160" marT="73152" marB="73152" anchor="ctr">
+                    <a:lnL w="0" cap="flat" cmpd="sng" algn="ctr">
+                      <a:noFill/>
+                    </a:lnL>
+                    <a:lnR w="0" cap="flat" cmpd="sng" algn="ctr">
+                      <a:noFill/>
+                    </a:lnR>
+                    <a:lnT w="0" cap="flat" cmpd="sng" algn="ctr">
+                      <a:noFill/>
+                    </a:lnT>
+                    <a:lnB w="9525" cap="flat" cmpd="sng" algn="ctr">
+                      <a:solidFill>
+                        <a:srgbClr val="3A3A3C"/>
+                      </a:solidFill>
+                      <a:prstDash val="solid"/>
+                      <a:round/>
+                      <a:headEnd type="none" w="med" len="med"/>
+                      <a:tailEnd type="none" w="med" len="med"/>
+                    </a:lnB>
+                    <a:solidFill>
+                      <a:srgbClr val="0B0B0C"/>
+                    </a:solidFill>
+                  </a:tcPr>
+                </a:tc>
+                <a:tc>
+                  <a:txBody>
+                    <a:bodyPr/>
+                    <a:lstStyle/>
+                    <a:p>
+                      <a:pPr indent="0" marL="0">
+                        <a:buNone/>
+                      </a:pPr>
+                      <a:r>
+                        <a:rPr lang="en-US" sz="1800" dirty="0">
+                          <a:solidFill>
+                            <a:srgbClr val="FFFFFF"/>
+                          </a:solidFill>
+                          <a:latin typeface="+mn-lt" pitchFamily="34" charset="0"/>
+                          <a:ea typeface="+mn-lt" pitchFamily="34" charset="-122"/>
+                          <a:cs typeface="+mn-lt" pitchFamily="34" charset="-120"/>
+                        </a:rPr>
+                        <a:t>16,1 %</a:t>
                       </a:r>
                       <a:endParaRPr lang="en-US" sz="1800" dirty="0">
                         <a:latin typeface="+mn-lt" charset="0"/>
@@ -15044,7 +13951,57 @@
                           <a:ea typeface="+mn-lt" pitchFamily="34" charset="-122"/>
                           <a:cs typeface="+mn-lt" pitchFamily="34" charset="-120"/>
                         </a:rPr>
-                        <a:t>Tor 11.15</a:t>
+                        <a:t>Man 17. aug 15.00</a:t>
+                      </a:r>
+                      <a:endParaRPr lang="en-US" sz="1800" dirty="0">
+                        <a:latin typeface="+mn-lt" charset="0"/>
+                        <a:ea typeface="+mn-lt" charset="0"/>
+                        <a:cs typeface="+mn-lt" charset="0"/>
+                      </a:endParaRPr>
+                    </a:p>
+                  </a:txBody>
+                  <a:tcPr marL="137160" marR="137160" marT="73152" marB="73152" anchor="ctr">
+                    <a:lnL w="0" cap="flat" cmpd="sng" algn="ctr">
+                      <a:noFill/>
+                    </a:lnL>
+                    <a:lnR w="0" cap="flat" cmpd="sng" algn="ctr">
+                      <a:noFill/>
+                    </a:lnR>
+                    <a:lnT w="0" cap="flat" cmpd="sng" algn="ctr">
+                      <a:noFill/>
+                    </a:lnT>
+                    <a:lnB w="9525" cap="flat" cmpd="sng" algn="ctr">
+                      <a:solidFill>
+                        <a:srgbClr val="3A3A3C"/>
+                      </a:solidFill>
+                      <a:prstDash val="solid"/>
+                      <a:round/>
+                      <a:headEnd type="none" w="med" len="med"/>
+                      <a:tailEnd type="none" w="med" len="med"/>
+                    </a:lnB>
+                    <a:solidFill>
+                      <a:srgbClr val="1A2B5C"/>
+                    </a:solidFill>
+                  </a:tcPr>
+                </a:tc>
+                <a:tc>
+                  <a:txBody>
+                    <a:bodyPr/>
+                    <a:lstStyle/>
+                    <a:p>
+                      <a:pPr indent="0" marL="0">
+                        <a:buNone/>
+                      </a:pPr>
+                      <a:r>
+                        <a:rPr lang="en-US" sz="1800" dirty="0">
+                          <a:solidFill>
+                            <a:srgbClr val="FFFFFF"/>
+                          </a:solidFill>
+                          <a:latin typeface="+mn-lt" pitchFamily="34" charset="0"/>
+                          <a:ea typeface="+mn-lt" pitchFamily="34" charset="-122"/>
+                          <a:cs typeface="+mn-lt" pitchFamily="34" charset="-120"/>
+                        </a:rPr>
+                        <a:t>T-04</a:t>
                       </a:r>
                       <a:endParaRPr lang="en-US" sz="1800" dirty="0">
                         <a:latin typeface="+mn-lt" charset="0"/>
@@ -15094,7 +14051,7 @@
                           <a:ea typeface="+mn-lt" pitchFamily="34" charset="-122"/>
                           <a:cs typeface="+mn-lt" pitchFamily="34" charset="-120"/>
                         </a:rPr>
-                        <a:t>7,36</a:t>
+                        <a:t>1,6 %</a:t>
                       </a:r>
                       <a:endParaRPr lang="en-US" sz="1800" dirty="0">
                         <a:latin typeface="+mn-lt" charset="0"/>
@@ -15196,7 +14153,7 @@
                           <a:ea typeface="+mn-lt" pitchFamily="34" charset="-122"/>
                           <a:cs typeface="+mn-lt" pitchFamily="34" charset="-120"/>
                         </a:rPr>
-                        <a:t>Tor 11.20</a:t>
+                        <a:t>Man 17. aug 19.00</a:t>
                       </a:r>
                       <a:endParaRPr lang="en-US" sz="1800" dirty="0">
                         <a:latin typeface="+mn-lt" charset="0"/>
@@ -15246,7 +14203,57 @@
                           <a:ea typeface="+mn-lt" pitchFamily="34" charset="-122"/>
                           <a:cs typeface="+mn-lt" pitchFamily="34" charset="-120"/>
                         </a:rPr>
-                        <a:t>73,94</a:t>
+                        <a:t>T-04</a:t>
+                      </a:r>
+                      <a:endParaRPr lang="en-US" sz="1800" dirty="0">
+                        <a:latin typeface="+mn-lt" charset="0"/>
+                        <a:ea typeface="+mn-lt" charset="0"/>
+                        <a:cs typeface="+mn-lt" charset="0"/>
+                      </a:endParaRPr>
+                    </a:p>
+                  </a:txBody>
+                  <a:tcPr marL="137160" marR="137160" marT="73152" marB="73152" anchor="ctr">
+                    <a:lnL w="0" cap="flat" cmpd="sng" algn="ctr">
+                      <a:noFill/>
+                    </a:lnL>
+                    <a:lnR w="0" cap="flat" cmpd="sng" algn="ctr">
+                      <a:noFill/>
+                    </a:lnR>
+                    <a:lnT w="0" cap="flat" cmpd="sng" algn="ctr">
+                      <a:noFill/>
+                    </a:lnT>
+                    <a:lnB w="9525" cap="flat" cmpd="sng" algn="ctr">
+                      <a:solidFill>
+                        <a:srgbClr val="3A3A3C"/>
+                      </a:solidFill>
+                      <a:prstDash val="solid"/>
+                      <a:round/>
+                      <a:headEnd type="none" w="med" len="med"/>
+                      <a:tailEnd type="none" w="med" len="med"/>
+                    </a:lnB>
+                    <a:solidFill>
+                      <a:srgbClr val="0B0B0C"/>
+                    </a:solidFill>
+                  </a:tcPr>
+                </a:tc>
+                <a:tc>
+                  <a:txBody>
+                    <a:bodyPr/>
+                    <a:lstStyle/>
+                    <a:p>
+                      <a:pPr indent="0" marL="0">
+                        <a:buNone/>
+                      </a:pPr>
+                      <a:r>
+                        <a:rPr lang="en-US" sz="1800" dirty="0">
+                          <a:solidFill>
+                            <a:srgbClr val="FFFFFF"/>
+                          </a:solidFill>
+                          <a:latin typeface="+mn-lt" pitchFamily="34" charset="0"/>
+                          <a:ea typeface="+mn-lt" pitchFamily="34" charset="-122"/>
+                          <a:cs typeface="+mn-lt" pitchFamily="34" charset="-120"/>
+                        </a:rPr>
+                        <a:t>16,0 %</a:t>
                       </a:r>
                       <a:endParaRPr lang="en-US" sz="1800" dirty="0">
                         <a:latin typeface="+mn-lt" charset="0"/>
@@ -15337,7 +14344,7 @@
                           <a:ea typeface="+mn-lt" pitchFamily="34" charset="-122"/>
                           <a:cs typeface="+mn-lt" pitchFamily="34" charset="-120"/>
                         </a:rPr>
-                        <a:t>Ons 09.35</a:t>
+                        <a:t>Tir 18. aug 10.00</a:t>
                       </a:r>
                       <a:endParaRPr lang="en-US" sz="1800" dirty="0">
                         <a:latin typeface="+mn-lt" charset="0"/>
@@ -15387,7 +14394,57 @@
                           <a:ea typeface="+mn-lt" pitchFamily="34" charset="-122"/>
                           <a:cs typeface="+mn-lt" pitchFamily="34" charset="-120"/>
                         </a:rPr>
-                        <a:t>73,60</a:t>
+                        <a:t>T-05</a:t>
+                      </a:r>
+                      <a:endParaRPr lang="en-US" sz="1800" dirty="0">
+                        <a:latin typeface="+mn-lt" charset="0"/>
+                        <a:ea typeface="+mn-lt" charset="0"/>
+                        <a:cs typeface="+mn-lt" charset="0"/>
+                      </a:endParaRPr>
+                    </a:p>
+                  </a:txBody>
+                  <a:tcPr marL="137160" marR="137160" marT="73152" marB="73152" anchor="ctr">
+                    <a:lnL w="0" cap="flat" cmpd="sng" algn="ctr">
+                      <a:noFill/>
+                    </a:lnL>
+                    <a:lnR w="0" cap="flat" cmpd="sng" algn="ctr">
+                      <a:noFill/>
+                    </a:lnR>
+                    <a:lnT w="0" cap="flat" cmpd="sng" algn="ctr">
+                      <a:noFill/>
+                    </a:lnT>
+                    <a:lnB w="9525" cap="flat" cmpd="sng" algn="ctr">
+                      <a:solidFill>
+                        <a:srgbClr val="3A3A3C"/>
+                      </a:solidFill>
+                      <a:prstDash val="solid"/>
+                      <a:round/>
+                      <a:headEnd type="none" w="med" len="med"/>
+                      <a:tailEnd type="none" w="med" len="med"/>
+                    </a:lnB>
+                    <a:solidFill>
+                      <a:srgbClr val="0B0B0C"/>
+                    </a:solidFill>
+                  </a:tcPr>
+                </a:tc>
+                <a:tc>
+                  <a:txBody>
+                    <a:bodyPr/>
+                    <a:lstStyle/>
+                    <a:p>
+                      <a:pPr indent="0" marL="0">
+                        <a:buNone/>
+                      </a:pPr>
+                      <a:r>
+                        <a:rPr lang="en-US" sz="1800" dirty="0">
+                          <a:solidFill>
+                            <a:srgbClr val="FFFFFF"/>
+                          </a:solidFill>
+                          <a:latin typeface="+mn-lt" pitchFamily="34" charset="0"/>
+                          <a:ea typeface="+mn-lt" pitchFamily="34" charset="-122"/>
+                          <a:cs typeface="+mn-lt" pitchFamily="34" charset="-120"/>
+                        </a:rPr>
+                        <a:t>17,3 %</a:t>
                       </a:r>
                       <a:endParaRPr lang="en-US" sz="1800" dirty="0">
                         <a:latin typeface="+mn-lt" charset="0"/>
@@ -15478,7 +14535,57 @@
                           <a:ea typeface="+mn-lt" pitchFamily="34" charset="-122"/>
                           <a:cs typeface="+mn-lt" pitchFamily="34" charset="-120"/>
                         </a:rPr>
-                        <a:t>Ons 09.40</a:t>
+                        <a:t>Tir 18. aug 14.00</a:t>
+                      </a:r>
+                      <a:endParaRPr lang="en-US" sz="1800" dirty="0">
+                        <a:latin typeface="+mn-lt" charset="0"/>
+                        <a:ea typeface="+mn-lt" charset="0"/>
+                        <a:cs typeface="+mn-lt" charset="0"/>
+                      </a:endParaRPr>
+                    </a:p>
+                  </a:txBody>
+                  <a:tcPr marL="137160" marR="137160" marT="73152" marB="73152" anchor="ctr">
+                    <a:lnL w="0" cap="flat" cmpd="sng" algn="ctr">
+                      <a:noFill/>
+                    </a:lnL>
+                    <a:lnR w="0" cap="flat" cmpd="sng" algn="ctr">
+                      <a:noFill/>
+                    </a:lnR>
+                    <a:lnT w="0" cap="flat" cmpd="sng" algn="ctr">
+                      <a:noFill/>
+                    </a:lnT>
+                    <a:lnB w="9525" cap="flat" cmpd="sng" algn="ctr">
+                      <a:solidFill>
+                        <a:srgbClr val="3A3A3C"/>
+                      </a:solidFill>
+                      <a:prstDash val="solid"/>
+                      <a:round/>
+                      <a:headEnd type="none" w="med" len="med"/>
+                      <a:tailEnd type="none" w="med" len="med"/>
+                    </a:lnB>
+                    <a:solidFill>
+                      <a:srgbClr val="1A2B5C"/>
+                    </a:solidFill>
+                  </a:tcPr>
+                </a:tc>
+                <a:tc>
+                  <a:txBody>
+                    <a:bodyPr/>
+                    <a:lstStyle/>
+                    <a:p>
+                      <a:pPr indent="0" marL="0">
+                        <a:buNone/>
+                      </a:pPr>
+                      <a:r>
+                        <a:rPr lang="en-US" sz="1800" dirty="0">
+                          <a:solidFill>
+                            <a:srgbClr val="FFFFFF"/>
+                          </a:solidFill>
+                          <a:latin typeface="+mn-lt" pitchFamily="34" charset="0"/>
+                          <a:ea typeface="+mn-lt" pitchFamily="34" charset="-122"/>
+                          <a:cs typeface="+mn-lt" pitchFamily="34" charset="-120"/>
+                        </a:rPr>
+                        <a:t>T-05</a:t>
                       </a:r>
                       <a:endParaRPr lang="en-US" sz="1800" dirty="0">
                         <a:latin typeface="+mn-lt" charset="0"/>
@@ -15567,7 +14674,7 @@
                           <a:ea typeface="+mn-lt" pitchFamily="34" charset="-122"/>
                           <a:cs typeface="+mn-lt" pitchFamily="34" charset="-120"/>
                         </a:rPr>
-                        <a:t>Mangler. Føleren faldt ud</a:t>
+                        <a:t>Mangler. Prøven blev ikke taget</a:t>
                       </a:r>
                       <a:endParaRPr lang="en-US" sz="1800" dirty="0">
                         <a:latin typeface="+mn-lt" charset="0"/>
@@ -15619,7 +14726,7 @@
                           <a:ea typeface="+mn-lt" pitchFamily="34" charset="-122"/>
                           <a:cs typeface="+mn-lt" pitchFamily="34" charset="-120"/>
                         </a:rPr>
-                        <a:t>Ons 09.45</a:t>
+                        <a:t>Tir 18. aug 18.00</a:t>
                       </a:r>
                       <a:endParaRPr lang="en-US" sz="1800" dirty="0">
                         <a:latin typeface="+mn-lt" charset="0"/>
@@ -15669,7 +14776,57 @@
                           <a:ea typeface="+mn-lt" pitchFamily="34" charset="-122"/>
                           <a:cs typeface="+mn-lt" pitchFamily="34" charset="-120"/>
                         </a:rPr>
-                        <a:t>73,56</a:t>
+                        <a:t>T-05</a:t>
+                      </a:r>
+                      <a:endParaRPr lang="en-US" sz="1800" dirty="0">
+                        <a:latin typeface="+mn-lt" charset="0"/>
+                        <a:ea typeface="+mn-lt" charset="0"/>
+                        <a:cs typeface="+mn-lt" charset="0"/>
+                      </a:endParaRPr>
+                    </a:p>
+                  </a:txBody>
+                  <a:tcPr marL="137160" marR="137160" marT="73152" marB="73152" anchor="ctr">
+                    <a:lnL w="0" cap="flat" cmpd="sng" algn="ctr">
+                      <a:noFill/>
+                    </a:lnL>
+                    <a:lnR w="0" cap="flat" cmpd="sng" algn="ctr">
+                      <a:noFill/>
+                    </a:lnR>
+                    <a:lnT w="0" cap="flat" cmpd="sng" algn="ctr">
+                      <a:noFill/>
+                    </a:lnT>
+                    <a:lnB w="9525" cap="flat" cmpd="sng" algn="ctr">
+                      <a:solidFill>
+                        <a:srgbClr val="3A3A3C"/>
+                      </a:solidFill>
+                      <a:prstDash val="solid"/>
+                      <a:round/>
+                      <a:headEnd type="none" w="med" len="med"/>
+                      <a:tailEnd type="none" w="med" len="med"/>
+                    </a:lnB>
+                    <a:solidFill>
+                      <a:srgbClr val="0B0B0C"/>
+                    </a:solidFill>
+                  </a:tcPr>
+                </a:tc>
+                <a:tc>
+                  <a:txBody>
+                    <a:bodyPr/>
+                    <a:lstStyle/>
+                    <a:p>
+                      <a:pPr indent="0" marL="0">
+                        <a:buNone/>
+                      </a:pPr>
+                      <a:r>
+                        <a:rPr lang="en-US" sz="1800" dirty="0">
+                          <a:solidFill>
+                            <a:srgbClr val="FFFFFF"/>
+                          </a:solidFill>
+                          <a:latin typeface="+mn-lt" pitchFamily="34" charset="0"/>
+                          <a:ea typeface="+mn-lt" pitchFamily="34" charset="-122"/>
+                          <a:cs typeface="+mn-lt" pitchFamily="34" charset="-120"/>
+                        </a:rPr>
+                        <a:t>16,2 %</a:t>
                       </a:r>
                       <a:endParaRPr lang="en-US" sz="1800" dirty="0">
                         <a:latin typeface="+mn-lt" charset="0"/>
@@ -15776,7 +14933,7 @@
                   <a:schemeClr val="accent3"/>
                 </a:solidFill>
               </a:rPr>
-              <a:t>Uddrag af fanen Pasteur. AI markerer fejlene i en ny fane, så rådata står urørt.</a:t>
+              <a:t>Uddrag af fanen Fugtlog. AI markerer fejlene i en ny fane, så rådata står urørt.</a:t>
             </a:r>
             <a:endParaRPr lang="en-US" sz="1200" dirty="0"/>
           </a:p>
@@ -15837,7 +14994,7 @@
                   <a:schemeClr val="accent3"/>
                 </a:solidFill>
               </a:rPr>
-              <a:t>PROMPT 3  ·  KONTROLKORT OG CPK</a:t>
+              <a:t>PROMPT 3  ·  MASSEBALANCE</a:t>
             </a:r>
             <a:endParaRPr lang="en-US" sz="1200" dirty="0"/>
           </a:p>
@@ -15878,7 +15035,7 @@
                   <a:schemeClr val="bg1"/>
                 </a:solidFill>
               </a:rPr>
-              <a:t>Kontrolkortet viser, at dysen </a:t>
+              <a:t>Tørstoffet er konstant. </a:t>
             </a:r>
             <a:pPr algn="l" indent="0" marL="0">
               <a:lnSpc>
@@ -15892,7 +15049,7 @@
                   <a:schemeClr val="accent1"/>
                 </a:solidFill>
               </a:rPr>
-              <a:t>begyndte at slide onsdag</a:t>
+              <a:t>Resten er regning</a:t>
             </a:r>
             <a:endParaRPr lang="en-US" sz="3400" dirty="0"/>
           </a:p>
@@ -15900,57 +15057,541 @@
       </p:sp>
       <p:sp>
         <p:nvSpPr>
-          <p:cNvPr id="4" name="Shape 2"/>
+          <p:cNvPr id="4" name="Text 2"/>
+          <p:cNvSpPr txBox="1"/>
+          <p:nvPr/>
+        </p:nvSpPr>
+        <p:spPr>
+          <a:xfrm>
+            <a:off x="685800" y="2286000"/>
+            <a:ext cx="3332378" cy="274320"/>
+          </a:xfrm>
+          <a:prstGeom prst="rect">
+            <a:avLst/>
+          </a:prstGeom>
+          <a:noFill/>
+          <a:ln/>
+        </p:spPr>
+        <p:txBody>
+          <a:bodyPr wrap="square" lIns="0" tIns="0" rIns="0" bIns="0" rtlCol="0" anchor="t"/>
+          <a:lstStyle/>
+          <a:p>
+            <a:pPr indent="0" marL="0">
+              <a:buNone/>
+            </a:pPr>
+            <a:r>
+              <a:rPr lang="en-US" sz="1200" b="1" spc="200" kern="0" dirty="0">
+                <a:solidFill>
+                  <a:schemeClr val="accent1"/>
+                </a:solidFill>
+              </a:rPr>
+              <a:t>T-07  ·  KORN</a:t>
+            </a:r>
+            <a:endParaRPr lang="en-US" sz="1200" dirty="0"/>
+          </a:p>
+        </p:txBody>
+      </p:sp>
+      <p:sp>
+        <p:nvSpPr>
+          <p:cNvPr id="5" name="Text 3"/>
+          <p:cNvSpPr txBox="1"/>
+          <p:nvPr/>
+        </p:nvSpPr>
+        <p:spPr>
+          <a:xfrm>
+            <a:off x="685800" y="2606040"/>
+            <a:ext cx="3332378" cy="320040"/>
+          </a:xfrm>
+          <a:prstGeom prst="rect">
+            <a:avLst/>
+          </a:prstGeom>
+          <a:noFill/>
+          <a:ln/>
+        </p:spPr>
+        <p:txBody>
+          <a:bodyPr wrap="square" lIns="0" tIns="0" rIns="0" bIns="0" rtlCol="0" anchor="t"/>
+          <a:lstStyle/>
+          <a:p>
+            <a:pPr indent="0" marL="0">
+              <a:buNone/>
+            </a:pPr>
+            <a:r>
+              <a:rPr lang="en-US" sz="1300" dirty="0">
+                <a:solidFill>
+                  <a:schemeClr val="accent3"/>
+                </a:solidFill>
+              </a:rPr>
+              <a:t>230 t  ·  20,2 til 15,1 %  ·  128 timer</a:t>
+            </a:r>
+            <a:endParaRPr lang="en-US" sz="1300" dirty="0"/>
+          </a:p>
+        </p:txBody>
+      </p:sp>
+      <p:sp>
+        <p:nvSpPr>
+          <p:cNvPr id="6" name="Text 4"/>
+          <p:cNvSpPr txBox="1"/>
+          <p:nvPr/>
+        </p:nvSpPr>
+        <p:spPr>
+          <a:xfrm>
+            <a:off x="685800" y="3063240"/>
+            <a:ext cx="3332378" cy="822960"/>
+          </a:xfrm>
+          <a:prstGeom prst="rect">
+            <a:avLst/>
+          </a:prstGeom>
+          <a:noFill/>
+          <a:ln/>
+        </p:spPr>
+        <p:txBody>
+          <a:bodyPr wrap="square" lIns="0" tIns="0" rIns="0" bIns="0" rtlCol="0" anchor="b"/>
+          <a:lstStyle/>
+          <a:p>
+            <a:pPr indent="0" marL="0">
+              <a:buNone/>
+            </a:pPr>
+            <a:r>
+              <a:rPr lang="en-US" sz="4400" b="1" dirty="0">
+                <a:solidFill>
+                  <a:schemeClr val="bg1"/>
+                </a:solidFill>
+              </a:rPr>
+              <a:t>13.816 kg</a:t>
+            </a:r>
+            <a:endParaRPr lang="en-US" sz="4400" dirty="0"/>
+          </a:p>
+        </p:txBody>
+      </p:sp>
+      <p:sp>
+        <p:nvSpPr>
+          <p:cNvPr id="7" name="Text 5"/>
+          <p:cNvSpPr txBox="1"/>
+          <p:nvPr/>
+        </p:nvSpPr>
+        <p:spPr>
+          <a:xfrm>
+            <a:off x="685800" y="3931920"/>
+            <a:ext cx="3332378" cy="320040"/>
+          </a:xfrm>
+          <a:prstGeom prst="rect">
+            <a:avLst/>
+          </a:prstGeom>
+          <a:noFill/>
+          <a:ln/>
+        </p:spPr>
+        <p:txBody>
+          <a:bodyPr wrap="square" lIns="0" tIns="0" rIns="0" bIns="0" rtlCol="0" anchor="t"/>
+          <a:lstStyle/>
+          <a:p>
+            <a:pPr indent="0" marL="0">
+              <a:buNone/>
+            </a:pPr>
+            <a:r>
+              <a:rPr lang="en-US" sz="1500" dirty="0">
+                <a:solidFill>
+                  <a:schemeClr val="accent3"/>
+                </a:solidFill>
+              </a:rPr>
+              <a:t>vand fjernet</a:t>
+            </a:r>
+            <a:endParaRPr lang="en-US" sz="1500" dirty="0"/>
+          </a:p>
+        </p:txBody>
+      </p:sp>
+      <p:sp>
+        <p:nvSpPr>
+          <p:cNvPr id="8" name="Text 6"/>
+          <p:cNvSpPr txBox="1"/>
+          <p:nvPr/>
+        </p:nvSpPr>
+        <p:spPr>
+          <a:xfrm>
+            <a:off x="685800" y="4526280"/>
+            <a:ext cx="3332378" cy="411480"/>
+          </a:xfrm>
+          <a:prstGeom prst="rect">
+            <a:avLst/>
+          </a:prstGeom>
+          <a:noFill/>
+          <a:ln/>
+        </p:spPr>
+        <p:txBody>
+          <a:bodyPr wrap="square" lIns="0" tIns="0" rIns="0" bIns="0" rtlCol="0" anchor="t"/>
+          <a:lstStyle/>
+          <a:p>
+            <a:pPr indent="0" marL="0">
+              <a:buNone/>
+            </a:pPr>
+            <a:r>
+              <a:rPr lang="en-US" sz="2200" b="1" dirty="0">
+                <a:solidFill>
+                  <a:schemeClr val="bg1"/>
+                </a:solidFill>
+              </a:rPr>
+              <a:t>108 kg pr. time</a:t>
+            </a:r>
+            <a:endParaRPr lang="en-US" sz="2200" dirty="0"/>
+          </a:p>
+        </p:txBody>
+      </p:sp>
+      <p:sp>
+        <p:nvSpPr>
+          <p:cNvPr id="9" name="Text 7"/>
+          <p:cNvSpPr txBox="1"/>
+          <p:nvPr/>
+        </p:nvSpPr>
+        <p:spPr>
+          <a:xfrm>
+            <a:off x="685800" y="4983480"/>
+            <a:ext cx="3332378" cy="411480"/>
+          </a:xfrm>
+          <a:prstGeom prst="rect">
+            <a:avLst/>
+          </a:prstGeom>
+          <a:noFill/>
+          <a:ln/>
+        </p:spPr>
+        <p:txBody>
+          <a:bodyPr wrap="square" lIns="0" tIns="0" rIns="0" bIns="0" rtlCol="0" anchor="t"/>
+          <a:lstStyle/>
+          <a:p>
+            <a:pPr indent="0" marL="0">
+              <a:buNone/>
+            </a:pPr>
+            <a:r>
+              <a:rPr lang="en-US" sz="2200" b="1" dirty="0">
+                <a:solidFill>
+                  <a:schemeClr val="bg1"/>
+                </a:solidFill>
+              </a:rPr>
+              <a:t>84,9 % tørstof ved slut</a:t>
+            </a:r>
+            <a:endParaRPr lang="en-US" sz="2200" dirty="0"/>
+          </a:p>
+        </p:txBody>
+      </p:sp>
+      <p:sp>
+        <p:nvSpPr>
+          <p:cNvPr id="10" name="Text 8"/>
+          <p:cNvSpPr txBox="1"/>
+          <p:nvPr/>
+        </p:nvSpPr>
+        <p:spPr>
+          <a:xfrm>
+            <a:off x="4292498" y="2286000"/>
+            <a:ext cx="3332378" cy="274320"/>
+          </a:xfrm>
+          <a:prstGeom prst="rect">
+            <a:avLst/>
+          </a:prstGeom>
+          <a:noFill/>
+          <a:ln/>
+        </p:spPr>
+        <p:txBody>
+          <a:bodyPr wrap="square" lIns="0" tIns="0" rIns="0" bIns="0" rtlCol="0" anchor="t"/>
+          <a:lstStyle/>
+          <a:p>
+            <a:pPr indent="0" marL="0">
+              <a:buNone/>
+            </a:pPr>
+            <a:r>
+              <a:rPr lang="en-US" sz="1200" b="1" spc="200" kern="0" dirty="0">
+                <a:solidFill>
+                  <a:schemeClr val="accent1"/>
+                </a:solidFill>
+              </a:rPr>
+              <a:t>T-09  ·  TANG</a:t>
+            </a:r>
+            <a:endParaRPr lang="en-US" sz="1200" dirty="0"/>
+          </a:p>
+        </p:txBody>
+      </p:sp>
+      <p:sp>
+        <p:nvSpPr>
+          <p:cNvPr id="11" name="Text 9"/>
+          <p:cNvSpPr txBox="1"/>
+          <p:nvPr/>
+        </p:nvSpPr>
+        <p:spPr>
+          <a:xfrm>
+            <a:off x="4292498" y="2606040"/>
+            <a:ext cx="3332378" cy="320040"/>
+          </a:xfrm>
+          <a:prstGeom prst="rect">
+            <a:avLst/>
+          </a:prstGeom>
+          <a:noFill/>
+          <a:ln/>
+        </p:spPr>
+        <p:txBody>
+          <a:bodyPr wrap="square" lIns="0" tIns="0" rIns="0" bIns="0" rtlCol="0" anchor="t"/>
+          <a:lstStyle/>
+          <a:p>
+            <a:pPr indent="0" marL="0">
+              <a:buNone/>
+            </a:pPr>
+            <a:r>
+              <a:rPr lang="en-US" sz="1300" dirty="0">
+                <a:solidFill>
+                  <a:schemeClr val="accent3"/>
+                </a:solidFill>
+              </a:rPr>
+              <a:t>290 t  ·  25,2 til 16,1 %  ·  116 timer</a:t>
+            </a:r>
+            <a:endParaRPr lang="en-US" sz="1300" dirty="0"/>
+          </a:p>
+        </p:txBody>
+      </p:sp>
+      <p:sp>
+        <p:nvSpPr>
+          <p:cNvPr id="12" name="Text 10"/>
+          <p:cNvSpPr txBox="1"/>
+          <p:nvPr/>
+        </p:nvSpPr>
+        <p:spPr>
+          <a:xfrm>
+            <a:off x="4292498" y="3063240"/>
+            <a:ext cx="3332378" cy="822960"/>
+          </a:xfrm>
+          <a:prstGeom prst="rect">
+            <a:avLst/>
+          </a:prstGeom>
+          <a:noFill/>
+          <a:ln/>
+        </p:spPr>
+        <p:txBody>
+          <a:bodyPr wrap="square" lIns="0" tIns="0" rIns="0" bIns="0" rtlCol="0" anchor="b"/>
+          <a:lstStyle/>
+          <a:p>
+            <a:pPr indent="0" marL="0">
+              <a:buNone/>
+            </a:pPr>
+            <a:r>
+              <a:rPr lang="en-US" sz="4400" b="1" dirty="0">
+                <a:solidFill>
+                  <a:schemeClr val="bg1"/>
+                </a:solidFill>
+              </a:rPr>
+              <a:t>31.454 kg</a:t>
+            </a:r>
+            <a:endParaRPr lang="en-US" sz="4400" dirty="0"/>
+          </a:p>
+        </p:txBody>
+      </p:sp>
+      <p:sp>
+        <p:nvSpPr>
+          <p:cNvPr id="13" name="Text 11"/>
+          <p:cNvSpPr txBox="1"/>
+          <p:nvPr/>
+        </p:nvSpPr>
+        <p:spPr>
+          <a:xfrm>
+            <a:off x="4292498" y="3931920"/>
+            <a:ext cx="3332378" cy="320040"/>
+          </a:xfrm>
+          <a:prstGeom prst="rect">
+            <a:avLst/>
+          </a:prstGeom>
+          <a:noFill/>
+          <a:ln/>
+        </p:spPr>
+        <p:txBody>
+          <a:bodyPr wrap="square" lIns="0" tIns="0" rIns="0" bIns="0" rtlCol="0" anchor="t"/>
+          <a:lstStyle/>
+          <a:p>
+            <a:pPr indent="0" marL="0">
+              <a:buNone/>
+            </a:pPr>
+            <a:r>
+              <a:rPr lang="en-US" sz="1500" dirty="0">
+                <a:solidFill>
+                  <a:schemeClr val="accent3"/>
+                </a:solidFill>
+              </a:rPr>
+              <a:t>vand fjernet</a:t>
+            </a:r>
+            <a:endParaRPr lang="en-US" sz="1500" dirty="0"/>
+          </a:p>
+        </p:txBody>
+      </p:sp>
+      <p:sp>
+        <p:nvSpPr>
+          <p:cNvPr id="14" name="Text 12"/>
+          <p:cNvSpPr txBox="1"/>
+          <p:nvPr/>
+        </p:nvSpPr>
+        <p:spPr>
+          <a:xfrm>
+            <a:off x="4292498" y="4526280"/>
+            <a:ext cx="3332378" cy="411480"/>
+          </a:xfrm>
+          <a:prstGeom prst="rect">
+            <a:avLst/>
+          </a:prstGeom>
+          <a:noFill/>
+          <a:ln/>
+        </p:spPr>
+        <p:txBody>
+          <a:bodyPr wrap="square" lIns="0" tIns="0" rIns="0" bIns="0" rtlCol="0" anchor="t"/>
+          <a:lstStyle/>
+          <a:p>
+            <a:pPr indent="0" marL="0">
+              <a:buNone/>
+            </a:pPr>
+            <a:r>
+              <a:rPr lang="en-US" sz="2200" b="1" dirty="0">
+                <a:solidFill>
+                  <a:schemeClr val="bg1"/>
+                </a:solidFill>
+              </a:rPr>
+              <a:t>271 kg pr. time</a:t>
+            </a:r>
+            <a:endParaRPr lang="en-US" sz="2200" dirty="0"/>
+          </a:p>
+        </p:txBody>
+      </p:sp>
+      <p:sp>
+        <p:nvSpPr>
+          <p:cNvPr id="15" name="Text 13"/>
+          <p:cNvSpPr txBox="1"/>
+          <p:nvPr/>
+        </p:nvSpPr>
+        <p:spPr>
+          <a:xfrm>
+            <a:off x="4292498" y="4983480"/>
+            <a:ext cx="3332378" cy="411480"/>
+          </a:xfrm>
+          <a:prstGeom prst="rect">
+            <a:avLst/>
+          </a:prstGeom>
+          <a:noFill/>
+          <a:ln/>
+        </p:spPr>
+        <p:txBody>
+          <a:bodyPr wrap="square" lIns="0" tIns="0" rIns="0" bIns="0" rtlCol="0" anchor="t"/>
+          <a:lstStyle/>
+          <a:p>
+            <a:pPr indent="0" marL="0">
+              <a:buNone/>
+            </a:pPr>
+            <a:r>
+              <a:rPr lang="en-US" sz="2200" b="1" dirty="0">
+                <a:solidFill>
+                  <a:schemeClr val="bg1"/>
+                </a:solidFill>
+              </a:rPr>
+              <a:t>83,9 % tørstof ved slut</a:t>
+            </a:r>
+            <a:endParaRPr lang="en-US" sz="2200" dirty="0"/>
+          </a:p>
+        </p:txBody>
+      </p:sp>
+      <p:sp>
+        <p:nvSpPr>
+          <p:cNvPr id="16" name="Shape 14"/>
           <p:cNvSpPr/>
           <p:nvPr/>
         </p:nvSpPr>
         <p:spPr>
           <a:xfrm>
-            <a:off x="5232654" y="2422246"/>
-            <a:ext cx="555498" cy="3035808"/>
-          </a:xfrm>
-          <a:prstGeom prst="rect">
-            <a:avLst/>
-          </a:prstGeom>
-          <a:solidFill>
-            <a:srgbClr val="3D74FF">
-              <a:alpha val="28000"/>
-            </a:srgbClr>
-          </a:solidFill>
+            <a:off x="4018178" y="2331720"/>
+            <a:ext cx="0" cy="3108960"/>
+          </a:xfrm>
+          <a:prstGeom prst="line">
+            <a:avLst/>
+          </a:prstGeom>
+          <a:noFill/>
           <a:ln w="12700">
             <a:solidFill>
-              <a:srgbClr val="3D74FF"/>
+              <a:schemeClr val="accent5"/>
             </a:solidFill>
             <a:prstDash val="solid"/>
           </a:ln>
         </p:spPr>
       </p:sp>
-      <p:graphicFrame>
-        <p:nvGraphicFramePr>
-          <p:cNvPr id="5" name="Chart 0" descr=""/>
-          <p:cNvGraphicFramePr/>
-          <p:nvPr/>
-        </p:nvGraphicFramePr>
-        <p:xfrm>
-          <a:off x="685800" y="2194560"/>
-          <a:ext cx="8229600" cy="3794760"/>
-        </p:xfrm>
-        <a:graphic xmlns:a="http://schemas.openxmlformats.org/drawingml/2006/main">
-          <a:graphicData uri="http://schemas.openxmlformats.org/drawingml/2006/chart">
-            <c:chart xmlns:c="http://schemas.openxmlformats.org/drawingml/2006/chart" r:id="rId1"/>
-          </a:graphicData>
-        </a:graphic>
-      </p:graphicFrame>
-      <p:sp>
-        <p:nvSpPr>
-          <p:cNvPr id="6" name="Text 3"/>
-          <p:cNvSpPr txBox="1"/>
-          <p:nvPr/>
-        </p:nvSpPr>
-        <p:spPr>
-          <a:xfrm>
-            <a:off x="9281160" y="2286000"/>
-            <a:ext cx="2194560" cy="1371600"/>
+      <p:sp>
+        <p:nvSpPr>
+          <p:cNvPr id="17" name="Text 15"/>
+          <p:cNvSpPr txBox="1"/>
+          <p:nvPr/>
+        </p:nvSpPr>
+        <p:spPr>
+          <a:xfrm>
+            <a:off x="7899197" y="2286000"/>
+            <a:ext cx="3332378" cy="274320"/>
+          </a:xfrm>
+          <a:prstGeom prst="rect">
+            <a:avLst/>
+          </a:prstGeom>
+          <a:noFill/>
+          <a:ln/>
+        </p:spPr>
+        <p:txBody>
+          <a:bodyPr wrap="square" lIns="0" tIns="0" rIns="0" bIns="0" rtlCol="0" anchor="t"/>
+          <a:lstStyle/>
+          <a:p>
+            <a:pPr indent="0" marL="0">
+              <a:buNone/>
+            </a:pPr>
+            <a:r>
+              <a:rPr lang="en-US" sz="1200" b="1" spc="200" kern="0" dirty="0">
+                <a:solidFill>
+                  <a:schemeClr val="accent1"/>
+                </a:solidFill>
+              </a:rPr>
+              <a:t>T-11  ·  KRYDDERURTER</a:t>
+            </a:r>
+            <a:endParaRPr lang="en-US" sz="1200" dirty="0"/>
+          </a:p>
+        </p:txBody>
+      </p:sp>
+      <p:sp>
+        <p:nvSpPr>
+          <p:cNvPr id="18" name="Text 16"/>
+          <p:cNvSpPr txBox="1"/>
+          <p:nvPr/>
+        </p:nvSpPr>
+        <p:spPr>
+          <a:xfrm>
+            <a:off x="7899197" y="2606040"/>
+            <a:ext cx="3332378" cy="320040"/>
+          </a:xfrm>
+          <a:prstGeom prst="rect">
+            <a:avLst/>
+          </a:prstGeom>
+          <a:noFill/>
+          <a:ln/>
+        </p:spPr>
+        <p:txBody>
+          <a:bodyPr wrap="square" lIns="0" tIns="0" rIns="0" bIns="0" rtlCol="0" anchor="t"/>
+          <a:lstStyle/>
+          <a:p>
+            <a:pPr indent="0" marL="0">
+              <a:buNone/>
+            </a:pPr>
+            <a:r>
+              <a:rPr lang="en-US" sz="1300" dirty="0">
+                <a:solidFill>
+                  <a:schemeClr val="accent3"/>
+                </a:solidFill>
+              </a:rPr>
+              <a:t>110 t  ·  25,2 til 12,1 %  ·  52 timer</a:t>
+            </a:r>
+            <a:endParaRPr lang="en-US" sz="1300" dirty="0"/>
+          </a:p>
+        </p:txBody>
+      </p:sp>
+      <p:sp>
+        <p:nvSpPr>
+          <p:cNvPr id="19" name="Text 17"/>
+          <p:cNvSpPr txBox="1"/>
+          <p:nvPr/>
+        </p:nvSpPr>
+        <p:spPr>
+          <a:xfrm>
+            <a:off x="7899197" y="3063240"/>
+            <a:ext cx="3332378" cy="822960"/>
           </a:xfrm>
           <a:prstGeom prst="rect">
             <a:avLst/>
@@ -15966,92 +15607,151 @@
               <a:buNone/>
             </a:pPr>
             <a:r>
-              <a:rPr lang="en-US" sz="9600" b="1" dirty="0">
-                <a:solidFill>
-                  <a:schemeClr val="accent1"/>
-                </a:solidFill>
-              </a:rPr>
-              <a:t>6</a:t>
-            </a:r>
-            <a:endParaRPr lang="en-US" sz="9600" dirty="0"/>
-          </a:p>
-        </p:txBody>
-      </p:sp>
-      <p:sp>
-        <p:nvSpPr>
-          <p:cNvPr id="7" name="Text 4"/>
-          <p:cNvSpPr txBox="1"/>
-          <p:nvPr/>
-        </p:nvSpPr>
-        <p:spPr>
-          <a:xfrm>
-            <a:off x="9281160" y="3703320"/>
-            <a:ext cx="2194560" cy="822960"/>
-          </a:xfrm>
-          <a:prstGeom prst="rect">
-            <a:avLst/>
-          </a:prstGeom>
-          <a:noFill/>
-          <a:ln/>
-        </p:spPr>
-        <p:txBody>
-          <a:bodyPr wrap="square" lIns="0" tIns="0" rIns="0" bIns="0" rtlCol="0" anchor="t"/>
-          <a:lstStyle/>
-          <a:p>
-            <a:pPr indent="0" marL="0">
-              <a:buNone/>
-            </a:pPr>
-            <a:r>
-              <a:rPr lang="en-US" sz="1700" dirty="0">
+              <a:rPr lang="en-US" sz="4400" b="1" dirty="0">
                 <a:solidFill>
                   <a:schemeClr val="bg1"/>
                 </a:solidFill>
               </a:rPr>
-              <a:t>prøver under 1020 g onsdag aften</a:t>
-            </a:r>
-            <a:endParaRPr lang="en-US" sz="1700" dirty="0"/>
-          </a:p>
-        </p:txBody>
-      </p:sp>
-      <p:sp>
-        <p:nvSpPr>
-          <p:cNvPr id="8" name="Text 5"/>
-          <p:cNvSpPr txBox="1"/>
-          <p:nvPr/>
-        </p:nvSpPr>
-        <p:spPr>
-          <a:xfrm>
-            <a:off x="9281160" y="4663440"/>
-            <a:ext cx="2221992" cy="1280160"/>
-          </a:xfrm>
-          <a:prstGeom prst="rect">
-            <a:avLst/>
-          </a:prstGeom>
-          <a:noFill/>
-          <a:ln/>
-        </p:spPr>
-        <p:txBody>
-          <a:bodyPr wrap="square" lIns="0" tIns="0" rIns="0" bIns="0" rtlCol="0" anchor="t"/>
-          <a:lstStyle/>
-          <a:p>
-            <a:pPr indent="0" marL="0">
-              <a:buNone/>
-            </a:pPr>
-            <a:r>
-              <a:rPr lang="en-US" sz="1200" dirty="0">
+              <a:t>16.394 kg</a:t>
+            </a:r>
+            <a:endParaRPr lang="en-US" sz="4400" dirty="0"/>
+          </a:p>
+        </p:txBody>
+      </p:sp>
+      <p:sp>
+        <p:nvSpPr>
+          <p:cNvPr id="20" name="Text 18"/>
+          <p:cNvSpPr txBox="1"/>
+          <p:nvPr/>
+        </p:nvSpPr>
+        <p:spPr>
+          <a:xfrm>
+            <a:off x="7899197" y="3931920"/>
+            <a:ext cx="3332378" cy="320040"/>
+          </a:xfrm>
+          <a:prstGeom prst="rect">
+            <a:avLst/>
+          </a:prstGeom>
+          <a:noFill/>
+          <a:ln/>
+        </p:spPr>
+        <p:txBody>
+          <a:bodyPr wrap="square" lIns="0" tIns="0" rIns="0" bIns="0" rtlCol="0" anchor="t"/>
+          <a:lstStyle/>
+          <a:p>
+            <a:pPr indent="0" marL="0">
+              <a:buNone/>
+            </a:pPr>
+            <a:r>
+              <a:rPr lang="en-US" sz="1500" dirty="0">
                 <a:solidFill>
                   <a:schemeClr val="accent3"/>
                 </a:solidFill>
               </a:rPr>
-              <a:t>Grå linjer er kontrolgrænser fra mandag og tirsdag. Det farvede felt er onsdag 16.30 til 21.30.</a:t>
-            </a:r>
-            <a:endParaRPr lang="en-US" sz="1200" dirty="0"/>
-          </a:p>
-        </p:txBody>
-      </p:sp>
-      <p:sp>
-        <p:nvSpPr>
-          <p:cNvPr id="9" name="Text 6"/>
+              <a:t>vand fjernet</a:t>
+            </a:r>
+            <a:endParaRPr lang="en-US" sz="1500" dirty="0"/>
+          </a:p>
+        </p:txBody>
+      </p:sp>
+      <p:sp>
+        <p:nvSpPr>
+          <p:cNvPr id="21" name="Text 19"/>
+          <p:cNvSpPr txBox="1"/>
+          <p:nvPr/>
+        </p:nvSpPr>
+        <p:spPr>
+          <a:xfrm>
+            <a:off x="7899197" y="4526280"/>
+            <a:ext cx="3332378" cy="411480"/>
+          </a:xfrm>
+          <a:prstGeom prst="rect">
+            <a:avLst/>
+          </a:prstGeom>
+          <a:noFill/>
+          <a:ln/>
+        </p:spPr>
+        <p:txBody>
+          <a:bodyPr wrap="square" lIns="0" tIns="0" rIns="0" bIns="0" rtlCol="0" anchor="t"/>
+          <a:lstStyle/>
+          <a:p>
+            <a:pPr indent="0" marL="0">
+              <a:buNone/>
+            </a:pPr>
+            <a:r>
+              <a:rPr lang="en-US" sz="2200" b="1" dirty="0">
+                <a:solidFill>
+                  <a:schemeClr val="bg1"/>
+                </a:solidFill>
+              </a:rPr>
+              <a:t>315 kg pr. time</a:t>
+            </a:r>
+            <a:endParaRPr lang="en-US" sz="2200" dirty="0"/>
+          </a:p>
+        </p:txBody>
+      </p:sp>
+      <p:sp>
+        <p:nvSpPr>
+          <p:cNvPr id="22" name="Text 20"/>
+          <p:cNvSpPr txBox="1"/>
+          <p:nvPr/>
+        </p:nvSpPr>
+        <p:spPr>
+          <a:xfrm>
+            <a:off x="7899197" y="4983480"/>
+            <a:ext cx="3332378" cy="411480"/>
+          </a:xfrm>
+          <a:prstGeom prst="rect">
+            <a:avLst/>
+          </a:prstGeom>
+          <a:noFill/>
+          <a:ln/>
+        </p:spPr>
+        <p:txBody>
+          <a:bodyPr wrap="square" lIns="0" tIns="0" rIns="0" bIns="0" rtlCol="0" anchor="t"/>
+          <a:lstStyle/>
+          <a:p>
+            <a:pPr indent="0" marL="0">
+              <a:buNone/>
+            </a:pPr>
+            <a:r>
+              <a:rPr lang="en-US" sz="2200" b="1" dirty="0">
+                <a:solidFill>
+                  <a:schemeClr val="bg1"/>
+                </a:solidFill>
+              </a:rPr>
+              <a:t>87,9 % tørstof ved slut</a:t>
+            </a:r>
+            <a:endParaRPr lang="en-US" sz="2200" dirty="0"/>
+          </a:p>
+        </p:txBody>
+      </p:sp>
+      <p:sp>
+        <p:nvSpPr>
+          <p:cNvPr id="23" name="Shape 21"/>
+          <p:cNvSpPr/>
+          <p:nvPr/>
+        </p:nvSpPr>
+        <p:spPr>
+          <a:xfrm>
+            <a:off x="7624877" y="2331720"/>
+            <a:ext cx="0" cy="3108960"/>
+          </a:xfrm>
+          <a:prstGeom prst="line">
+            <a:avLst/>
+          </a:prstGeom>
+          <a:noFill/>
+          <a:ln w="12700">
+            <a:solidFill>
+              <a:schemeClr val="accent5"/>
+            </a:solidFill>
+            <a:prstDash val="solid"/>
+          </a:ln>
+        </p:spPr>
+      </p:sp>
+      <p:sp>
+        <p:nvSpPr>
+          <p:cNvPr id="24" name="Text 22"/>
           <p:cNvSpPr txBox="1"/>
           <p:nvPr/>
         </p:nvSpPr>
@@ -16079,7 +15779,7 @@
                   <a:schemeClr val="accent3"/>
                 </a:solidFill>
               </a:rPr>
-              <a:t>Gennemsnitsvægt pr. time på Fylder 3, gram. Specifikation 1020 til 1050 g.</a:t>
+              <a:t>Samme tre regnestykker som i Opgave 13. AI laver dem for alle 14 batches på ét prompt.</a:t>
             </a:r>
             <a:endParaRPr lang="en-US" sz="1200" dirty="0"/>
           </a:p>
@@ -16140,7 +15840,7 @@
                   <a:schemeClr val="accent3"/>
                 </a:solidFill>
               </a:rPr>
-              <a:t>PROMPT 4  ·  KØLERUM</a:t>
+              <a:t>PROMPT 4  ·  TØRREKURVE</a:t>
             </a:r>
             <a:endParaRPr lang="en-US" sz="1200" dirty="0"/>
           </a:p>
@@ -16181,7 +15881,7 @@
                   <a:schemeClr val="bg1"/>
                 </a:solidFill>
               </a:rPr>
-              <a:t>Kølerum 2 var over 5,0 °C i </a:t>
+              <a:t>Tørrekurven for T-14 </a:t>
             </a:r>
             <a:pPr algn="l" indent="0" marL="0">
               <a:lnSpc>
@@ -16195,7 +15895,7 @@
                   <a:schemeClr val="accent1"/>
                 </a:solidFill>
               </a:rPr>
-              <a:t>fem målinger i træk</a:t>
+              <a:t>gik i stå efter tre døgn</a:t>
             </a:r>
             <a:endParaRPr lang="en-US" sz="3400" dirty="0"/>
           </a:p>
@@ -16209,8 +15909,8 @@
         </p:nvSpPr>
         <p:spPr>
           <a:xfrm>
-            <a:off x="1913910" y="2422246"/>
-            <a:ext cx="2848708" cy="3035808"/>
+            <a:off x="4935266" y="2422246"/>
+            <a:ext cx="3815542" cy="3035808"/>
           </a:xfrm>
           <a:prstGeom prst="rect">
             <a:avLst/>
@@ -16253,7 +15953,7 @@
         <p:spPr>
           <a:xfrm>
             <a:off x="9281160" y="2286000"/>
-            <a:ext cx="2240280" cy="1371600"/>
+            <a:ext cx="2286000" cy="1371600"/>
           </a:xfrm>
           <a:prstGeom prst="rect">
             <a:avLst/>
@@ -16269,14 +15969,14 @@
               <a:buNone/>
             </a:pPr>
             <a:r>
-              <a:rPr lang="en-US" sz="5000" b="1" dirty="0">
+              <a:rPr lang="en-US" sz="6400" b="1" dirty="0">
                 <a:solidFill>
                   <a:schemeClr val="accent1"/>
                 </a:solidFill>
               </a:rPr>
-              <a:t>7,4 °C</a:t>
-            </a:r>
-            <a:endParaRPr lang="en-US" sz="5000" dirty="0"/>
+              <a:t>91 %</a:t>
+            </a:r>
+            <a:endParaRPr lang="en-US" sz="6400" dirty="0"/>
           </a:p>
         </p:txBody>
       </p:sp>
@@ -16310,7 +16010,7 @@
                   <a:schemeClr val="bg1"/>
                 </a:solidFill>
               </a:rPr>
-              <a:t>højeste måling, onsdag kl. 03.00</a:t>
+              <a:t>luftfugtighed udenfor fra 1. til 7. oktober</a:t>
             </a:r>
             <a:endParaRPr lang="en-US" sz="1700" dirty="0"/>
           </a:p>
@@ -16325,7 +16025,7 @@
         <p:spPr>
           <a:xfrm>
             <a:off x="9281160" y="4663440"/>
-            <a:ext cx="2221992" cy="914400"/>
+            <a:ext cx="2221992" cy="1280160"/>
           </a:xfrm>
           <a:prstGeom prst="rect">
             <a:avLst/>
@@ -16346,7 +16046,7 @@
                   <a:schemeClr val="accent3"/>
                 </a:solidFill>
               </a:rPr>
-              <a:t>Grå linje er grænsen på 5,0 °C fra HACCP-planen.</a:t>
+              <a:t>Omgivelsesluft kan ikke tørre i den luft. Hvid linje er T-14, grå er T-07. Det farvede felt er fra 2. oktober.</a:t>
             </a:r>
             <a:endParaRPr lang="en-US" sz="1200" dirty="0"/>
           </a:p>
@@ -16382,7 +16082,7 @@
                   <a:schemeClr val="accent3"/>
                 </a:solidFill>
               </a:rPr>
-              <a:t>Kølerum 2 onsdag 7. oktober, målt hver time, °C.</a:t>
+              <a:t>Vandindhold hver 4. time, de første 128 timer. Den nederste grå linje er grænsen for korn på 15,5 %.</a:t>
             </a:r>
             <a:endParaRPr lang="en-US" sz="1200" dirty="0"/>
           </a:p>
@@ -16579,7 +16279,7 @@
                   <a:schemeClr val="accent3"/>
                 </a:solidFill>
               </a:rPr>
-              <a:t>PROMPT 5  ·  SVIND OG KVALITET</a:t>
+              <a:t>PROMPT 5  ·  ENERGI OG KVALITET</a:t>
             </a:r>
             <a:endParaRPr lang="en-US" sz="1200" dirty="0"/>
           </a:p>
@@ -16620,7 +16320,7 @@
                   <a:schemeClr val="bg1"/>
                 </a:solidFill>
               </a:rPr>
-              <a:t>Ét batch trak sødmælk op på </a:t>
+              <a:t>Weekenden kostede </a:t>
             </a:r>
             <a:pPr algn="l" indent="0" marL="0">
               <a:lnSpc>
@@ -16634,7 +16334,7 @@
                   <a:schemeClr val="accent1"/>
                 </a:solidFill>
               </a:rPr>
-              <a:t>1,70 % svind</a:t>
+              <a:t>2.500 kr. i strøm</a:t>
             </a:r>
             <a:endParaRPr lang="en-US" sz="3400" dirty="0"/>
           </a:p>
@@ -16647,8 +16347,8 @@
           <p:nvPr/>
         </p:nvGraphicFramePr>
         <p:xfrm>
-          <a:off x="685800" y="2240280"/>
-          <a:ext cx="7863840" cy="3657600"/>
+          <a:off x="685800" y="2194560"/>
+          <a:ext cx="7863840" cy="3794760"/>
         </p:xfrm>
         <a:graphic xmlns:a="http://schemas.openxmlformats.org/drawingml/2006/main">
           <a:graphicData uri="http://schemas.openxmlformats.org/drawingml/2006/chart">
@@ -16681,14 +16381,14 @@
               <a:buNone/>
             </a:pPr>
             <a:r>
-              <a:rPr lang="en-US" sz="4400" b="1" dirty="0">
+              <a:rPr lang="en-US" sz="6000" b="1" dirty="0">
                 <a:solidFill>
                   <a:schemeClr val="accent1"/>
                 </a:solidFill>
               </a:rPr>
-              <a:t>4.522 kg</a:t>
-            </a:r>
-            <a:endParaRPr lang="en-US" sz="4400" dirty="0"/>
+              <a:t>9,2 %</a:t>
+            </a:r>
+            <a:endParaRPr lang="en-US" sz="6000" dirty="0"/>
           </a:p>
         </p:txBody>
       </p:sp>
@@ -16722,7 +16422,7 @@
                   <a:schemeClr val="bg1"/>
                 </a:solidFill>
               </a:rPr>
-              <a:t>mælk tabt i alt i ugen, 1,37 % af det indvejede</a:t>
+              <a:t>vandindhold i dilden. Grænsen er 10,0 til 12,5 %</a:t>
             </a:r>
             <a:endParaRPr lang="en-US" sz="1700" dirty="0"/>
           </a:p>
@@ -16737,7 +16437,7 @@
         <p:spPr>
           <a:xfrm>
             <a:off x="8869680" y="4617720"/>
-            <a:ext cx="2606040" cy="1188720"/>
+            <a:ext cx="2606040" cy="1280160"/>
           </a:xfrm>
           <a:prstGeom prst="rect">
             <a:avLst/>
@@ -16758,7 +16458,7 @@
                   <a:schemeClr val="accent3"/>
                 </a:solidFill>
               </a:rPr>
-              <a:t>Batch 41-024 torsdag aften tabte 4,6 %. CIP startede for tidligt ifølge noterne.</a:t>
+              <a:t>T-12 kørte 72 timer, hvor T-02 tog 44. Blæser og varme kørte weekenden over, og urterne smuldrer.</a:t>
             </a:r>
             <a:endParaRPr lang="en-US" sz="1300" dirty="0"/>
           </a:p>
@@ -16794,7 +16494,7 @@
                   <a:schemeClr val="accent3"/>
                 </a:solidFill>
               </a:rPr>
-              <a:t>Svind pr. produkt i uge 41, procent af mælk ind.</a:t>
+              <a:t>Strøm til blæser og varme pr. ton færdig vare, kr. Fiktiv pris på 1,85 kr. pr. kWh. T-14 er ikke færdig.</a:t>
             </a:r>
             <a:endParaRPr lang="en-US" sz="1200" dirty="0"/>
           </a:p>
@@ -16947,58 +16647,36 @@
               <a:buNone/>
             </a:pPr>
             <a:r>
-              <a:rPr lang="en-US" sz="3000" b="1" dirty="0">
+              <a:rPr lang="en-US" sz="3600" b="1" dirty="0">
                 <a:solidFill>
                   <a:schemeClr val="bg1"/>
                 </a:solidFill>
               </a:rPr>
-              <a:t>=</a:t>
-            </a:r>
-            <a:pPr indent="0" marL="0">
-              <a:buNone/>
-            </a:pPr>
-            <a:r>
-              <a:rPr lang="en-US" sz="3000" b="1" dirty="0">
+              <a:t>=G2*(1-</a:t>
+            </a:r>
+            <a:pPr indent="0" marL="0">
+              <a:buNone/>
+            </a:pPr>
+            <a:r>
+              <a:rPr lang="en-US" sz="3600" b="1" dirty="0">
                 <a:solidFill>
                   <a:schemeClr val="accent1"/>
                 </a:solidFill>
               </a:rPr>
-              <a:t>HVIS</a:t>
-            </a:r>
-            <a:pPr indent="0" marL="0">
-              <a:buNone/>
-            </a:pPr>
-            <a:r>
-              <a:rPr lang="en-US" sz="3000" b="1" dirty="0">
+              <a:t>(1-H2)/(1-I2)</a:t>
+            </a:r>
+            <a:pPr indent="0" marL="0">
+              <a:buNone/>
+            </a:pPr>
+            <a:r>
+              <a:rPr lang="en-US" sz="3600" b="1" dirty="0">
                 <a:solidFill>
                   <a:schemeClr val="bg1"/>
                 </a:solidFill>
               </a:rPr>
-              <a:t>(</a:t>
-            </a:r>
-            <a:pPr indent="0" marL="0">
-              <a:buNone/>
-            </a:pPr>
-            <a:r>
-              <a:rPr lang="en-US" sz="3000" b="1" dirty="0">
-                <a:solidFill>
-                  <a:schemeClr val="accent1"/>
-                </a:solidFill>
-              </a:rPr>
-              <a:t>ELLER</a:t>
-            </a:r>
-            <a:pPr indent="0" marL="0">
-              <a:buNone/>
-            </a:pPr>
-            <a:r>
-              <a:rPr lang="en-US" sz="3000" b="1" dirty="0">
-                <a:solidFill>
-                  <a:schemeClr val="bg1"/>
-                </a:solidFill>
-              </a:rPr>
-              <a:t>(C2&lt;72;D2&lt;15);"AFVIGELSE";"OK")</a:t>
-            </a:r>
-            <a:endParaRPr lang="en-US" sz="3000" dirty="0"/>
+              <a:t>)</a:t>
+            </a:r>
+            <a:endParaRPr lang="en-US" sz="3600" dirty="0"/>
           </a:p>
         </p:txBody>
       </p:sp>
@@ -17011,7 +16689,7 @@
         <p:spPr>
           <a:xfrm>
             <a:off x="685800" y="4251960"/>
-            <a:ext cx="9144000" cy="914400"/>
+            <a:ext cx="9601200" cy="914400"/>
           </a:xfrm>
           <a:prstGeom prst="rect">
             <a:avLst/>
@@ -17032,7 +16710,7 @@
                   <a:schemeClr val="accent3"/>
                 </a:solidFill>
               </a:rPr>
-              <a:t>Skriver AFVIGELSE ud for alle pasteurmålinger under 72 °C eller med holdetid under 15 sekunder.</a:t>
+              <a:t>Vand fjernet i kg. Tørstoffet er det samme før og efter, så massen ud er tørstof delt med 1 minus vandindhold ud.</a:t>
             </a:r>
             <a:endParaRPr lang="en-US" sz="2100" dirty="0"/>
           </a:p>
@@ -17068,7 +16746,7 @@
                   <a:schemeClr val="accent3"/>
                 </a:solidFill>
               </a:rPr>
-              <a:t>Dansk Excel bruger semikolon og danske funktionsnavne.</a:t>
+              <a:t>G er ind i kg, H er vandindhold ind, og I er vandindhold ud. Dansk Excel bruger semikolon i funktioner.</a:t>
             </a:r>
             <a:endParaRPr lang="en-US" sz="1200" dirty="0"/>
           </a:p>
@@ -17222,7 +16900,7 @@
         <p:spPr>
           <a:xfrm>
             <a:off x="685800" y="4389120"/>
-            <a:ext cx="2164019" cy="274320"/>
+            <a:ext cx="1202233" cy="274320"/>
           </a:xfrm>
           <a:prstGeom prst="rect">
             <a:avLst/>
@@ -17243,7 +16921,7 @@
                   <a:schemeClr val="accent3"/>
                 </a:solidFill>
               </a:rPr>
-              <a:t>Mandag</a:t>
+              <a:t>Uge 33</a:t>
             </a:r>
             <a:endParaRPr lang="en-US" sz="1300" dirty="0"/>
           </a:p>
@@ -17257,8 +16935,8 @@
         </p:nvSpPr>
         <p:spPr>
           <a:xfrm>
-            <a:off x="2849819" y="4389120"/>
-            <a:ext cx="2164019" cy="274320"/>
+            <a:off x="1888033" y="4389120"/>
+            <a:ext cx="1202233" cy="274320"/>
           </a:xfrm>
           <a:prstGeom prst="rect">
             <a:avLst/>
@@ -17279,7 +16957,7 @@
                   <a:schemeClr val="accent3"/>
                 </a:solidFill>
               </a:rPr>
-              <a:t>Tirsdag</a:t>
+              <a:t>34</a:t>
             </a:r>
             <a:endParaRPr lang="en-US" sz="1300" dirty="0"/>
           </a:p>
@@ -17293,7 +16971,7 @@
         </p:nvSpPr>
         <p:spPr>
           <a:xfrm>
-            <a:off x="2849819" y="4087368"/>
+            <a:off x="1888033" y="4087368"/>
             <a:ext cx="0" cy="146304"/>
           </a:xfrm>
           <a:prstGeom prst="line">
@@ -17316,8 +16994,8 @@
         </p:nvSpPr>
         <p:spPr>
           <a:xfrm>
-            <a:off x="5013838" y="4389120"/>
-            <a:ext cx="2164019" cy="274320"/>
+            <a:off x="3090266" y="4389120"/>
+            <a:ext cx="1202233" cy="274320"/>
           </a:xfrm>
           <a:prstGeom prst="rect">
             <a:avLst/>
@@ -17338,7 +17016,7 @@
                   <a:schemeClr val="accent3"/>
                 </a:solidFill>
               </a:rPr>
-              <a:t>Onsdag</a:t>
+              <a:t>35</a:t>
             </a:r>
             <a:endParaRPr lang="en-US" sz="1300" dirty="0"/>
           </a:p>
@@ -17352,7 +17030,7 @@
         </p:nvSpPr>
         <p:spPr>
           <a:xfrm>
-            <a:off x="5013838" y="4087368"/>
+            <a:off x="3090266" y="4087368"/>
             <a:ext cx="0" cy="146304"/>
           </a:xfrm>
           <a:prstGeom prst="line">
@@ -17375,8 +17053,8 @@
         </p:nvSpPr>
         <p:spPr>
           <a:xfrm>
-            <a:off x="7177857" y="4389120"/>
-            <a:ext cx="2164019" cy="274320"/>
+            <a:off x="4292498" y="4389120"/>
+            <a:ext cx="1202233" cy="274320"/>
           </a:xfrm>
           <a:prstGeom prst="rect">
             <a:avLst/>
@@ -17397,7 +17075,7 @@
                   <a:schemeClr val="accent3"/>
                 </a:solidFill>
               </a:rPr>
-              <a:t>Torsdag</a:t>
+              <a:t>36</a:t>
             </a:r>
             <a:endParaRPr lang="en-US" sz="1300" dirty="0"/>
           </a:p>
@@ -17411,7 +17089,7 @@
         </p:nvSpPr>
         <p:spPr>
           <a:xfrm>
-            <a:off x="7177857" y="4087368"/>
+            <a:off x="4292498" y="4087368"/>
             <a:ext cx="0" cy="146304"/>
           </a:xfrm>
           <a:prstGeom prst="line">
@@ -17434,8 +17112,8 @@
         </p:nvSpPr>
         <p:spPr>
           <a:xfrm>
-            <a:off x="9341876" y="4389120"/>
-            <a:ext cx="2164019" cy="274320"/>
+            <a:off x="5494731" y="4389120"/>
+            <a:ext cx="1202233" cy="274320"/>
           </a:xfrm>
           <a:prstGeom prst="rect">
             <a:avLst/>
@@ -17456,7 +17134,7 @@
                   <a:schemeClr val="accent3"/>
                 </a:solidFill>
               </a:rPr>
-              <a:t>Fredag</a:t>
+              <a:t>37</a:t>
             </a:r>
             <a:endParaRPr lang="en-US" sz="1300" dirty="0"/>
           </a:p>
@@ -17470,7 +17148,7 @@
         </p:nvSpPr>
         <p:spPr>
           <a:xfrm>
-            <a:off x="9341876" y="4087368"/>
+            <a:off x="5494731" y="4087368"/>
             <a:ext cx="0" cy="146304"/>
           </a:xfrm>
           <a:prstGeom prst="line">
@@ -17487,14 +17165,50 @@
       </p:sp>
       <p:sp>
         <p:nvSpPr>
-          <p:cNvPr id="14" name="Shape 12"/>
+          <p:cNvPr id="14" name="Text 12"/>
+          <p:cNvSpPr txBox="1"/>
+          <p:nvPr/>
+        </p:nvSpPr>
+        <p:spPr>
+          <a:xfrm>
+            <a:off x="6696964" y="4389120"/>
+            <a:ext cx="1202233" cy="274320"/>
+          </a:xfrm>
+          <a:prstGeom prst="rect">
+            <a:avLst/>
+          </a:prstGeom>
+          <a:noFill/>
+          <a:ln/>
+        </p:spPr>
+        <p:txBody>
+          <a:bodyPr wrap="square" lIns="0" tIns="0" rIns="0" bIns="0" rtlCol="0" anchor="t"/>
+          <a:lstStyle/>
+          <a:p>
+            <a:pPr indent="0" marL="0">
+              <a:buNone/>
+            </a:pPr>
+            <a:r>
+              <a:rPr lang="en-US" sz="1300" dirty="0">
+                <a:solidFill>
+                  <a:schemeClr val="accent3"/>
+                </a:solidFill>
+              </a:rPr>
+              <a:t>38</a:t>
+            </a:r>
+            <a:endParaRPr lang="en-US" sz="1300" dirty="0"/>
+          </a:p>
+        </p:txBody>
+      </p:sp>
+      <p:sp>
+        <p:nvSpPr>
+          <p:cNvPr id="15" name="Shape 13"/>
           <p:cNvSpPr/>
           <p:nvPr/>
         </p:nvSpPr>
         <p:spPr>
           <a:xfrm>
-            <a:off x="4139214" y="3474720"/>
-            <a:ext cx="0" cy="685800"/>
+            <a:off x="6696964" y="4087368"/>
+            <a:ext cx="0" cy="146304"/>
           </a:xfrm>
           <a:prstGeom prst="line">
             <a:avLst/>
@@ -17510,13 +17224,213 @@
       </p:sp>
       <p:sp>
         <p:nvSpPr>
-          <p:cNvPr id="15" name="Shape 13"/>
+          <p:cNvPr id="16" name="Text 14"/>
+          <p:cNvSpPr txBox="1"/>
+          <p:nvPr/>
+        </p:nvSpPr>
+        <p:spPr>
+          <a:xfrm>
+            <a:off x="7899197" y="4389120"/>
+            <a:ext cx="1202233" cy="274320"/>
+          </a:xfrm>
+          <a:prstGeom prst="rect">
+            <a:avLst/>
+          </a:prstGeom>
+          <a:noFill/>
+          <a:ln/>
+        </p:spPr>
+        <p:txBody>
+          <a:bodyPr wrap="square" lIns="0" tIns="0" rIns="0" bIns="0" rtlCol="0" anchor="t"/>
+          <a:lstStyle/>
+          <a:p>
+            <a:pPr indent="0" marL="0">
+              <a:buNone/>
+            </a:pPr>
+            <a:r>
+              <a:rPr lang="en-US" sz="1300" dirty="0">
+                <a:solidFill>
+                  <a:schemeClr val="accent3"/>
+                </a:solidFill>
+              </a:rPr>
+              <a:t>39</a:t>
+            </a:r>
+            <a:endParaRPr lang="en-US" sz="1300" dirty="0"/>
+          </a:p>
+        </p:txBody>
+      </p:sp>
+      <p:sp>
+        <p:nvSpPr>
+          <p:cNvPr id="17" name="Shape 15"/>
           <p:cNvSpPr/>
           <p:nvPr/>
         </p:nvSpPr>
         <p:spPr>
           <a:xfrm>
-            <a:off x="4056918" y="4078224"/>
+            <a:off x="7899197" y="4087368"/>
+            <a:ext cx="0" cy="146304"/>
+          </a:xfrm>
+          <a:prstGeom prst="line">
+            <a:avLst/>
+          </a:prstGeom>
+          <a:noFill/>
+          <a:ln w="12700">
+            <a:solidFill>
+              <a:schemeClr val="accent5"/>
+            </a:solidFill>
+            <a:prstDash val="solid"/>
+          </a:ln>
+        </p:spPr>
+      </p:sp>
+      <p:sp>
+        <p:nvSpPr>
+          <p:cNvPr id="18" name="Text 16"/>
+          <p:cNvSpPr txBox="1"/>
+          <p:nvPr/>
+        </p:nvSpPr>
+        <p:spPr>
+          <a:xfrm>
+            <a:off x="9101430" y="4389120"/>
+            <a:ext cx="1202233" cy="274320"/>
+          </a:xfrm>
+          <a:prstGeom prst="rect">
+            <a:avLst/>
+          </a:prstGeom>
+          <a:noFill/>
+          <a:ln/>
+        </p:spPr>
+        <p:txBody>
+          <a:bodyPr wrap="square" lIns="0" tIns="0" rIns="0" bIns="0" rtlCol="0" anchor="t"/>
+          <a:lstStyle/>
+          <a:p>
+            <a:pPr indent="0" marL="0">
+              <a:buNone/>
+            </a:pPr>
+            <a:r>
+              <a:rPr lang="en-US" sz="1300" dirty="0">
+                <a:solidFill>
+                  <a:schemeClr val="accent3"/>
+                </a:solidFill>
+              </a:rPr>
+              <a:t>40</a:t>
+            </a:r>
+            <a:endParaRPr lang="en-US" sz="1300" dirty="0"/>
+          </a:p>
+        </p:txBody>
+      </p:sp>
+      <p:sp>
+        <p:nvSpPr>
+          <p:cNvPr id="19" name="Shape 17"/>
+          <p:cNvSpPr/>
+          <p:nvPr/>
+        </p:nvSpPr>
+        <p:spPr>
+          <a:xfrm>
+            <a:off x="9101430" y="4087368"/>
+            <a:ext cx="0" cy="146304"/>
+          </a:xfrm>
+          <a:prstGeom prst="line">
+            <a:avLst/>
+          </a:prstGeom>
+          <a:noFill/>
+          <a:ln w="12700">
+            <a:solidFill>
+              <a:schemeClr val="accent5"/>
+            </a:solidFill>
+            <a:prstDash val="solid"/>
+          </a:ln>
+        </p:spPr>
+      </p:sp>
+      <p:sp>
+        <p:nvSpPr>
+          <p:cNvPr id="20" name="Text 18"/>
+          <p:cNvSpPr txBox="1"/>
+          <p:nvPr/>
+        </p:nvSpPr>
+        <p:spPr>
+          <a:xfrm>
+            <a:off x="10303662" y="4389120"/>
+            <a:ext cx="1202233" cy="274320"/>
+          </a:xfrm>
+          <a:prstGeom prst="rect">
+            <a:avLst/>
+          </a:prstGeom>
+          <a:noFill/>
+          <a:ln/>
+        </p:spPr>
+        <p:txBody>
+          <a:bodyPr wrap="square" lIns="0" tIns="0" rIns="0" bIns="0" rtlCol="0" anchor="t"/>
+          <a:lstStyle/>
+          <a:p>
+            <a:pPr indent="0" marL="0">
+              <a:buNone/>
+            </a:pPr>
+            <a:r>
+              <a:rPr lang="en-US" sz="1300" dirty="0">
+                <a:solidFill>
+                  <a:schemeClr val="accent3"/>
+                </a:solidFill>
+              </a:rPr>
+              <a:t>41</a:t>
+            </a:r>
+            <a:endParaRPr lang="en-US" sz="1300" dirty="0"/>
+          </a:p>
+        </p:txBody>
+      </p:sp>
+      <p:sp>
+        <p:nvSpPr>
+          <p:cNvPr id="21" name="Shape 19"/>
+          <p:cNvSpPr/>
+          <p:nvPr/>
+        </p:nvSpPr>
+        <p:spPr>
+          <a:xfrm>
+            <a:off x="10303662" y="4087368"/>
+            <a:ext cx="0" cy="146304"/>
+          </a:xfrm>
+          <a:prstGeom prst="line">
+            <a:avLst/>
+          </a:prstGeom>
+          <a:noFill/>
+          <a:ln w="12700">
+            <a:solidFill>
+              <a:schemeClr val="accent5"/>
+            </a:solidFill>
+            <a:prstDash val="solid"/>
+          </a:ln>
+        </p:spPr>
+      </p:sp>
+      <p:sp>
+        <p:nvSpPr>
+          <p:cNvPr id="22" name="Shape 20"/>
+          <p:cNvSpPr/>
+          <p:nvPr/>
+        </p:nvSpPr>
+        <p:spPr>
+          <a:xfrm>
+            <a:off x="1630411" y="2971800"/>
+            <a:ext cx="0" cy="1188720"/>
+          </a:xfrm>
+          <a:prstGeom prst="line">
+            <a:avLst/>
+          </a:prstGeom>
+          <a:noFill/>
+          <a:ln w="12700">
+            <a:solidFill>
+              <a:schemeClr val="accent5"/>
+            </a:solidFill>
+            <a:prstDash val="solid"/>
+          </a:ln>
+        </p:spPr>
+      </p:sp>
+      <p:sp>
+        <p:nvSpPr>
+          <p:cNvPr id="23" name="Shape 21"/>
+          <p:cNvSpPr/>
+          <p:nvPr/>
+        </p:nvSpPr>
+        <p:spPr>
+          <a:xfrm>
+            <a:off x="1548115" y="4078224"/>
             <a:ext cx="164592" cy="164592"/>
           </a:xfrm>
           <a:prstGeom prst="ellipse">
@@ -17535,14 +17449,14 @@
       </p:sp>
       <p:sp>
         <p:nvSpPr>
-          <p:cNvPr id="16" name="Text 14"/>
-          <p:cNvSpPr txBox="1"/>
-          <p:nvPr/>
-        </p:nvSpPr>
-        <p:spPr>
-          <a:xfrm>
-            <a:off x="3224814" y="3108960"/>
-            <a:ext cx="1828800" cy="365760"/>
+          <p:cNvPr id="24" name="Text 22"/>
+          <p:cNvSpPr txBox="1"/>
+          <p:nvPr/>
+        </p:nvSpPr>
+        <p:spPr>
+          <a:xfrm>
+            <a:off x="624571" y="2606040"/>
+            <a:ext cx="2011680" cy="365760"/>
           </a:xfrm>
           <a:prstGeom prst="rect">
             <a:avLst/>
@@ -17563,7 +17477,7 @@
                   <a:schemeClr val="bg1"/>
                 </a:solidFill>
               </a:rPr>
-              <a:t>Dampventil</a:t>
+              <a:t>Regn</a:t>
             </a:r>
             <a:endParaRPr lang="en-US" sz="1400" dirty="0"/>
           </a:p>
@@ -17571,13 +17485,13 @@
       </p:sp>
       <p:sp>
         <p:nvSpPr>
-          <p:cNvPr id="17" name="Shape 15"/>
+          <p:cNvPr id="25" name="Shape 23"/>
           <p:cNvSpPr/>
           <p:nvPr/>
         </p:nvSpPr>
         <p:spPr>
           <a:xfrm>
-            <a:off x="5284340" y="4160520"/>
+            <a:off x="1991081" y="4160520"/>
             <a:ext cx="0" cy="685800"/>
           </a:xfrm>
           <a:prstGeom prst="line">
@@ -17594,13 +17508,13 @@
       </p:sp>
       <p:sp>
         <p:nvSpPr>
-          <p:cNvPr id="18" name="Shape 16"/>
+          <p:cNvPr id="26" name="Shape 24"/>
           <p:cNvSpPr/>
           <p:nvPr/>
         </p:nvSpPr>
         <p:spPr>
           <a:xfrm>
-            <a:off x="5202044" y="4078224"/>
+            <a:off x="1908785" y="4078224"/>
             <a:ext cx="164592" cy="164592"/>
           </a:xfrm>
           <a:prstGeom prst="ellipse">
@@ -17619,14 +17533,14 @@
       </p:sp>
       <p:sp>
         <p:nvSpPr>
-          <p:cNvPr id="19" name="Text 17"/>
-          <p:cNvSpPr txBox="1"/>
-          <p:nvPr/>
-        </p:nvSpPr>
-        <p:spPr>
-          <a:xfrm>
-            <a:off x="4369940" y="4937760"/>
-            <a:ext cx="1828800" cy="365760"/>
+          <p:cNvPr id="27" name="Text 25"/>
+          <p:cNvSpPr txBox="1"/>
+          <p:nvPr/>
+        </p:nvSpPr>
+        <p:spPr>
+          <a:xfrm>
+            <a:off x="985241" y="4937760"/>
+            <a:ext cx="2011680" cy="365760"/>
           </a:xfrm>
           <a:prstGeom prst="rect">
             <a:avLst/>
@@ -17647,7 +17561,7 @@
                   <a:schemeClr val="bg1"/>
                 </a:solidFill>
               </a:rPr>
-              <a:t>Dør til KR2</a:t>
+              <a:t>Kommafejl</a:t>
             </a:r>
             <a:endParaRPr lang="en-US" sz="1400" dirty="0"/>
           </a:p>
@@ -17655,13 +17569,13 @@
       </p:sp>
       <p:sp>
         <p:nvSpPr>
-          <p:cNvPr id="20" name="Shape 18"/>
+          <p:cNvPr id="28" name="Shape 26"/>
           <p:cNvSpPr/>
           <p:nvPr/>
         </p:nvSpPr>
         <p:spPr>
           <a:xfrm>
-            <a:off x="6727020" y="3474720"/>
+            <a:off x="2162829" y="3474720"/>
             <a:ext cx="0" cy="685800"/>
           </a:xfrm>
           <a:prstGeom prst="line">
@@ -17678,13 +17592,13 @@
       </p:sp>
       <p:sp>
         <p:nvSpPr>
-          <p:cNvPr id="21" name="Shape 19"/>
+          <p:cNvPr id="29" name="Shape 27"/>
           <p:cNvSpPr/>
           <p:nvPr/>
         </p:nvSpPr>
         <p:spPr>
           <a:xfrm>
-            <a:off x="6644724" y="4078224"/>
+            <a:off x="2080533" y="4078224"/>
             <a:ext cx="164592" cy="164592"/>
           </a:xfrm>
           <a:prstGeom prst="ellipse">
@@ -17703,14 +17617,14 @@
       </p:sp>
       <p:sp>
         <p:nvSpPr>
-          <p:cNvPr id="22" name="Text 20"/>
-          <p:cNvSpPr txBox="1"/>
-          <p:nvPr/>
-        </p:nvSpPr>
-        <p:spPr>
-          <a:xfrm>
-            <a:off x="5812620" y="3108960"/>
-            <a:ext cx="1828800" cy="365760"/>
+          <p:cNvPr id="30" name="Text 28"/>
+          <p:cNvSpPr txBox="1"/>
+          <p:nvPr/>
+        </p:nvSpPr>
+        <p:spPr>
+          <a:xfrm>
+            <a:off x="1156989" y="3108960"/>
+            <a:ext cx="2011680" cy="365760"/>
           </a:xfrm>
           <a:prstGeom prst="rect">
             <a:avLst/>
@@ -17731,7 +17645,7 @@
                   <a:schemeClr val="bg1"/>
                 </a:solidFill>
               </a:rPr>
-              <a:t>Dyse slidt</a:t>
+              <a:t>Prøve glemt</a:t>
             </a:r>
             <a:endParaRPr lang="en-US" sz="1400" dirty="0"/>
           </a:p>
@@ -17739,13 +17653,97 @@
       </p:sp>
       <p:sp>
         <p:nvSpPr>
-          <p:cNvPr id="23" name="Shape 21"/>
+          <p:cNvPr id="31" name="Shape 29"/>
           <p:cNvSpPr/>
           <p:nvPr/>
         </p:nvSpPr>
         <p:spPr>
           <a:xfrm>
-            <a:off x="8187733" y="4160520"/>
+            <a:off x="4326848" y="3017520"/>
+            <a:ext cx="0" cy="1143000"/>
+          </a:xfrm>
+          <a:prstGeom prst="line">
+            <a:avLst/>
+          </a:prstGeom>
+          <a:noFill/>
+          <a:ln w="19050">
+            <a:solidFill>
+              <a:srgbClr val="3D74FF"/>
+            </a:solidFill>
+            <a:prstDash val="solid"/>
+          </a:ln>
+        </p:spPr>
+      </p:sp>
+      <p:sp>
+        <p:nvSpPr>
+          <p:cNvPr id="32" name="Shape 30"/>
+          <p:cNvSpPr/>
+          <p:nvPr/>
+        </p:nvSpPr>
+        <p:spPr>
+          <a:xfrm>
+            <a:off x="4198832" y="4032504"/>
+            <a:ext cx="256032" cy="256032"/>
+          </a:xfrm>
+          <a:prstGeom prst="ellipse">
+            <a:avLst/>
+          </a:prstGeom>
+          <a:solidFill>
+            <a:srgbClr val="3D74FF"/>
+          </a:solidFill>
+          <a:ln w="12700">
+            <a:solidFill>
+              <a:srgbClr val="3D74FF"/>
+            </a:solidFill>
+            <a:prstDash val="solid"/>
+          </a:ln>
+        </p:spPr>
+      </p:sp>
+      <p:sp>
+        <p:nvSpPr>
+          <p:cNvPr id="33" name="Text 31"/>
+          <p:cNvSpPr txBox="1"/>
+          <p:nvPr/>
+        </p:nvSpPr>
+        <p:spPr>
+          <a:xfrm>
+            <a:off x="3321008" y="2560320"/>
+            <a:ext cx="2011680" cy="365760"/>
+          </a:xfrm>
+          <a:prstGeom prst="rect">
+            <a:avLst/>
+          </a:prstGeom>
+          <a:noFill/>
+          <a:ln/>
+        </p:spPr>
+        <p:txBody>
+          <a:bodyPr wrap="square" lIns="0" tIns="0" rIns="0" bIns="0" rtlCol="0" anchor="t"/>
+          <a:lstStyle/>
+          <a:p>
+            <a:pPr algn="ctr" indent="0" marL="0">
+              <a:buNone/>
+            </a:pPr>
+            <a:r>
+              <a:rPr lang="en-US" sz="1800" b="1" dirty="0">
+                <a:solidFill>
+                  <a:schemeClr val="accent1"/>
+                </a:solidFill>
+              </a:rPr>
+              <a:t>4.100 kg mangler</a:t>
+            </a:r>
+            <a:endParaRPr lang="en-US" sz="1800" dirty="0"/>
+          </a:p>
+        </p:txBody>
+      </p:sp>
+      <p:sp>
+        <p:nvSpPr>
+          <p:cNvPr id="34" name="Shape 32"/>
+          <p:cNvSpPr/>
+          <p:nvPr/>
+        </p:nvSpPr>
+        <p:spPr>
+          <a:xfrm>
+            <a:off x="5288634" y="4160520"/>
             <a:ext cx="0" cy="685800"/>
           </a:xfrm>
           <a:prstGeom prst="line">
@@ -17762,13 +17760,13 @@
       </p:sp>
       <p:sp>
         <p:nvSpPr>
-          <p:cNvPr id="24" name="Shape 22"/>
+          <p:cNvPr id="35" name="Shape 33"/>
           <p:cNvSpPr/>
           <p:nvPr/>
         </p:nvSpPr>
         <p:spPr>
           <a:xfrm>
-            <a:off x="8105437" y="4078224"/>
+            <a:off x="5206338" y="4078224"/>
             <a:ext cx="164592" cy="164592"/>
           </a:xfrm>
           <a:prstGeom prst="ellipse">
@@ -17787,14 +17785,14 @@
       </p:sp>
       <p:sp>
         <p:nvSpPr>
-          <p:cNvPr id="25" name="Text 23"/>
-          <p:cNvSpPr txBox="1"/>
-          <p:nvPr/>
-        </p:nvSpPr>
-        <p:spPr>
-          <a:xfrm>
-            <a:off x="7273333" y="4937760"/>
-            <a:ext cx="1828800" cy="365760"/>
+          <p:cNvPr id="36" name="Text 34"/>
+          <p:cNvSpPr txBox="1"/>
+          <p:nvPr/>
+        </p:nvSpPr>
+        <p:spPr>
+          <a:xfrm>
+            <a:off x="4282794" y="4937760"/>
+            <a:ext cx="2011680" cy="365760"/>
           </a:xfrm>
           <a:prstGeom prst="rect">
             <a:avLst/>
@@ -17815,7 +17813,7 @@
                   <a:schemeClr val="bg1"/>
                 </a:solidFill>
               </a:rPr>
-              <a:t>Kommafejl</a:t>
+              <a:t>Frasorteret</a:t>
             </a:r>
             <a:endParaRPr lang="en-US" sz="1400" dirty="0"/>
           </a:p>
@@ -17823,13 +17821,13 @@
       </p:sp>
       <p:sp>
         <p:nvSpPr>
-          <p:cNvPr id="26" name="Shape 24"/>
+          <p:cNvPr id="37" name="Shape 35"/>
           <p:cNvSpPr/>
           <p:nvPr/>
         </p:nvSpPr>
         <p:spPr>
           <a:xfrm>
-            <a:off x="8638570" y="3474720"/>
+            <a:off x="6387818" y="3474720"/>
             <a:ext cx="0" cy="685800"/>
           </a:xfrm>
           <a:prstGeom prst="line">
@@ -17846,13 +17844,13 @@
       </p:sp>
       <p:sp>
         <p:nvSpPr>
-          <p:cNvPr id="27" name="Shape 25"/>
+          <p:cNvPr id="38" name="Shape 36"/>
           <p:cNvSpPr/>
           <p:nvPr/>
         </p:nvSpPr>
         <p:spPr>
           <a:xfrm>
-            <a:off x="8556274" y="4078224"/>
+            <a:off x="6305522" y="4078224"/>
             <a:ext cx="164592" cy="164592"/>
           </a:xfrm>
           <a:prstGeom prst="ellipse">
@@ -17871,14 +17869,14 @@
       </p:sp>
       <p:sp>
         <p:nvSpPr>
-          <p:cNvPr id="28" name="Text 26"/>
-          <p:cNvSpPr txBox="1"/>
-          <p:nvPr/>
-        </p:nvSpPr>
-        <p:spPr>
-          <a:xfrm>
-            <a:off x="7724170" y="3108960"/>
-            <a:ext cx="1828800" cy="365760"/>
+          <p:cNvPr id="39" name="Text 37"/>
+          <p:cNvSpPr txBox="1"/>
+          <p:nvPr/>
+        </p:nvSpPr>
+        <p:spPr>
+          <a:xfrm>
+            <a:off x="5381978" y="3108960"/>
+            <a:ext cx="2011680" cy="365760"/>
           </a:xfrm>
           <a:prstGeom prst="rect">
             <a:avLst/>
@@ -17899,7 +17897,7 @@
                   <a:schemeClr val="bg1"/>
                 </a:solidFill>
               </a:rPr>
-              <a:t>Flow skruet op</a:t>
+              <a:t>Weekend</a:t>
             </a:r>
             <a:endParaRPr lang="en-US" sz="1400" dirty="0"/>
           </a:p>
@@ -17907,13 +17905,13 @@
       </p:sp>
       <p:sp>
         <p:nvSpPr>
-          <p:cNvPr id="29" name="Shape 27"/>
+          <p:cNvPr id="40" name="Shape 38"/>
           <p:cNvSpPr/>
           <p:nvPr/>
         </p:nvSpPr>
         <p:spPr>
           <a:xfrm>
-            <a:off x="9116458" y="4160520"/>
+            <a:off x="9891468" y="4160520"/>
             <a:ext cx="0" cy="685800"/>
           </a:xfrm>
           <a:prstGeom prst="line">
@@ -17930,13 +17928,13 @@
       </p:sp>
       <p:sp>
         <p:nvSpPr>
-          <p:cNvPr id="30" name="Shape 28"/>
+          <p:cNvPr id="41" name="Shape 39"/>
           <p:cNvSpPr/>
           <p:nvPr/>
         </p:nvSpPr>
         <p:spPr>
           <a:xfrm>
-            <a:off x="9034162" y="4078224"/>
+            <a:off x="9809172" y="4078224"/>
             <a:ext cx="164592" cy="164592"/>
           </a:xfrm>
           <a:prstGeom prst="ellipse">
@@ -17955,14 +17953,14 @@
       </p:sp>
       <p:sp>
         <p:nvSpPr>
-          <p:cNvPr id="31" name="Text 29"/>
-          <p:cNvSpPr txBox="1"/>
-          <p:nvPr/>
-        </p:nvSpPr>
-        <p:spPr>
-          <a:xfrm>
-            <a:off x="8202058" y="4937760"/>
-            <a:ext cx="1828800" cy="365760"/>
+          <p:cNvPr id="42" name="Text 40"/>
+          <p:cNvSpPr txBox="1"/>
+          <p:nvPr/>
+        </p:nvSpPr>
+        <p:spPr>
+          <a:xfrm>
+            <a:off x="8885628" y="4937760"/>
+            <a:ext cx="2011680" cy="365760"/>
           </a:xfrm>
           <a:prstGeom prst="rect">
             <a:avLst/>
@@ -17983,7 +17981,7 @@
                   <a:schemeClr val="bg1"/>
                 </a:solidFill>
               </a:rPr>
-              <a:t>CIP-tab</a:t>
+              <a:t>Tung luft</a:t>
             </a:r>
             <a:endParaRPr lang="en-US" sz="1400" dirty="0"/>
           </a:p>
@@ -17991,98 +17989,14 @@
       </p:sp>
       <p:sp>
         <p:nvSpPr>
-          <p:cNvPr id="32" name="Shape 30"/>
-          <p:cNvSpPr/>
-          <p:nvPr/>
-        </p:nvSpPr>
-        <p:spPr>
-          <a:xfrm>
-            <a:off x="10252568" y="3017520"/>
-            <a:ext cx="0" cy="1143000"/>
-          </a:xfrm>
-          <a:prstGeom prst="line">
-            <a:avLst/>
-          </a:prstGeom>
-          <a:noFill/>
-          <a:ln w="19050">
-            <a:solidFill>
-              <a:srgbClr val="3D74FF"/>
-            </a:solidFill>
-            <a:prstDash val="solid"/>
-          </a:ln>
-        </p:spPr>
-      </p:sp>
-      <p:sp>
-        <p:nvSpPr>
-          <p:cNvPr id="33" name="Shape 31"/>
-          <p:cNvSpPr/>
-          <p:nvPr/>
-        </p:nvSpPr>
-        <p:spPr>
-          <a:xfrm>
-            <a:off x="10124552" y="4032504"/>
-            <a:ext cx="256032" cy="256032"/>
-          </a:xfrm>
-          <a:prstGeom prst="ellipse">
-            <a:avLst/>
-          </a:prstGeom>
-          <a:solidFill>
-            <a:srgbClr val="3D74FF"/>
-          </a:solidFill>
-          <a:ln w="12700">
-            <a:solidFill>
-              <a:srgbClr val="3D74FF"/>
-            </a:solidFill>
-            <a:prstDash val="solid"/>
-          </a:ln>
-        </p:spPr>
-      </p:sp>
-      <p:sp>
-        <p:nvSpPr>
-          <p:cNvPr id="34" name="Text 32"/>
-          <p:cNvSpPr txBox="1"/>
-          <p:nvPr/>
-        </p:nvSpPr>
-        <p:spPr>
-          <a:xfrm>
-            <a:off x="9338168" y="2560320"/>
-            <a:ext cx="1828800" cy="365760"/>
-          </a:xfrm>
-          <a:prstGeom prst="rect">
-            <a:avLst/>
-          </a:prstGeom>
-          <a:noFill/>
-          <a:ln/>
-        </p:spPr>
-        <p:txBody>
-          <a:bodyPr wrap="square" lIns="0" tIns="0" rIns="0" bIns="0" rtlCol="0" anchor="t"/>
-          <a:lstStyle/>
-          <a:p>
-            <a:pPr algn="ctr" indent="0" marL="0">
-              <a:buNone/>
-            </a:pPr>
-            <a:r>
-              <a:rPr lang="en-US" sz="1800" b="1" dirty="0">
-                <a:solidFill>
-                  <a:schemeClr val="accent1"/>
-                </a:solidFill>
-              </a:rPr>
-              <a:t>Ingen forklaring</a:t>
-            </a:r>
-            <a:endParaRPr lang="en-US" sz="1800" dirty="0"/>
-          </a:p>
-        </p:txBody>
-      </p:sp>
-      <p:sp>
-        <p:nvSpPr>
-          <p:cNvPr id="35" name="Text 33"/>
+          <p:cNvPr id="43" name="Text 41"/>
           <p:cNvSpPr txBox="1"/>
           <p:nvPr/>
         </p:nvSpPr>
         <p:spPr>
           <a:xfrm>
             <a:off x="685800" y="5669280"/>
-            <a:ext cx="9144000" cy="365760"/>
+            <a:ext cx="10058400" cy="365760"/>
           </a:xfrm>
           <a:prstGeom prst="rect">
             <a:avLst/>
@@ -18103,7 +18017,7 @@
                   <a:schemeClr val="bg1"/>
                 </a:solidFill>
               </a:rPr>
-              <a:t>Fredag 10.05. Ingen omstilling og ingen forklaring. Den skal undersøges.</a:t>
+              <a:t>T-08 vårbyg. Brovægten mangler 4.100 kg, og ingen note forklarer det. Den skal undersøges.</a:t>
             </a:r>
             <a:endParaRPr lang="en-US" sz="1600" dirty="0"/>
           </a:p>
@@ -18316,7 +18230,7 @@
                   <a:schemeClr val="bg1"/>
                 </a:solidFill>
               </a:rPr>
-              <a:t>Hændelsen hentet fra pasteurloggen</a:t>
+              <a:t>Hændelsen hentet fra fugtloggen</a:t>
             </a:r>
             <a:endParaRPr lang="en-US" sz="1800" dirty="0"/>
           </a:p>
@@ -18413,7 +18327,7 @@
                   <a:schemeClr val="bg1"/>
                 </a:solidFill>
               </a:rPr>
-              <a:t>Operatørnoterne koblet på</a:t>
+              <a:t>Vejrdata og operatørnoter koblet på</a:t>
             </a:r>
             <a:endParaRPr lang="en-US" sz="1800" dirty="0"/>
           </a:p>
@@ -18609,7 +18523,7 @@
                   <a:schemeClr val="tx1"/>
                 </a:solidFill>
               </a:rPr>
-              <a:t>Pasteur P1  ·  fredag 9. oktober 10.05</a:t>
+              <a:t>Planlager 2  ·  batch T-14 havre  ·  9. oktober</a:t>
             </a:r>
             <a:endParaRPr lang="en-US" sz="1700" dirty="0"/>
           </a:p>
@@ -18645,7 +18559,7 @@
                   <a:schemeClr val="accent1"/>
                 </a:solidFill>
               </a:rPr>
-              <a:t>71,88 °C  ·  ingen flowomstilling</a:t>
+              <a:t>17,6 %  ·  29 °C i laget  ·  begyndende varmgang</a:t>
             </a:r>
             <a:endParaRPr lang="en-US" sz="1400" dirty="0"/>
           </a:p>
@@ -18721,7 +18635,7 @@
         <p:spPr>
           <a:xfrm>
             <a:off x="6172200" y="3703320"/>
-            <a:ext cx="1828800" cy="274320"/>
+            <a:ext cx="2286000" cy="274320"/>
           </a:xfrm>
           <a:prstGeom prst="rect">
             <a:avLst/>
@@ -18742,7 +18656,7 @@
                   <a:schemeClr val="tx1"/>
                 </a:solidFill>
               </a:rPr>
-              <a:t>Noter</a:t>
+              <a:t>Noter og vejr</a:t>
             </a:r>
             <a:endParaRPr lang="en-US" sz="1200" dirty="0"/>
           </a:p>
@@ -19400,7 +19314,7 @@
                   <a:schemeClr val="accent1"/>
                 </a:solidFill>
               </a:rPr>
-              <a:t>Procesteknolog_Fjordmejeriet_uge41.xlsx</a:t>
+              <a:t>Procesteknolog_Fjordtoerreriet_2026.xlsx</a:t>
             </a:r>
             <a:pPr indent="0" marL="0">
               <a:buNone/>
@@ -26050,7 +25964,7 @@
                   <a:schemeClr val="accent1"/>
                 </a:solidFill>
               </a:rPr>
-              <a:t>Temperaturloggen</a:t>
+              <a:t>Fugtloggen</a:t>
             </a:r>
             <a:endParaRPr lang="en-US" sz="3400" dirty="0"/>
           </a:p>
@@ -26122,7 +26036,7 @@
                   <a:schemeClr val="bg1"/>
                 </a:solidFill>
               </a:rPr>
-              <a:t>Målinger med målepunkt, temperatur og initialer</a:t>
+              <a:t>Målinger med planlager, vare, vandindhold og lagtemperatur</a:t>
             </a:r>
             <a:endParaRPr lang="en-US" sz="2200" dirty="0"/>
           </a:p>
@@ -26365,7 +26279,7 @@
                   <a:schemeClr val="bg1"/>
                 </a:solidFill>
               </a:rPr>
-              <a:t>6,1 °C i Kølerum 2 skal blive rød</a:t>
+              <a:t>Korn på 17,6 % i PL2 skal blive rød</a:t>
             </a:r>
             <a:endParaRPr lang="en-US" sz="2000" dirty="0"/>
           </a:p>

--- a/private/proces/praesentation.pptx
+++ b/private/proces/praesentation.pptx
@@ -160,7 +160,7 @@
   <p:extLst>
     <p:ext uri="{521415D9-36F7-43E2-AB2F-B90AF26B5E84}">
       <p14:sectionLst xmlns:p14="http://schemas.microsoft.com/office/powerpoint/2010/main">
-        <p14:section name="Åbning" id="{37a56dbc-08fb-18e0-62dd-144bb924d651}">
+        <p14:section name="Åbning" id="{017ba0d1-656e-1d29-a133-a7e0006808df}">
           <p14:sldIdLst>
             <p14:sldId id="256"/>
             <p14:sldId id="257"/>
@@ -170,7 +170,7 @@
             <p14:sldId id="261"/>
           </p14:sldIdLst>
         </p14:section>
-        <p14:section name="Som studerende" id="{2c047dd9-4845-8124-15a0-3af8ade347a9}">
+        <p14:section name="Som studerende" id="{2f6c7a6d-079d-ce48-9a6e-fd8f97de239c}">
           <p14:sldIdLst>
             <p14:sldId id="262"/>
             <p14:sldId id="263"/>
@@ -182,7 +182,7 @@
             <p14:sldId id="269"/>
           </p14:sldIdLst>
         </p14:section>
-        <p14:section name="Prompting" id="{1875b0d0-d77f-986d-e86e-85e0c1870720}">
+        <p14:section name="Prompting" id="{c11a35e7-89c4-f79b-9d54-e976c1224dcc}">
           <p14:sldIdLst>
             <p14:sldId id="270"/>
             <p14:sldId id="271"/>
@@ -193,7 +193,7 @@
             <p14:sldId id="276"/>
           </p14:sldIdLst>
         </p14:section>
-        <p14:section name="Excel og data" id="{596b254d-aa50-4bc3-08fd-37bff60be62f}">
+        <p14:section name="Excel og data" id="{cca4b236-cfc9-ca0d-8246-55f7013eca91}">
           <p14:sldIdLst>
             <p14:sldId id="277"/>
             <p14:sldId id="278"/>
@@ -212,7 +212,7 @@
             <p14:sldId id="291"/>
           </p14:sldIdLst>
         </p14:section>
-        <p14:section name="AI i jobbet" id="{25599eb2-7557-c594-add7-ddda8f6e1f0b}">
+        <p14:section name="AI i jobbet" id="{88d2119a-6e71-3299-3de4-d40275150d8b}">
           <p14:sldIdLst>
             <p14:sldId id="292"/>
             <p14:sldId id="293"/>
@@ -225,7 +225,7 @@
             <p14:sldId id="300"/>
           </p14:sldIdLst>
         </p14:section>
-        <p14:section name="Vibecoding" id="{98262210-9851-e288-3dad-e9a84d8b7d24}">
+        <p14:section name="Vibecoding" id="{6b4b8213-4b5f-e44d-9caf-40efe0ecd097}">
           <p14:sldIdLst>
             <p14:sldId id="301"/>
             <p14:sldId id="302"/>
@@ -235,7 +235,7 @@
             <p14:sldId id="306"/>
           </p14:sldIdLst>
         </p14:section>
-        <p14:section name="Afrunding" id="{702dc821-5827-4dd1-ed1c-e203df7be9e0}">
+        <p14:section name="Afrunding" id="{8cf99049-23d7-2a05-7672-c377dd7a9551}">
           <p14:sldIdLst>
             <p14:sldId id="307"/>
             <p14:sldId id="308"/>
@@ -4501,7 +4501,7 @@
           <a:p>
             <a:r>
               <a:rPr lang="en-US" dirty="0"/>
-              <a:t>Opgaven i Excel. Fanen Opgave har de 14 batches og tomme kolonner. De studerende skriver selv formlerne i række 2 og trækker dem ned. Trin 1 til 7 er det vigtigste og svarer til de tre spørgsmål i Opgave 13. Tjekket er, at T-07 giver 13.816 kg vand, 107,9 kg i timen og 85,5 procent tørstof med 1.500 kg mere fjernet. AI må forklare formlerne og finde fejl, men de skriver selv. Facit-arket med formlerne ligger i mappen.</a:t>
+              <a:t>Opgaven i Excel. Fanen Opgave har 13 batches og tre tomme kolonner, der svarer til de tre spørgsmål i Opgave 13. De studerende åbner ChatGPT i Excel fra sidepanelet, beder om formlen til række 2, sætter den ind og trækker den ned. Tjekket er, at T-07 giver 13.816 kg vand, 107,9 kg i timen og 85,5 procent tørstof med 1.500 kg mere fjernet. Det er de tal, de selv regnede i Opgave 13. Prompterne står på opgavearket.</a:t>
             </a:r>
             <a:endParaRPr lang="en-US" dirty="0"/>
           </a:p>
@@ -4589,7 +4589,7 @@
           <a:p>
             <a:r>
               <a:rPr lang="en-US" dirty="0"/>
-              <a:t>Hands-on. Parvis bygger de massebalancen i fanen Opgave. Gå rundt og hjælp. Typiske fejl er procent som tal, manglende dollartegn på inputcellen og T-14, der ikke er færdig. Bagefter viser et par sit ark på storskærmen og tallene for T-07. Når regnestykket står i deres eget ark, må de lade AI lave det hele, som i demoen. Så kan de se, om AI regner rigtigt.</a:t>
+              <a:t>Hands-on. Parvis åbner de fanen Opgave og ChatGPT i Excel. Gå rundt og hjælp. Typiske problemer er login i tilføjelsen og procenter, der står som tal. Bagefter viser et par sit ark på storskærmen, tallene for T-07, og hvordan de tjekkede ChatGPT. Fejler tilføjelsen, så kør samme prompts i ChatGPT i browseren med filen uploadet.</a:t>
             </a:r>
             <a:endParaRPr lang="en-US" dirty="0"/>
           </a:p>
@@ -4677,7 +4677,7 @@
           <a:p>
             <a:r>
               <a:rPr lang="en-US" dirty="0"/>
-              <a:t>Pointen for Excel-delen. Den, der har bygget regnestykket selv, kan stille AI den rigtige opgave og se, om svaret er rigtigt. I jobbet stiller I spørgsmålet, og AI laver regnearbejdet.</a:t>
+              <a:t>Pointen for Excel-delen. AI skriver formlen på sekunder. Den, der kender regnestykket, kan se, om tallet passer. I jobbet stiller I spørgsmålet, og AI laver regnearbejdet.</a:t>
             </a:r>
             <a:endParaRPr lang="en-US" dirty="0"/>
           </a:p>
@@ -19348,7 +19348,7 @@
                   <a:schemeClr val="bg1"/>
                 </a:solidFill>
               </a:rPr>
-              <a:t>Byg regnestykket én gang. </a:t>
+              <a:t>Tre spørgsmål. </a:t>
             </a:r>
             <a:pPr algn="l" indent="0" marL="0">
               <a:lnSpc>
@@ -19362,7 +19362,7 @@
                   <a:schemeClr val="accent1"/>
                 </a:solidFill>
               </a:rPr>
-              <a:t>Træk det ned.</a:t>
+              <a:t>ChatGPT skriver formlerne</a:t>
             </a:r>
             <a:endParaRPr lang="en-US" sz="3400" dirty="0"/>
           </a:p>
@@ -19393,12 +19393,156 @@
               <a:buNone/>
             </a:pPr>
             <a:r>
+              <a:rPr lang="en-US" sz="2800" b="1" dirty="0">
+                <a:solidFill>
+                  <a:schemeClr val="accent1"/>
+                </a:solidFill>
+              </a:rPr>
+              <a:t>1</a:t>
+            </a:r>
+            <a:endParaRPr lang="en-US" sz="2800" dirty="0"/>
+          </a:p>
+        </p:txBody>
+      </p:sp>
+      <p:sp>
+        <p:nvSpPr>
+          <p:cNvPr id="5" name="Text 3"/>
+          <p:cNvSpPr txBox="1"/>
+          <p:nvPr/>
+        </p:nvSpPr>
+        <p:spPr>
+          <a:xfrm>
+            <a:off x="1417320" y="2350008"/>
+            <a:ext cx="6583680" cy="457200"/>
+          </a:xfrm>
+          <a:prstGeom prst="rect">
+            <a:avLst/>
+          </a:prstGeom>
+          <a:noFill/>
+          <a:ln/>
+        </p:spPr>
+        <p:txBody>
+          <a:bodyPr wrap="square" lIns="0" tIns="0" rIns="0" bIns="0" rtlCol="0" anchor="t"/>
+          <a:lstStyle/>
+          <a:p>
+            <a:pPr indent="0" marL="0">
+              <a:buNone/>
+            </a:pPr>
+            <a:r>
               <a:rPr lang="en-US" sz="2600" b="1" dirty="0">
                 <a:solidFill>
+                  <a:schemeClr val="bg1"/>
+                </a:solidFill>
+              </a:rPr>
+              <a:t>Vand fjernet i kg</a:t>
+            </a:r>
+            <a:endParaRPr lang="en-US" sz="2600" dirty="0"/>
+          </a:p>
+        </p:txBody>
+      </p:sp>
+      <p:sp>
+        <p:nvSpPr>
+          <p:cNvPr id="6" name="Text 4"/>
+          <p:cNvSpPr txBox="1"/>
+          <p:nvPr/>
+        </p:nvSpPr>
+        <p:spPr>
+          <a:xfrm>
+            <a:off x="1417320" y="2807208"/>
+            <a:ext cx="6583680" cy="320040"/>
+          </a:xfrm>
+          <a:prstGeom prst="rect">
+            <a:avLst/>
+          </a:prstGeom>
+          <a:noFill/>
+          <a:ln/>
+        </p:spPr>
+        <p:txBody>
+          <a:bodyPr wrap="square" lIns="0" tIns="0" rIns="0" bIns="0" rtlCol="0" anchor="t"/>
+          <a:lstStyle/>
+          <a:p>
+            <a:pPr indent="0" marL="0">
+              <a:buNone/>
+            </a:pPr>
+            <a:r>
+              <a:rPr lang="en-US" sz="1500" dirty="0">
+                <a:solidFill>
+                  <a:schemeClr val="accent3"/>
+                </a:solidFill>
+              </a:rPr>
+              <a:t>T-07 giver 13.816 kg</a:t>
+            </a:r>
+            <a:endParaRPr lang="en-US" sz="1500" dirty="0"/>
+          </a:p>
+        </p:txBody>
+      </p:sp>
+      <p:sp>
+        <p:nvSpPr>
+          <p:cNvPr id="7" name="Text 5"/>
+          <p:cNvSpPr txBox="1"/>
+          <p:nvPr/>
+        </p:nvSpPr>
+        <p:spPr>
+          <a:xfrm>
+            <a:off x="685800" y="3337560"/>
+            <a:ext cx="548640" cy="457200"/>
+          </a:xfrm>
+          <a:prstGeom prst="rect">
+            <a:avLst/>
+          </a:prstGeom>
+          <a:noFill/>
+          <a:ln/>
+        </p:spPr>
+        <p:txBody>
+          <a:bodyPr wrap="square" lIns="0" tIns="0" rIns="0" bIns="0" rtlCol="0" anchor="t"/>
+          <a:lstStyle/>
+          <a:p>
+            <a:pPr indent="0" marL="0">
+              <a:buNone/>
+            </a:pPr>
+            <a:r>
+              <a:rPr lang="en-US" sz="2800" b="1" dirty="0">
+                <a:solidFill>
                   <a:schemeClr val="accent1"/>
                 </a:solidFill>
               </a:rPr>
-              <a:t>1</a:t>
+              <a:t>2</a:t>
+            </a:r>
+            <a:endParaRPr lang="en-US" sz="2800" dirty="0"/>
+          </a:p>
+        </p:txBody>
+      </p:sp>
+      <p:sp>
+        <p:nvSpPr>
+          <p:cNvPr id="8" name="Text 6"/>
+          <p:cNvSpPr txBox="1"/>
+          <p:nvPr/>
+        </p:nvSpPr>
+        <p:spPr>
+          <a:xfrm>
+            <a:off x="1417320" y="3355848"/>
+            <a:ext cx="6583680" cy="457200"/>
+          </a:xfrm>
+          <a:prstGeom prst="rect">
+            <a:avLst/>
+          </a:prstGeom>
+          <a:noFill/>
+          <a:ln/>
+        </p:spPr>
+        <p:txBody>
+          <a:bodyPr wrap="square" lIns="0" tIns="0" rIns="0" bIns="0" rtlCol="0" anchor="t"/>
+          <a:lstStyle/>
+          <a:p>
+            <a:pPr indent="0" marL="0">
+              <a:buNone/>
+            </a:pPr>
+            <a:r>
+              <a:rPr lang="en-US" sz="2600" b="1" dirty="0">
+                <a:solidFill>
+                  <a:schemeClr val="bg1"/>
+                </a:solidFill>
+              </a:rPr>
+              <a:t>Vand pr. time</a:t>
             </a:r>
             <a:endParaRPr lang="en-US" sz="2600" dirty="0"/>
           </a:p>
@@ -19406,50 +19550,257 @@
       </p:sp>
       <p:sp>
         <p:nvSpPr>
-          <p:cNvPr id="5" name="Text 3"/>
-          <p:cNvSpPr txBox="1"/>
-          <p:nvPr/>
-        </p:nvSpPr>
-        <p:spPr>
-          <a:xfrm>
-            <a:off x="1325880" y="2350008"/>
-            <a:ext cx="4663440" cy="411480"/>
-          </a:xfrm>
-          <a:prstGeom prst="rect">
-            <a:avLst/>
-          </a:prstGeom>
-          <a:noFill/>
-          <a:ln/>
-        </p:spPr>
-        <p:txBody>
-          <a:bodyPr wrap="square" lIns="0" tIns="0" rIns="0" bIns="0" rtlCol="0" anchor="t"/>
-          <a:lstStyle/>
-          <a:p>
-            <a:pPr indent="0" marL="0">
-              <a:buNone/>
-            </a:pPr>
-            <a:r>
-              <a:rPr lang="en-US" sz="2400" b="1" dirty="0">
+          <p:cNvPr id="9" name="Text 7"/>
+          <p:cNvSpPr txBox="1"/>
+          <p:nvPr/>
+        </p:nvSpPr>
+        <p:spPr>
+          <a:xfrm>
+            <a:off x="1417320" y="3813048"/>
+            <a:ext cx="6583680" cy="320040"/>
+          </a:xfrm>
+          <a:prstGeom prst="rect">
+            <a:avLst/>
+          </a:prstGeom>
+          <a:noFill/>
+          <a:ln/>
+        </p:spPr>
+        <p:txBody>
+          <a:bodyPr wrap="square" lIns="0" tIns="0" rIns="0" bIns="0" rtlCol="0" anchor="t"/>
+          <a:lstStyle/>
+          <a:p>
+            <a:pPr indent="0" marL="0">
+              <a:buNone/>
+            </a:pPr>
+            <a:r>
+              <a:rPr lang="en-US" sz="1500" dirty="0">
+                <a:solidFill>
+                  <a:schemeClr val="accent3"/>
+                </a:solidFill>
+              </a:rPr>
+              <a:t>T-07 giver 107,9 kg</a:t>
+            </a:r>
+            <a:endParaRPr lang="en-US" sz="1500" dirty="0"/>
+          </a:p>
+        </p:txBody>
+      </p:sp>
+      <p:sp>
+        <p:nvSpPr>
+          <p:cNvPr id="10" name="Text 8"/>
+          <p:cNvSpPr txBox="1"/>
+          <p:nvPr/>
+        </p:nvSpPr>
+        <p:spPr>
+          <a:xfrm>
+            <a:off x="685800" y="4343400"/>
+            <a:ext cx="548640" cy="457200"/>
+          </a:xfrm>
+          <a:prstGeom prst="rect">
+            <a:avLst/>
+          </a:prstGeom>
+          <a:noFill/>
+          <a:ln/>
+        </p:spPr>
+        <p:txBody>
+          <a:bodyPr wrap="square" lIns="0" tIns="0" rIns="0" bIns="0" rtlCol="0" anchor="t"/>
+          <a:lstStyle/>
+          <a:p>
+            <a:pPr indent="0" marL="0">
+              <a:buNone/>
+            </a:pPr>
+            <a:r>
+              <a:rPr lang="en-US" sz="2800" b="1" dirty="0">
+                <a:solidFill>
+                  <a:schemeClr val="accent1"/>
+                </a:solidFill>
+              </a:rPr>
+              <a:t>3</a:t>
+            </a:r>
+            <a:endParaRPr lang="en-US" sz="2800" dirty="0"/>
+          </a:p>
+        </p:txBody>
+      </p:sp>
+      <p:sp>
+        <p:nvSpPr>
+          <p:cNvPr id="11" name="Text 9"/>
+          <p:cNvSpPr txBox="1"/>
+          <p:nvPr/>
+        </p:nvSpPr>
+        <p:spPr>
+          <a:xfrm>
+            <a:off x="1417320" y="4361688"/>
+            <a:ext cx="6583680" cy="457200"/>
+          </a:xfrm>
+          <a:prstGeom prst="rect">
+            <a:avLst/>
+          </a:prstGeom>
+          <a:noFill/>
+          <a:ln/>
+        </p:spPr>
+        <p:txBody>
+          <a:bodyPr wrap="square" lIns="0" tIns="0" rIns="0" bIns="0" rtlCol="0" anchor="t"/>
+          <a:lstStyle/>
+          <a:p>
+            <a:pPr indent="0" marL="0">
+              <a:buNone/>
+            </a:pPr>
+            <a:r>
+              <a:rPr lang="en-US" sz="2600" b="1" dirty="0">
                 <a:solidFill>
                   <a:schemeClr val="bg1"/>
                 </a:solidFill>
               </a:rPr>
-              <a:t>Timer</a:t>
-            </a:r>
-            <a:endParaRPr lang="en-US" sz="2400" dirty="0"/>
-          </a:p>
-        </p:txBody>
-      </p:sp>
-      <p:sp>
-        <p:nvSpPr>
-          <p:cNvPr id="6" name="Text 4"/>
-          <p:cNvSpPr txBox="1"/>
-          <p:nvPr/>
-        </p:nvSpPr>
-        <p:spPr>
-          <a:xfrm>
-            <a:off x="1325880" y="2770632"/>
-            <a:ext cx="4663440" cy="320040"/>
+              <a:t>Tørstof med ekstra vand fjernet</a:t>
+            </a:r>
+            <a:endParaRPr lang="en-US" sz="2600" dirty="0"/>
+          </a:p>
+        </p:txBody>
+      </p:sp>
+      <p:sp>
+        <p:nvSpPr>
+          <p:cNvPr id="12" name="Text 10"/>
+          <p:cNvSpPr txBox="1"/>
+          <p:nvPr/>
+        </p:nvSpPr>
+        <p:spPr>
+          <a:xfrm>
+            <a:off x="1417320" y="4818888"/>
+            <a:ext cx="6583680" cy="320040"/>
+          </a:xfrm>
+          <a:prstGeom prst="rect">
+            <a:avLst/>
+          </a:prstGeom>
+          <a:noFill/>
+          <a:ln/>
+        </p:spPr>
+        <p:txBody>
+          <a:bodyPr wrap="square" lIns="0" tIns="0" rIns="0" bIns="0" rtlCol="0" anchor="t"/>
+          <a:lstStyle/>
+          <a:p>
+            <a:pPr indent="0" marL="0">
+              <a:buNone/>
+            </a:pPr>
+            <a:r>
+              <a:rPr lang="en-US" sz="1500" dirty="0">
+                <a:solidFill>
+                  <a:schemeClr val="accent3"/>
+                </a:solidFill>
+              </a:rPr>
+              <a:t>T-07 giver 85,5 %</a:t>
+            </a:r>
+            <a:endParaRPr lang="en-US" sz="1500" dirty="0"/>
+          </a:p>
+        </p:txBody>
+      </p:sp>
+      <p:sp>
+        <p:nvSpPr>
+          <p:cNvPr id="13" name="Shape 11"/>
+          <p:cNvSpPr/>
+          <p:nvPr/>
+        </p:nvSpPr>
+        <p:spPr>
+          <a:xfrm>
+            <a:off x="8229600" y="2286000"/>
+            <a:ext cx="3273552" cy="3017520"/>
+          </a:xfrm>
+          <a:prstGeom prst="roundRect">
+            <a:avLst>
+              <a:gd name="adj" fmla="val 3636"/>
+            </a:avLst>
+          </a:prstGeom>
+          <a:solidFill>
+            <a:schemeClr val="accent6"/>
+          </a:solidFill>
+          <a:ln w="12700">
+            <a:solidFill>
+              <a:schemeClr val="accent6"/>
+            </a:solidFill>
+            <a:prstDash val="solid"/>
+          </a:ln>
+        </p:spPr>
+      </p:sp>
+      <p:sp>
+        <p:nvSpPr>
+          <p:cNvPr id="14" name="Text 12"/>
+          <p:cNvSpPr txBox="1"/>
+          <p:nvPr/>
+        </p:nvSpPr>
+        <p:spPr>
+          <a:xfrm>
+            <a:off x="8503920" y="2560320"/>
+            <a:ext cx="2743200" cy="274320"/>
+          </a:xfrm>
+          <a:prstGeom prst="rect">
+            <a:avLst/>
+          </a:prstGeom>
+          <a:noFill/>
+          <a:ln/>
+        </p:spPr>
+        <p:txBody>
+          <a:bodyPr wrap="square" lIns="0" tIns="0" rIns="0" bIns="0" rtlCol="0" anchor="t"/>
+          <a:lstStyle/>
+          <a:p>
+            <a:pPr indent="0" marL="0">
+              <a:buNone/>
+            </a:pPr>
+            <a:r>
+              <a:rPr lang="en-US" sz="1100" b="1" spc="200" kern="0" dirty="0">
+                <a:solidFill>
+                  <a:schemeClr val="accent1"/>
+                </a:solidFill>
+              </a:rPr>
+              <a:t>SÅDAN</a:t>
+            </a:r>
+            <a:endParaRPr lang="en-US" sz="1100" dirty="0"/>
+          </a:p>
+        </p:txBody>
+      </p:sp>
+      <p:sp>
+        <p:nvSpPr>
+          <p:cNvPr id="15" name="Text 13"/>
+          <p:cNvSpPr txBox="1"/>
+          <p:nvPr/>
+        </p:nvSpPr>
+        <p:spPr>
+          <a:xfrm>
+            <a:off x="8503920" y="2926080"/>
+            <a:ext cx="2743200" cy="1463040"/>
+          </a:xfrm>
+          <a:prstGeom prst="rect">
+            <a:avLst/>
+          </a:prstGeom>
+          <a:noFill/>
+          <a:ln/>
+        </p:spPr>
+        <p:txBody>
+          <a:bodyPr wrap="square" lIns="0" tIns="0" rIns="0" bIns="0" rtlCol="0" anchor="t"/>
+          <a:lstStyle/>
+          <a:p>
+            <a:pPr indent="0" marL="0">
+              <a:buNone/>
+            </a:pPr>
+            <a:r>
+              <a:rPr lang="en-US" sz="1500" dirty="0">
+                <a:solidFill>
+                  <a:schemeClr val="bg1"/>
+                </a:solidFill>
+              </a:rPr>
+              <a:t>Åbn ChatGPT i Excel under Hjem og Tilføjelsesprogrammer. Bed om formlen til række 2, sæt den ind, og træk den ned.</a:t>
+            </a:r>
+            <a:endParaRPr lang="en-US" sz="1500" dirty="0"/>
+          </a:p>
+        </p:txBody>
+      </p:sp>
+      <p:sp>
+        <p:nvSpPr>
+          <p:cNvPr id="16" name="Text 14"/>
+          <p:cNvSpPr txBox="1"/>
+          <p:nvPr/>
+        </p:nvSpPr>
+        <p:spPr>
+          <a:xfrm>
+            <a:off x="8503920" y="4434840"/>
+            <a:ext cx="2743200" cy="640080"/>
           </a:xfrm>
           <a:prstGeom prst="rect">
             <a:avLst/>
@@ -19470,7 +19821,7 @@
                   <a:schemeClr val="accent3"/>
                 </a:solidFill>
               </a:rPr>
-              <a:t>Slut minus start, gange 24</a:t>
+              <a:t>Tjek T-07 mod jeres egen udregning.</a:t>
             </a:r>
             <a:endParaRPr lang="en-US" sz="1400" dirty="0"/>
           </a:p>
@@ -19478,763 +19829,7 @@
       </p:sp>
       <p:sp>
         <p:nvSpPr>
-          <p:cNvPr id="7" name="Text 5"/>
-          <p:cNvSpPr txBox="1"/>
-          <p:nvPr/>
-        </p:nvSpPr>
-        <p:spPr>
-          <a:xfrm>
-            <a:off x="685800" y="3227832"/>
-            <a:ext cx="548640" cy="457200"/>
-          </a:xfrm>
-          <a:prstGeom prst="rect">
-            <a:avLst/>
-          </a:prstGeom>
-          <a:noFill/>
-          <a:ln/>
-        </p:spPr>
-        <p:txBody>
-          <a:bodyPr wrap="square" lIns="0" tIns="0" rIns="0" bIns="0" rtlCol="0" anchor="t"/>
-          <a:lstStyle/>
-          <a:p>
-            <a:pPr indent="0" marL="0">
-              <a:buNone/>
-            </a:pPr>
-            <a:r>
-              <a:rPr lang="en-US" sz="2600" b="1" dirty="0">
-                <a:solidFill>
-                  <a:schemeClr val="accent1"/>
-                </a:solidFill>
-              </a:rPr>
-              <a:t>2</a:t>
-            </a:r>
-            <a:endParaRPr lang="en-US" sz="2600" dirty="0"/>
-          </a:p>
-        </p:txBody>
-      </p:sp>
-      <p:sp>
-        <p:nvSpPr>
-          <p:cNvPr id="8" name="Text 6"/>
-          <p:cNvSpPr txBox="1"/>
-          <p:nvPr/>
-        </p:nvSpPr>
-        <p:spPr>
-          <a:xfrm>
-            <a:off x="1325880" y="3246120"/>
-            <a:ext cx="4663440" cy="411480"/>
-          </a:xfrm>
-          <a:prstGeom prst="rect">
-            <a:avLst/>
-          </a:prstGeom>
-          <a:noFill/>
-          <a:ln/>
-        </p:spPr>
-        <p:txBody>
-          <a:bodyPr wrap="square" lIns="0" tIns="0" rIns="0" bIns="0" rtlCol="0" anchor="t"/>
-          <a:lstStyle/>
-          <a:p>
-            <a:pPr indent="0" marL="0">
-              <a:buNone/>
-            </a:pPr>
-            <a:r>
-              <a:rPr lang="en-US" sz="2400" b="1" dirty="0">
-                <a:solidFill>
-                  <a:schemeClr val="bg1"/>
-                </a:solidFill>
-              </a:rPr>
-              <a:t>Tørstof</a:t>
-            </a:r>
-            <a:endParaRPr lang="en-US" sz="2400" dirty="0"/>
-          </a:p>
-        </p:txBody>
-      </p:sp>
-      <p:sp>
-        <p:nvSpPr>
-          <p:cNvPr id="9" name="Text 7"/>
-          <p:cNvSpPr txBox="1"/>
-          <p:nvPr/>
-        </p:nvSpPr>
-        <p:spPr>
-          <a:xfrm>
-            <a:off x="1325880" y="3666744"/>
-            <a:ext cx="4663440" cy="320040"/>
-          </a:xfrm>
-          <a:prstGeom prst="rect">
-            <a:avLst/>
-          </a:prstGeom>
-          <a:noFill/>
-          <a:ln/>
-        </p:spPr>
-        <p:txBody>
-          <a:bodyPr wrap="square" lIns="0" tIns="0" rIns="0" bIns="0" rtlCol="0" anchor="t"/>
-          <a:lstStyle/>
-          <a:p>
-            <a:pPr indent="0" marL="0">
-              <a:buNone/>
-            </a:pPr>
-            <a:r>
-              <a:rPr lang="en-US" sz="1400" dirty="0">
-                <a:solidFill>
-                  <a:schemeClr val="accent3"/>
-                </a:solidFill>
-              </a:rPr>
-              <a:t>Ind gange (1 minus vand ind)</a:t>
-            </a:r>
-            <a:endParaRPr lang="en-US" sz="1400" dirty="0"/>
-          </a:p>
-        </p:txBody>
-      </p:sp>
-      <p:sp>
-        <p:nvSpPr>
-          <p:cNvPr id="10" name="Text 8"/>
-          <p:cNvSpPr txBox="1"/>
-          <p:nvPr/>
-        </p:nvSpPr>
-        <p:spPr>
-          <a:xfrm>
-            <a:off x="685800" y="4123944"/>
-            <a:ext cx="548640" cy="457200"/>
-          </a:xfrm>
-          <a:prstGeom prst="rect">
-            <a:avLst/>
-          </a:prstGeom>
-          <a:noFill/>
-          <a:ln/>
-        </p:spPr>
-        <p:txBody>
-          <a:bodyPr wrap="square" lIns="0" tIns="0" rIns="0" bIns="0" rtlCol="0" anchor="t"/>
-          <a:lstStyle/>
-          <a:p>
-            <a:pPr indent="0" marL="0">
-              <a:buNone/>
-            </a:pPr>
-            <a:r>
-              <a:rPr lang="en-US" sz="2600" b="1" dirty="0">
-                <a:solidFill>
-                  <a:schemeClr val="accent1"/>
-                </a:solidFill>
-              </a:rPr>
-              <a:t>3</a:t>
-            </a:r>
-            <a:endParaRPr lang="en-US" sz="2600" dirty="0"/>
-          </a:p>
-        </p:txBody>
-      </p:sp>
-      <p:sp>
-        <p:nvSpPr>
-          <p:cNvPr id="11" name="Text 9"/>
-          <p:cNvSpPr txBox="1"/>
-          <p:nvPr/>
-        </p:nvSpPr>
-        <p:spPr>
-          <a:xfrm>
-            <a:off x="1325880" y="4142232"/>
-            <a:ext cx="4663440" cy="411480"/>
-          </a:xfrm>
-          <a:prstGeom prst="rect">
-            <a:avLst/>
-          </a:prstGeom>
-          <a:noFill/>
-          <a:ln/>
-        </p:spPr>
-        <p:txBody>
-          <a:bodyPr wrap="square" lIns="0" tIns="0" rIns="0" bIns="0" rtlCol="0" anchor="t"/>
-          <a:lstStyle/>
-          <a:p>
-            <a:pPr indent="0" marL="0">
-              <a:buNone/>
-            </a:pPr>
-            <a:r>
-              <a:rPr lang="en-US" sz="2400" b="1" dirty="0">
-                <a:solidFill>
-                  <a:schemeClr val="bg1"/>
-                </a:solidFill>
-              </a:rPr>
-              <a:t>Masse ud</a:t>
-            </a:r>
-            <a:endParaRPr lang="en-US" sz="2400" dirty="0"/>
-          </a:p>
-        </p:txBody>
-      </p:sp>
-      <p:sp>
-        <p:nvSpPr>
-          <p:cNvPr id="12" name="Text 10"/>
-          <p:cNvSpPr txBox="1"/>
-          <p:nvPr/>
-        </p:nvSpPr>
-        <p:spPr>
-          <a:xfrm>
-            <a:off x="1325880" y="4562856"/>
-            <a:ext cx="4663440" cy="320040"/>
-          </a:xfrm>
-          <a:prstGeom prst="rect">
-            <a:avLst/>
-          </a:prstGeom>
-          <a:noFill/>
-          <a:ln/>
-        </p:spPr>
-        <p:txBody>
-          <a:bodyPr wrap="square" lIns="0" tIns="0" rIns="0" bIns="0" rtlCol="0" anchor="t"/>
-          <a:lstStyle/>
-          <a:p>
-            <a:pPr indent="0" marL="0">
-              <a:buNone/>
-            </a:pPr>
-            <a:r>
-              <a:rPr lang="en-US" sz="1400" dirty="0">
-                <a:solidFill>
-                  <a:schemeClr val="accent3"/>
-                </a:solidFill>
-              </a:rPr>
-              <a:t>Tørstof delt med (1 minus vand ud)</a:t>
-            </a:r>
-            <a:endParaRPr lang="en-US" sz="1400" dirty="0"/>
-          </a:p>
-        </p:txBody>
-      </p:sp>
-      <p:sp>
-        <p:nvSpPr>
-          <p:cNvPr id="13" name="Text 11"/>
-          <p:cNvSpPr txBox="1"/>
-          <p:nvPr/>
-        </p:nvSpPr>
-        <p:spPr>
-          <a:xfrm>
-            <a:off x="685800" y="5020056"/>
-            <a:ext cx="548640" cy="457200"/>
-          </a:xfrm>
-          <a:prstGeom prst="rect">
-            <a:avLst/>
-          </a:prstGeom>
-          <a:noFill/>
-          <a:ln/>
-        </p:spPr>
-        <p:txBody>
-          <a:bodyPr wrap="square" lIns="0" tIns="0" rIns="0" bIns="0" rtlCol="0" anchor="t"/>
-          <a:lstStyle/>
-          <a:p>
-            <a:pPr indent="0" marL="0">
-              <a:buNone/>
-            </a:pPr>
-            <a:r>
-              <a:rPr lang="en-US" sz="2600" b="1" dirty="0">
-                <a:solidFill>
-                  <a:schemeClr val="accent1"/>
-                </a:solidFill>
-              </a:rPr>
-              <a:t>4</a:t>
-            </a:r>
-            <a:endParaRPr lang="en-US" sz="2600" dirty="0"/>
-          </a:p>
-        </p:txBody>
-      </p:sp>
-      <p:sp>
-        <p:nvSpPr>
-          <p:cNvPr id="14" name="Text 12"/>
-          <p:cNvSpPr txBox="1"/>
-          <p:nvPr/>
-        </p:nvSpPr>
-        <p:spPr>
-          <a:xfrm>
-            <a:off x="1325880" y="5038344"/>
-            <a:ext cx="4663440" cy="411480"/>
-          </a:xfrm>
-          <a:prstGeom prst="rect">
-            <a:avLst/>
-          </a:prstGeom>
-          <a:noFill/>
-          <a:ln/>
-        </p:spPr>
-        <p:txBody>
-          <a:bodyPr wrap="square" lIns="0" tIns="0" rIns="0" bIns="0" rtlCol="0" anchor="t"/>
-          <a:lstStyle/>
-          <a:p>
-            <a:pPr indent="0" marL="0">
-              <a:buNone/>
-            </a:pPr>
-            <a:r>
-              <a:rPr lang="en-US" sz="2400" b="1" dirty="0">
-                <a:solidFill>
-                  <a:schemeClr val="bg1"/>
-                </a:solidFill>
-              </a:rPr>
-              <a:t>Vand fjernet</a:t>
-            </a:r>
-            <a:endParaRPr lang="en-US" sz="2400" dirty="0"/>
-          </a:p>
-        </p:txBody>
-      </p:sp>
-      <p:sp>
-        <p:nvSpPr>
-          <p:cNvPr id="15" name="Text 13"/>
-          <p:cNvSpPr txBox="1"/>
-          <p:nvPr/>
-        </p:nvSpPr>
-        <p:spPr>
-          <a:xfrm>
-            <a:off x="1325880" y="5458968"/>
-            <a:ext cx="4663440" cy="320040"/>
-          </a:xfrm>
-          <a:prstGeom prst="rect">
-            <a:avLst/>
-          </a:prstGeom>
-          <a:noFill/>
-          <a:ln/>
-        </p:spPr>
-        <p:txBody>
-          <a:bodyPr wrap="square" lIns="0" tIns="0" rIns="0" bIns="0" rtlCol="0" anchor="t"/>
-          <a:lstStyle/>
-          <a:p>
-            <a:pPr indent="0" marL="0">
-              <a:buNone/>
-            </a:pPr>
-            <a:r>
-              <a:rPr lang="en-US" sz="1400" dirty="0">
-                <a:solidFill>
-                  <a:schemeClr val="accent3"/>
-                </a:solidFill>
-              </a:rPr>
-              <a:t>Ind minus masse ud</a:t>
-            </a:r>
-            <a:endParaRPr lang="en-US" sz="1400" dirty="0"/>
-          </a:p>
-        </p:txBody>
-      </p:sp>
-      <p:sp>
-        <p:nvSpPr>
-          <p:cNvPr id="16" name="Text 14"/>
-          <p:cNvSpPr txBox="1"/>
-          <p:nvPr/>
-        </p:nvSpPr>
-        <p:spPr>
-          <a:xfrm>
-            <a:off x="6172200" y="2331720"/>
-            <a:ext cx="548640" cy="457200"/>
-          </a:xfrm>
-          <a:prstGeom prst="rect">
-            <a:avLst/>
-          </a:prstGeom>
-          <a:noFill/>
-          <a:ln/>
-        </p:spPr>
-        <p:txBody>
-          <a:bodyPr wrap="square" lIns="0" tIns="0" rIns="0" bIns="0" rtlCol="0" anchor="t"/>
-          <a:lstStyle/>
-          <a:p>
-            <a:pPr indent="0" marL="0">
-              <a:buNone/>
-            </a:pPr>
-            <a:r>
-              <a:rPr lang="en-US" sz="2600" b="1" dirty="0">
-                <a:solidFill>
-                  <a:schemeClr val="accent1"/>
-                </a:solidFill>
-              </a:rPr>
-              <a:t>5</a:t>
-            </a:r>
-            <a:endParaRPr lang="en-US" sz="2600" dirty="0"/>
-          </a:p>
-        </p:txBody>
-      </p:sp>
-      <p:sp>
-        <p:nvSpPr>
           <p:cNvPr id="17" name="Text 15"/>
-          <p:cNvSpPr txBox="1"/>
-          <p:nvPr/>
-        </p:nvSpPr>
-        <p:spPr>
-          <a:xfrm>
-            <a:off x="6812280" y="2350008"/>
-            <a:ext cx="4663440" cy="411480"/>
-          </a:xfrm>
-          <a:prstGeom prst="rect">
-            <a:avLst/>
-          </a:prstGeom>
-          <a:noFill/>
-          <a:ln/>
-        </p:spPr>
-        <p:txBody>
-          <a:bodyPr wrap="square" lIns="0" tIns="0" rIns="0" bIns="0" rtlCol="0" anchor="t"/>
-          <a:lstStyle/>
-          <a:p>
-            <a:pPr indent="0" marL="0">
-              <a:buNone/>
-            </a:pPr>
-            <a:r>
-              <a:rPr lang="en-US" sz="2400" b="1" dirty="0">
-                <a:solidFill>
-                  <a:schemeClr val="bg1"/>
-                </a:solidFill>
-              </a:rPr>
-              <a:t>Pr. time</a:t>
-            </a:r>
-            <a:endParaRPr lang="en-US" sz="2400" dirty="0"/>
-          </a:p>
-        </p:txBody>
-      </p:sp>
-      <p:sp>
-        <p:nvSpPr>
-          <p:cNvPr id="18" name="Text 16"/>
-          <p:cNvSpPr txBox="1"/>
-          <p:nvPr/>
-        </p:nvSpPr>
-        <p:spPr>
-          <a:xfrm>
-            <a:off x="6812280" y="2770632"/>
-            <a:ext cx="4663440" cy="320040"/>
-          </a:xfrm>
-          <a:prstGeom prst="rect">
-            <a:avLst/>
-          </a:prstGeom>
-          <a:noFill/>
-          <a:ln/>
-        </p:spPr>
-        <p:txBody>
-          <a:bodyPr wrap="square" lIns="0" tIns="0" rIns="0" bIns="0" rtlCol="0" anchor="t"/>
-          <a:lstStyle/>
-          <a:p>
-            <a:pPr indent="0" marL="0">
-              <a:buNone/>
-            </a:pPr>
-            <a:r>
-              <a:rPr lang="en-US" sz="1400" dirty="0">
-                <a:solidFill>
-                  <a:schemeClr val="accent3"/>
-                </a:solidFill>
-              </a:rPr>
-              <a:t>Vand delt med timer</a:t>
-            </a:r>
-            <a:endParaRPr lang="en-US" sz="1400" dirty="0"/>
-          </a:p>
-        </p:txBody>
-      </p:sp>
-      <p:sp>
-        <p:nvSpPr>
-          <p:cNvPr id="19" name="Text 17"/>
-          <p:cNvSpPr txBox="1"/>
-          <p:nvPr/>
-        </p:nvSpPr>
-        <p:spPr>
-          <a:xfrm>
-            <a:off x="6172200" y="3227832"/>
-            <a:ext cx="548640" cy="457200"/>
-          </a:xfrm>
-          <a:prstGeom prst="rect">
-            <a:avLst/>
-          </a:prstGeom>
-          <a:noFill/>
-          <a:ln/>
-        </p:spPr>
-        <p:txBody>
-          <a:bodyPr wrap="square" lIns="0" tIns="0" rIns="0" bIns="0" rtlCol="0" anchor="t"/>
-          <a:lstStyle/>
-          <a:p>
-            <a:pPr indent="0" marL="0">
-              <a:buNone/>
-            </a:pPr>
-            <a:r>
-              <a:rPr lang="en-US" sz="2600" b="1" dirty="0">
-                <a:solidFill>
-                  <a:schemeClr val="accent1"/>
-                </a:solidFill>
-              </a:rPr>
-              <a:t>6</a:t>
-            </a:r>
-            <a:endParaRPr lang="en-US" sz="2600" dirty="0"/>
-          </a:p>
-        </p:txBody>
-      </p:sp>
-      <p:sp>
-        <p:nvSpPr>
-          <p:cNvPr id="20" name="Text 18"/>
-          <p:cNvSpPr txBox="1"/>
-          <p:nvPr/>
-        </p:nvSpPr>
-        <p:spPr>
-          <a:xfrm>
-            <a:off x="6812280" y="3246120"/>
-            <a:ext cx="4663440" cy="411480"/>
-          </a:xfrm>
-          <a:prstGeom prst="rect">
-            <a:avLst/>
-          </a:prstGeom>
-          <a:noFill/>
-          <a:ln/>
-        </p:spPr>
-        <p:txBody>
-          <a:bodyPr wrap="square" lIns="0" tIns="0" rIns="0" bIns="0" rtlCol="0" anchor="t"/>
-          <a:lstStyle/>
-          <a:p>
-            <a:pPr indent="0" marL="0">
-              <a:buNone/>
-            </a:pPr>
-            <a:r>
-              <a:rPr lang="en-US" sz="2400" b="1" dirty="0">
-                <a:solidFill>
-                  <a:schemeClr val="bg1"/>
-                </a:solidFill>
-              </a:rPr>
-              <a:t>Tørstof ved slut</a:t>
-            </a:r>
-            <a:endParaRPr lang="en-US" sz="2400" dirty="0"/>
-          </a:p>
-        </p:txBody>
-      </p:sp>
-      <p:sp>
-        <p:nvSpPr>
-          <p:cNvPr id="21" name="Text 19"/>
-          <p:cNvSpPr txBox="1"/>
-          <p:nvPr/>
-        </p:nvSpPr>
-        <p:spPr>
-          <a:xfrm>
-            <a:off x="6812280" y="3666744"/>
-            <a:ext cx="4663440" cy="320040"/>
-          </a:xfrm>
-          <a:prstGeom prst="rect">
-            <a:avLst/>
-          </a:prstGeom>
-          <a:noFill/>
-          <a:ln/>
-        </p:spPr>
-        <p:txBody>
-          <a:bodyPr wrap="square" lIns="0" tIns="0" rIns="0" bIns="0" rtlCol="0" anchor="t"/>
-          <a:lstStyle/>
-          <a:p>
-            <a:pPr indent="0" marL="0">
-              <a:buNone/>
-            </a:pPr>
-            <a:r>
-              <a:rPr lang="en-US" sz="1400" dirty="0">
-                <a:solidFill>
-                  <a:schemeClr val="accent3"/>
-                </a:solidFill>
-              </a:rPr>
-              <a:t>Tørstof delt med masse ud</a:t>
-            </a:r>
-            <a:endParaRPr lang="en-US" sz="1400" dirty="0"/>
-          </a:p>
-        </p:txBody>
-      </p:sp>
-      <p:sp>
-        <p:nvSpPr>
-          <p:cNvPr id="22" name="Text 20"/>
-          <p:cNvSpPr txBox="1"/>
-          <p:nvPr/>
-        </p:nvSpPr>
-        <p:spPr>
-          <a:xfrm>
-            <a:off x="6172200" y="4123944"/>
-            <a:ext cx="548640" cy="457200"/>
-          </a:xfrm>
-          <a:prstGeom prst="rect">
-            <a:avLst/>
-          </a:prstGeom>
-          <a:noFill/>
-          <a:ln/>
-        </p:spPr>
-        <p:txBody>
-          <a:bodyPr wrap="square" lIns="0" tIns="0" rIns="0" bIns="0" rtlCol="0" anchor="t"/>
-          <a:lstStyle/>
-          <a:p>
-            <a:pPr indent="0" marL="0">
-              <a:buNone/>
-            </a:pPr>
-            <a:r>
-              <a:rPr lang="en-US" sz="2600" b="1" dirty="0">
-                <a:solidFill>
-                  <a:schemeClr val="accent1"/>
-                </a:solidFill>
-              </a:rPr>
-              <a:t>7</a:t>
-            </a:r>
-            <a:endParaRPr lang="en-US" sz="2600" dirty="0"/>
-          </a:p>
-        </p:txBody>
-      </p:sp>
-      <p:sp>
-        <p:nvSpPr>
-          <p:cNvPr id="23" name="Text 21"/>
-          <p:cNvSpPr txBox="1"/>
-          <p:nvPr/>
-        </p:nvSpPr>
-        <p:spPr>
-          <a:xfrm>
-            <a:off x="6812280" y="4142232"/>
-            <a:ext cx="4663440" cy="411480"/>
-          </a:xfrm>
-          <a:prstGeom prst="rect">
-            <a:avLst/>
-          </a:prstGeom>
-          <a:noFill/>
-          <a:ln/>
-        </p:spPr>
-        <p:txBody>
-          <a:bodyPr wrap="square" lIns="0" tIns="0" rIns="0" bIns="0" rtlCol="0" anchor="t"/>
-          <a:lstStyle/>
-          <a:p>
-            <a:pPr indent="0" marL="0">
-              <a:buNone/>
-            </a:pPr>
-            <a:r>
-              <a:rPr lang="en-US" sz="2400" b="1" dirty="0">
-                <a:solidFill>
-                  <a:schemeClr val="bg1"/>
-                </a:solidFill>
-              </a:rPr>
-              <a:t>1.500 kg mere</a:t>
-            </a:r>
-            <a:endParaRPr lang="en-US" sz="2400" dirty="0"/>
-          </a:p>
-        </p:txBody>
-      </p:sp>
-      <p:sp>
-        <p:nvSpPr>
-          <p:cNvPr id="24" name="Text 22"/>
-          <p:cNvSpPr txBox="1"/>
-          <p:nvPr/>
-        </p:nvSpPr>
-        <p:spPr>
-          <a:xfrm>
-            <a:off x="6812280" y="4562856"/>
-            <a:ext cx="4663440" cy="320040"/>
-          </a:xfrm>
-          <a:prstGeom prst="rect">
-            <a:avLst/>
-          </a:prstGeom>
-          <a:noFill/>
-          <a:ln/>
-        </p:spPr>
-        <p:txBody>
-          <a:bodyPr wrap="square" lIns="0" tIns="0" rIns="0" bIns="0" rtlCol="0" anchor="t"/>
-          <a:lstStyle/>
-          <a:p>
-            <a:pPr indent="0" marL="0">
-              <a:buNone/>
-            </a:pPr>
-            <a:r>
-              <a:rPr lang="en-US" sz="1400" dirty="0">
-                <a:solidFill>
-                  <a:schemeClr val="accent3"/>
-                </a:solidFill>
-              </a:rPr>
-              <a:t>Lås inputcellen med dollartegn</a:t>
-            </a:r>
-            <a:endParaRPr lang="en-US" sz="1400" dirty="0"/>
-          </a:p>
-        </p:txBody>
-      </p:sp>
-      <p:sp>
-        <p:nvSpPr>
-          <p:cNvPr id="25" name="Text 23"/>
-          <p:cNvSpPr txBox="1"/>
-          <p:nvPr/>
-        </p:nvSpPr>
-        <p:spPr>
-          <a:xfrm>
-            <a:off x="6172200" y="5020056"/>
-            <a:ext cx="548640" cy="457200"/>
-          </a:xfrm>
-          <a:prstGeom prst="rect">
-            <a:avLst/>
-          </a:prstGeom>
-          <a:noFill/>
-          <a:ln/>
-        </p:spPr>
-        <p:txBody>
-          <a:bodyPr wrap="square" lIns="0" tIns="0" rIns="0" bIns="0" rtlCol="0" anchor="t"/>
-          <a:lstStyle/>
-          <a:p>
-            <a:pPr indent="0" marL="0">
-              <a:buNone/>
-            </a:pPr>
-            <a:r>
-              <a:rPr lang="en-US" sz="2600" b="1" dirty="0">
-                <a:solidFill>
-                  <a:schemeClr val="accent1"/>
-                </a:solidFill>
-              </a:rPr>
-              <a:t>8</a:t>
-            </a:r>
-            <a:endParaRPr lang="en-US" sz="2600" dirty="0"/>
-          </a:p>
-        </p:txBody>
-      </p:sp>
-      <p:sp>
-        <p:nvSpPr>
-          <p:cNvPr id="26" name="Text 24"/>
-          <p:cNvSpPr txBox="1"/>
-          <p:nvPr/>
-        </p:nvSpPr>
-        <p:spPr>
-          <a:xfrm>
-            <a:off x="6812280" y="5038344"/>
-            <a:ext cx="4663440" cy="411480"/>
-          </a:xfrm>
-          <a:prstGeom prst="rect">
-            <a:avLst/>
-          </a:prstGeom>
-          <a:noFill/>
-          <a:ln/>
-        </p:spPr>
-        <p:txBody>
-          <a:bodyPr wrap="square" lIns="0" tIns="0" rIns="0" bIns="0" rtlCol="0" anchor="t"/>
-          <a:lstStyle/>
-          <a:p>
-            <a:pPr indent="0" marL="0">
-              <a:buNone/>
-            </a:pPr>
-            <a:r>
-              <a:rPr lang="en-US" sz="2400" b="1" dirty="0">
-                <a:solidFill>
-                  <a:schemeClr val="bg1"/>
-                </a:solidFill>
-              </a:rPr>
-              <a:t>Brovægt</a:t>
-            </a:r>
-            <a:endParaRPr lang="en-US" sz="2400" dirty="0"/>
-          </a:p>
-        </p:txBody>
-      </p:sp>
-      <p:sp>
-        <p:nvSpPr>
-          <p:cNvPr id="27" name="Text 25"/>
-          <p:cNvSpPr txBox="1"/>
-          <p:nvPr/>
-        </p:nvSpPr>
-        <p:spPr>
-          <a:xfrm>
-            <a:off x="6812280" y="5458968"/>
-            <a:ext cx="4663440" cy="320040"/>
-          </a:xfrm>
-          <a:prstGeom prst="rect">
-            <a:avLst/>
-          </a:prstGeom>
-          <a:noFill/>
-          <a:ln/>
-        </p:spPr>
-        <p:txBody>
-          <a:bodyPr wrap="square" lIns="0" tIns="0" rIns="0" bIns="0" rtlCol="0" anchor="t"/>
-          <a:lstStyle/>
-          <a:p>
-            <a:pPr indent="0" marL="0">
-              <a:buNone/>
-            </a:pPr>
-            <a:r>
-              <a:rPr lang="en-US" sz="1400" dirty="0">
-                <a:solidFill>
-                  <a:schemeClr val="accent3"/>
-                </a:solidFill>
-              </a:rPr>
-              <a:t>Går balancen op? HVIS og ABS</a:t>
-            </a:r>
-            <a:endParaRPr lang="en-US" sz="1400" dirty="0"/>
-          </a:p>
-        </p:txBody>
-      </p:sp>
-      <p:sp>
-        <p:nvSpPr>
-          <p:cNvPr id="28" name="Text 26"/>
           <p:cNvSpPr txBox="1"/>
           <p:nvPr/>
         </p:nvSpPr>
@@ -20262,7 +19857,7 @@
                   <a:schemeClr val="accent3"/>
                 </a:solidFill>
               </a:rPr>
-              <a:t>Fanen Opgave i datasættet. Formlerne står på opgavearket. T-07 er tallene fra Opgave 13, så I har facit.</a:t>
+              <a:t>De tre spørgsmål fra Opgave 13 i fanen Opgave. Prompterne står på opgavearket.</a:t>
             </a:r>
             <a:endParaRPr lang="en-US" sz="1200" dirty="0"/>
           </a:p>
@@ -20431,7 +20026,7 @@
                   <a:schemeClr val="bg1"/>
                 </a:solidFill>
               </a:rPr>
-              <a:t>. Byg massebalancen som formler for alle 14 batches, og tjek T-07 mod jeres udregning fra Opgave 13.</a:t>
+              <a:t>, og lad ChatGPT i Excel skrive de tre formler. Tjek T-07 mod jeres udregning fra Opgave 13.</a:t>
             </a:r>
             <a:endParaRPr lang="en-US" sz="2600" dirty="0"/>
           </a:p>
@@ -20467,7 +20062,7 @@
                   <a:schemeClr val="accent3"/>
                 </a:solidFill>
               </a:rPr>
-              <a:t>AI må forklare og rette. I skriver selv formlerne ind.</a:t>
+              <a:t>Tjek tallet, før I tror på det.</a:t>
             </a:r>
             <a:endParaRPr lang="en-US" sz="2000" dirty="0"/>
           </a:p>
@@ -20562,12 +20157,12 @@
               <a:buNone/>
             </a:pPr>
             <a:r>
-              <a:rPr lang="en-US" sz="6000" b="1" dirty="0">
+              <a:rPr lang="en-US" sz="6600" b="1" dirty="0">
                 <a:solidFill>
                   <a:schemeClr val="bg1"/>
                 </a:solidFill>
               </a:rPr>
-              <a:t>Byg det selv én gang. </a:t>
+              <a:t>Lad AI skrive formlen. </a:t>
             </a:r>
             <a:pPr indent="0" marL="0">
               <a:lnSpc>
@@ -20576,14 +20171,14 @@
               <a:buNone/>
             </a:pPr>
             <a:r>
-              <a:rPr lang="en-US" sz="6000" b="1" dirty="0">
+              <a:rPr lang="en-US" sz="6600" b="1" dirty="0">
                 <a:solidFill>
                   <a:schemeClr val="accent1"/>
                 </a:solidFill>
               </a:rPr>
-              <a:t>Så ved du, hvad AI skal lave.</a:t>
-            </a:r>
-            <a:endParaRPr lang="en-US" sz="6000" dirty="0"/>
+              <a:t>Tjek tallet selv.</a:t>
+            </a:r>
+            <a:endParaRPr lang="en-US" sz="6600" dirty="0"/>
           </a:p>
         </p:txBody>
       </p:sp>

--- a/private/proces/praesentation.pptx
+++ b/private/proces/praesentation.pptx
@@ -160,7 +160,7 @@
   <p:extLst>
     <p:ext uri="{521415D9-36F7-43E2-AB2F-B90AF26B5E84}">
       <p14:sectionLst xmlns:p14="http://schemas.microsoft.com/office/powerpoint/2010/main">
-        <p14:section name="Åbning" id="{017ba0d1-656e-1d29-a133-a7e0006808df}">
+        <p14:section name="Åbning" id="{b24dd4a3-db13-4744-17c7-346a7239e6ea}">
           <p14:sldIdLst>
             <p14:sldId id="256"/>
             <p14:sldId id="257"/>
@@ -170,7 +170,7 @@
             <p14:sldId id="261"/>
           </p14:sldIdLst>
         </p14:section>
-        <p14:section name="Som studerende" id="{2f6c7a6d-079d-ce48-9a6e-fd8f97de239c}">
+        <p14:section name="Som studerende" id="{c66dd1a5-150d-d569-94d8-3ba9972f999b}">
           <p14:sldIdLst>
             <p14:sldId id="262"/>
             <p14:sldId id="263"/>
@@ -182,7 +182,7 @@
             <p14:sldId id="269"/>
           </p14:sldIdLst>
         </p14:section>
-        <p14:section name="Prompting" id="{c11a35e7-89c4-f79b-9d54-e976c1224dcc}">
+        <p14:section name="Prompting" id="{76e96fcd-3f3c-100f-1e0d-121a0e4586c3}">
           <p14:sldIdLst>
             <p14:sldId id="270"/>
             <p14:sldId id="271"/>
@@ -193,7 +193,7 @@
             <p14:sldId id="276"/>
           </p14:sldIdLst>
         </p14:section>
-        <p14:section name="Excel og data" id="{cca4b236-cfc9-ca0d-8246-55f7013eca91}">
+        <p14:section name="Excel og data" id="{f193a653-7796-0466-fd8d-c53383dc3563}">
           <p14:sldIdLst>
             <p14:sldId id="277"/>
             <p14:sldId id="278"/>
@@ -212,7 +212,7 @@
             <p14:sldId id="291"/>
           </p14:sldIdLst>
         </p14:section>
-        <p14:section name="AI i jobbet" id="{88d2119a-6e71-3299-3de4-d40275150d8b}">
+        <p14:section name="AI i jobbet" id="{0ac7621c-61df-d9af-cad7-739cabe9ba42}">
           <p14:sldIdLst>
             <p14:sldId id="292"/>
             <p14:sldId id="293"/>
@@ -225,7 +225,7 @@
             <p14:sldId id="300"/>
           </p14:sldIdLst>
         </p14:section>
-        <p14:section name="Vibecoding" id="{6b4b8213-4b5f-e44d-9caf-40efe0ecd097}">
+        <p14:section name="Vibecoding" id="{c9c06156-bac6-ef08-b2cf-ba2799f73371}">
           <p14:sldIdLst>
             <p14:sldId id="301"/>
             <p14:sldId id="302"/>
@@ -235,7 +235,7 @@
             <p14:sldId id="306"/>
           </p14:sldIdLst>
         </p14:section>
-        <p14:section name="Afrunding" id="{8cf99049-23d7-2a05-7672-c377dd7a9551}">
+        <p14:section name="Afrunding" id="{c9889f06-b0d1-c598-7488-430654a485dc}">
           <p14:sldIdLst>
             <p14:sldId id="307"/>
             <p14:sldId id="308"/>
@@ -3621,7 +3621,7 @@
           <a:p>
             <a:r>
               <a:rPr lang="en-US" dirty="0"/>
-              <a:t>Prompterne står fuldt ud på promptkortet i Bilag C. Kør dem i rækkefølge. Hver prompt bygger videre på den forrige.</a:t>
+              <a:t>Prompterne står fuldt ud i undervisningsplanen under live demo. Kør dem i rækkefølge. Hver prompt bygger videre på den forrige. De studerende får et andet ark med tre overbliksprompts og tre opgaver.</a:t>
             </a:r>
             <a:endParaRPr lang="en-US" dirty="0"/>
           </a:p>
@@ -4501,7 +4501,7 @@
           <a:p>
             <a:r>
               <a:rPr lang="en-US" dirty="0"/>
-              <a:t>Opgaven i Excel. Fanen Opgave har 13 batches og tre tomme kolonner, der svarer til de tre spørgsmål i Opgave 13. De studerende åbner ChatGPT i Excel fra sidepanelet, beder om formlen til række 2, sætter den ind og trækker den ned. Tjekket er, at T-07 giver 13.816 kg vand, 107,9 kg i timen og 85,5 procent tørstof med 1.500 kg mere fjernet. Det er de tal, de selv regnede i Opgave 13. Prompterne står på opgavearket.</a:t>
+              <a:t>Sådan arbejder de i hands-on. Først tilføjer de ChatGPT til Excel under Hjem og Tilføjelsesprogrammer og logger ind. Så sætter de tre prompts ind, der giver overblik over filen. Det er jobreglen, de tager svarene. Derefter sætter de sparringsprompten ind, som forbyder ChatGPT at give formler og facit, og løser tre opgaver. Det er studiereglen. Opgave 1 er de tre spørgsmål fra Opgave 13 for T-07, opgave 2 er batch T-14, der ikke bliver færdig, og opgave 3 er brovægten. Facit står i Bilag D.</a:t>
             </a:r>
             <a:endParaRPr lang="en-US" dirty="0"/>
           </a:p>
@@ -4589,7 +4589,7 @@
           <a:p>
             <a:r>
               <a:rPr lang="en-US" dirty="0"/>
-              <a:t>Hands-on. Parvis åbner de fanen Opgave og ChatGPT i Excel. Gå rundt og hjælp. Typiske problemer er login i tilføjelsen og procenter, der står som tal. Bagefter viser et par sit ark på storskærmen, tallene for T-07, og hvordan de tjekkede ChatGPT. Fejler tilføjelsen, så kør samme prompts i ChatGPT i browseren med filen uploadet.</a:t>
+              <a:t>Hands-on. Parvis. Gå rundt og hjælp. Typiske problemer er login i tilføjelsen, og at ChatGPT alligevel giver formlen. Så beder de den om at holde sig til sparringsprompten. Bagefter viser et par sit ark og tallene for T-07, og hvad ChatGPT spurgte dem om. Fejler tilføjelsen, så kør samme prompts i ChatGPT i browseren med filen uploadet.</a:t>
             </a:r>
             <a:endParaRPr lang="en-US" dirty="0"/>
           </a:p>
@@ -4677,7 +4677,7 @@
           <a:p>
             <a:r>
               <a:rPr lang="en-US" dirty="0"/>
-              <a:t>Pointen for Excel-delen. AI skriver formlen på sekunder. Den, der kender regnestykket, kan se, om tallet passer. I jobbet stiller I spørgsmålet, og AI laver regnearbejdet.</a:t>
+              <a:t>Pointen for Excel-delen. Med sparringsprompten bliver ChatGPT en underviser, der spørger, til I selv kan regne og forklare. I jobbet vender I den om og lader AI regne.</a:t>
             </a:r>
             <a:endParaRPr lang="en-US" dirty="0"/>
           </a:p>
@@ -19307,7 +19307,7 @@
                   <a:schemeClr val="accent3"/>
                 </a:solidFill>
               </a:rPr>
-              <a:t>HANDS-ON  ·  OPGAVEN I EXCEL</a:t>
+              <a:t>HANDS-ON  ·  CHATGPT I EXCEL</a:t>
             </a:r>
             <a:endParaRPr lang="en-US" sz="1200" dirty="0"/>
           </a:p>
@@ -19348,7 +19348,7 @@
                   <a:schemeClr val="bg1"/>
                 </a:solidFill>
               </a:rPr>
-              <a:t>Tre spørgsmål. </a:t>
+              <a:t>Åbn Excel. </a:t>
             </a:r>
             <a:pPr algn="l" indent="0" marL="0">
               <a:lnSpc>
@@ -19362,7 +19362,7 @@
                   <a:schemeClr val="accent1"/>
                 </a:solidFill>
               </a:rPr>
-              <a:t>ChatGPT skriver formlerne</a:t>
+              <a:t>Tilføj ChatGPT.</a:t>
             </a:r>
             <a:endParaRPr lang="en-US" sz="3400" dirty="0"/>
           </a:p>
@@ -19376,31 +19376,31 @@
         </p:nvSpPr>
         <p:spPr>
           <a:xfrm>
-            <a:off x="685800" y="2331720"/>
-            <a:ext cx="548640" cy="457200"/>
-          </a:xfrm>
-          <a:prstGeom prst="rect">
-            <a:avLst/>
-          </a:prstGeom>
-          <a:noFill/>
-          <a:ln/>
-        </p:spPr>
-        <p:txBody>
-          <a:bodyPr wrap="square" lIns="0" tIns="0" rIns="0" bIns="0" rtlCol="0" anchor="t"/>
-          <a:lstStyle/>
-          <a:p>
-            <a:pPr indent="0" marL="0">
-              <a:buNone/>
-            </a:pPr>
-            <a:r>
-              <a:rPr lang="en-US" sz="2800" b="1" dirty="0">
+            <a:off x="685800" y="2468880"/>
+            <a:ext cx="914400" cy="365760"/>
+          </a:xfrm>
+          <a:prstGeom prst="rect">
+            <a:avLst/>
+          </a:prstGeom>
+          <a:noFill/>
+          <a:ln/>
+        </p:spPr>
+        <p:txBody>
+          <a:bodyPr wrap="square" lIns="0" tIns="0" rIns="0" bIns="0" rtlCol="0" anchor="t"/>
+          <a:lstStyle/>
+          <a:p>
+            <a:pPr indent="0" marL="0">
+              <a:buNone/>
+            </a:pPr>
+            <a:r>
+              <a:rPr lang="en-US" sz="1600" b="1" dirty="0">
                 <a:solidFill>
                   <a:schemeClr val="accent1"/>
                 </a:solidFill>
               </a:rPr>
-              <a:t>1</a:t>
-            </a:r>
-            <a:endParaRPr lang="en-US" sz="2800" dirty="0"/>
+              <a:t>01</a:t>
+            </a:r>
+            <a:endParaRPr lang="en-US" sz="1600" dirty="0"/>
           </a:p>
         </p:txBody>
       </p:sp>
@@ -19412,31 +19412,31 @@
         </p:nvSpPr>
         <p:spPr>
           <a:xfrm>
-            <a:off x="1417320" y="2350008"/>
-            <a:ext cx="6583680" cy="457200"/>
-          </a:xfrm>
-          <a:prstGeom prst="rect">
-            <a:avLst/>
-          </a:prstGeom>
-          <a:noFill/>
-          <a:ln/>
-        </p:spPr>
-        <p:txBody>
-          <a:bodyPr wrap="square" lIns="0" tIns="0" rIns="0" bIns="0" rtlCol="0" anchor="t"/>
-          <a:lstStyle/>
-          <a:p>
-            <a:pPr indent="0" marL="0">
-              <a:buNone/>
-            </a:pPr>
-            <a:r>
-              <a:rPr lang="en-US" sz="2600" b="1" dirty="0">
+            <a:off x="685800" y="2880360"/>
+            <a:ext cx="3240938" cy="731520"/>
+          </a:xfrm>
+          <a:prstGeom prst="rect">
+            <a:avLst/>
+          </a:prstGeom>
+          <a:noFill/>
+          <a:ln/>
+        </p:spPr>
+        <p:txBody>
+          <a:bodyPr wrap="square" lIns="0" tIns="0" rIns="0" bIns="0" rtlCol="0" anchor="t"/>
+          <a:lstStyle/>
+          <a:p>
+            <a:pPr indent="0" marL="0">
+              <a:buNone/>
+            </a:pPr>
+            <a:r>
+              <a:rPr lang="en-US" sz="3400" b="1" dirty="0">
                 <a:solidFill>
                   <a:schemeClr val="bg1"/>
                 </a:solidFill>
               </a:rPr>
-              <a:t>Vand fjernet i kg</a:t>
-            </a:r>
-            <a:endParaRPr lang="en-US" sz="2600" dirty="0"/>
+              <a:t>Kom i gang</a:t>
+            </a:r>
+            <a:endParaRPr lang="en-US" sz="3400" dirty="0"/>
           </a:p>
         </p:txBody>
       </p:sp>
@@ -19448,31 +19448,31 @@
         </p:nvSpPr>
         <p:spPr>
           <a:xfrm>
-            <a:off x="1417320" y="2807208"/>
-            <a:ext cx="6583680" cy="320040"/>
-          </a:xfrm>
-          <a:prstGeom prst="rect">
-            <a:avLst/>
-          </a:prstGeom>
-          <a:noFill/>
-          <a:ln/>
-        </p:spPr>
-        <p:txBody>
-          <a:bodyPr wrap="square" lIns="0" tIns="0" rIns="0" bIns="0" rtlCol="0" anchor="t"/>
-          <a:lstStyle/>
-          <a:p>
-            <a:pPr indent="0" marL="0">
-              <a:buNone/>
-            </a:pPr>
-            <a:r>
-              <a:rPr lang="en-US" sz="1500" dirty="0">
+            <a:off x="685800" y="3749040"/>
+            <a:ext cx="3149498" cy="1463040"/>
+          </a:xfrm>
+          <a:prstGeom prst="rect">
+            <a:avLst/>
+          </a:prstGeom>
+          <a:noFill/>
+          <a:ln/>
+        </p:spPr>
+        <p:txBody>
+          <a:bodyPr wrap="square" lIns="0" tIns="0" rIns="0" bIns="0" rtlCol="0" anchor="t"/>
+          <a:lstStyle/>
+          <a:p>
+            <a:pPr indent="0" marL="0">
+              <a:buNone/>
+            </a:pPr>
+            <a:r>
+              <a:rPr lang="en-US" sz="1700" dirty="0">
                 <a:solidFill>
                   <a:schemeClr val="accent3"/>
                 </a:solidFill>
               </a:rPr>
-              <a:t>T-07 giver 13.816 kg</a:t>
-            </a:r>
-            <a:endParaRPr lang="en-US" sz="1500" dirty="0"/>
+              <a:t>Hjem, Tilføjelsesprogrammer, ChatGPT. Log ind, og ChatGPT læser hele filen i sidepanelet.</a:t>
+            </a:r>
+            <a:endParaRPr lang="en-US" sz="1700" dirty="0"/>
           </a:p>
         </p:txBody>
       </p:sp>
@@ -19484,31 +19484,31 @@
         </p:nvSpPr>
         <p:spPr>
           <a:xfrm>
-            <a:off x="685800" y="3337560"/>
-            <a:ext cx="548640" cy="457200"/>
-          </a:xfrm>
-          <a:prstGeom prst="rect">
-            <a:avLst/>
-          </a:prstGeom>
-          <a:noFill/>
-          <a:ln/>
-        </p:spPr>
-        <p:txBody>
-          <a:bodyPr wrap="square" lIns="0" tIns="0" rIns="0" bIns="0" rtlCol="0" anchor="t"/>
-          <a:lstStyle/>
-          <a:p>
-            <a:pPr indent="0" marL="0">
-              <a:buNone/>
-            </a:pPr>
-            <a:r>
-              <a:rPr lang="en-US" sz="2800" b="1" dirty="0">
+            <a:off x="4292498" y="2468880"/>
+            <a:ext cx="914400" cy="365760"/>
+          </a:xfrm>
+          <a:prstGeom prst="rect">
+            <a:avLst/>
+          </a:prstGeom>
+          <a:noFill/>
+          <a:ln/>
+        </p:spPr>
+        <p:txBody>
+          <a:bodyPr wrap="square" lIns="0" tIns="0" rIns="0" bIns="0" rtlCol="0" anchor="t"/>
+          <a:lstStyle/>
+          <a:p>
+            <a:pPr indent="0" marL="0">
+              <a:buNone/>
+            </a:pPr>
+            <a:r>
+              <a:rPr lang="en-US" sz="1600" b="1" dirty="0">
                 <a:solidFill>
                   <a:schemeClr val="accent1"/>
                 </a:solidFill>
               </a:rPr>
-              <a:t>2</a:t>
-            </a:r>
-            <a:endParaRPr lang="en-US" sz="2800" dirty="0"/>
+              <a:t>02</a:t>
+            </a:r>
+            <a:endParaRPr lang="en-US" sz="1600" dirty="0"/>
           </a:p>
         </p:txBody>
       </p:sp>
@@ -19520,31 +19520,31 @@
         </p:nvSpPr>
         <p:spPr>
           <a:xfrm>
-            <a:off x="1417320" y="3355848"/>
-            <a:ext cx="6583680" cy="457200"/>
-          </a:xfrm>
-          <a:prstGeom prst="rect">
-            <a:avLst/>
-          </a:prstGeom>
-          <a:noFill/>
-          <a:ln/>
-        </p:spPr>
-        <p:txBody>
-          <a:bodyPr wrap="square" lIns="0" tIns="0" rIns="0" bIns="0" rtlCol="0" anchor="t"/>
-          <a:lstStyle/>
-          <a:p>
-            <a:pPr indent="0" marL="0">
-              <a:buNone/>
-            </a:pPr>
-            <a:r>
-              <a:rPr lang="en-US" sz="2600" b="1" dirty="0">
+            <a:off x="4292498" y="2880360"/>
+            <a:ext cx="3240938" cy="731520"/>
+          </a:xfrm>
+          <a:prstGeom prst="rect">
+            <a:avLst/>
+          </a:prstGeom>
+          <a:noFill/>
+          <a:ln/>
+        </p:spPr>
+        <p:txBody>
+          <a:bodyPr wrap="square" lIns="0" tIns="0" rIns="0" bIns="0" rtlCol="0" anchor="t"/>
+          <a:lstStyle/>
+          <a:p>
+            <a:pPr indent="0" marL="0">
+              <a:buNone/>
+            </a:pPr>
+            <a:r>
+              <a:rPr lang="en-US" sz="3400" b="1" dirty="0">
                 <a:solidFill>
                   <a:schemeClr val="bg1"/>
                 </a:solidFill>
               </a:rPr>
-              <a:t>Vand pr. time</a:t>
-            </a:r>
-            <a:endParaRPr lang="en-US" sz="2600" dirty="0"/>
+              <a:t>Få overblik</a:t>
+            </a:r>
+            <a:endParaRPr lang="en-US" sz="3400" dirty="0"/>
           </a:p>
         </p:txBody>
       </p:sp>
@@ -19556,31 +19556,31 @@
         </p:nvSpPr>
         <p:spPr>
           <a:xfrm>
-            <a:off x="1417320" y="3813048"/>
-            <a:ext cx="6583680" cy="320040"/>
-          </a:xfrm>
-          <a:prstGeom prst="rect">
-            <a:avLst/>
-          </a:prstGeom>
-          <a:noFill/>
-          <a:ln/>
-        </p:spPr>
-        <p:txBody>
-          <a:bodyPr wrap="square" lIns="0" tIns="0" rIns="0" bIns="0" rtlCol="0" anchor="t"/>
-          <a:lstStyle/>
-          <a:p>
-            <a:pPr indent="0" marL="0">
-              <a:buNone/>
-            </a:pPr>
-            <a:r>
-              <a:rPr lang="en-US" sz="1500" dirty="0">
+            <a:off x="4292498" y="3749040"/>
+            <a:ext cx="3149498" cy="1463040"/>
+          </a:xfrm>
+          <a:prstGeom prst="rect">
+            <a:avLst/>
+          </a:prstGeom>
+          <a:noFill/>
+          <a:ln/>
+        </p:spPr>
+        <p:txBody>
+          <a:bodyPr wrap="square" lIns="0" tIns="0" rIns="0" bIns="0" rtlCol="0" anchor="t"/>
+          <a:lstStyle/>
+          <a:p>
+            <a:pPr indent="0" marL="0">
+              <a:buNone/>
+            </a:pPr>
+            <a:r>
+              <a:rPr lang="en-US" sz="1700" dirty="0">
                 <a:solidFill>
                   <a:schemeClr val="accent3"/>
                 </a:solidFill>
               </a:rPr>
-              <a:t>T-07 giver 107,9 kg</a:t>
-            </a:r>
-            <a:endParaRPr lang="en-US" sz="1500" dirty="0"/>
+              <a:t>Tre prompts, som I sætter ind, som de står. Her gælder jobreglen. Tag svarene.</a:t>
+            </a:r>
+            <a:endParaRPr lang="en-US" sz="1700" dirty="0"/>
           </a:p>
         </p:txBody>
       </p:sp>
@@ -19592,31 +19592,31 @@
         </p:nvSpPr>
         <p:spPr>
           <a:xfrm>
-            <a:off x="685800" y="4343400"/>
-            <a:ext cx="548640" cy="457200"/>
-          </a:xfrm>
-          <a:prstGeom prst="rect">
-            <a:avLst/>
-          </a:prstGeom>
-          <a:noFill/>
-          <a:ln/>
-        </p:spPr>
-        <p:txBody>
-          <a:bodyPr wrap="square" lIns="0" tIns="0" rIns="0" bIns="0" rtlCol="0" anchor="t"/>
-          <a:lstStyle/>
-          <a:p>
-            <a:pPr indent="0" marL="0">
-              <a:buNone/>
-            </a:pPr>
-            <a:r>
-              <a:rPr lang="en-US" sz="2800" b="1" dirty="0">
+            <a:off x="7899197" y="2468880"/>
+            <a:ext cx="914400" cy="365760"/>
+          </a:xfrm>
+          <a:prstGeom prst="rect">
+            <a:avLst/>
+          </a:prstGeom>
+          <a:noFill/>
+          <a:ln/>
+        </p:spPr>
+        <p:txBody>
+          <a:bodyPr wrap="square" lIns="0" tIns="0" rIns="0" bIns="0" rtlCol="0" anchor="t"/>
+          <a:lstStyle/>
+          <a:p>
+            <a:pPr indent="0" marL="0">
+              <a:buNone/>
+            </a:pPr>
+            <a:r>
+              <a:rPr lang="en-US" sz="1600" b="1" dirty="0">
                 <a:solidFill>
                   <a:schemeClr val="accent1"/>
                 </a:solidFill>
               </a:rPr>
-              <a:t>3</a:t>
-            </a:r>
-            <a:endParaRPr lang="en-US" sz="2800" dirty="0"/>
+              <a:t>03</a:t>
+            </a:r>
+            <a:endParaRPr lang="en-US" sz="1600" dirty="0"/>
           </a:p>
         </p:txBody>
       </p:sp>
@@ -19628,31 +19628,31 @@
         </p:nvSpPr>
         <p:spPr>
           <a:xfrm>
-            <a:off x="1417320" y="4361688"/>
-            <a:ext cx="6583680" cy="457200"/>
-          </a:xfrm>
-          <a:prstGeom prst="rect">
-            <a:avLst/>
-          </a:prstGeom>
-          <a:noFill/>
-          <a:ln/>
-        </p:spPr>
-        <p:txBody>
-          <a:bodyPr wrap="square" lIns="0" tIns="0" rIns="0" bIns="0" rtlCol="0" anchor="t"/>
-          <a:lstStyle/>
-          <a:p>
-            <a:pPr indent="0" marL="0">
-              <a:buNone/>
-            </a:pPr>
-            <a:r>
-              <a:rPr lang="en-US" sz="2600" b="1" dirty="0">
+            <a:off x="7899197" y="2880360"/>
+            <a:ext cx="3240938" cy="731520"/>
+          </a:xfrm>
+          <a:prstGeom prst="rect">
+            <a:avLst/>
+          </a:prstGeom>
+          <a:noFill/>
+          <a:ln/>
+        </p:spPr>
+        <p:txBody>
+          <a:bodyPr wrap="square" lIns="0" tIns="0" rIns="0" bIns="0" rtlCol="0" anchor="t"/>
+          <a:lstStyle/>
+          <a:p>
+            <a:pPr indent="0" marL="0">
+              <a:buNone/>
+            </a:pPr>
+            <a:r>
+              <a:rPr lang="en-US" sz="3400" b="1" dirty="0">
                 <a:solidFill>
                   <a:schemeClr val="bg1"/>
                 </a:solidFill>
               </a:rPr>
-              <a:t>Tørstof med ekstra vand fjernet</a:t>
-            </a:r>
-            <a:endParaRPr lang="en-US" sz="2600" dirty="0"/>
+              <a:t>Løs opgaverne</a:t>
+            </a:r>
+            <a:endParaRPr lang="en-US" sz="3400" dirty="0"/>
           </a:p>
         </p:txBody>
       </p:sp>
@@ -19664,172 +19664,37 @@
         </p:nvSpPr>
         <p:spPr>
           <a:xfrm>
-            <a:off x="1417320" y="4818888"/>
-            <a:ext cx="6583680" cy="320040"/>
-          </a:xfrm>
-          <a:prstGeom prst="rect">
-            <a:avLst/>
-          </a:prstGeom>
-          <a:noFill/>
-          <a:ln/>
-        </p:spPr>
-        <p:txBody>
-          <a:bodyPr wrap="square" lIns="0" tIns="0" rIns="0" bIns="0" rtlCol="0" anchor="t"/>
-          <a:lstStyle/>
-          <a:p>
-            <a:pPr indent="0" marL="0">
-              <a:buNone/>
-            </a:pPr>
-            <a:r>
-              <a:rPr lang="en-US" sz="1500" dirty="0">
+            <a:off x="7899197" y="3749040"/>
+            <a:ext cx="3149498" cy="1463040"/>
+          </a:xfrm>
+          <a:prstGeom prst="rect">
+            <a:avLst/>
+          </a:prstGeom>
+          <a:noFill/>
+          <a:ln/>
+        </p:spPr>
+        <p:txBody>
+          <a:bodyPr wrap="square" lIns="0" tIns="0" rIns="0" bIns="0" rtlCol="0" anchor="t"/>
+          <a:lstStyle/>
+          <a:p>
+            <a:pPr indent="0" marL="0">
+              <a:buNone/>
+            </a:pPr>
+            <a:r>
+              <a:rPr lang="en-US" sz="1700" dirty="0">
                 <a:solidFill>
                   <a:schemeClr val="accent3"/>
                 </a:solidFill>
               </a:rPr>
-              <a:t>T-07 giver 85,5 %</a:t>
-            </a:r>
-            <a:endParaRPr lang="en-US" sz="1500" dirty="0"/>
-          </a:p>
-        </p:txBody>
-      </p:sp>
-      <p:sp>
-        <p:nvSpPr>
-          <p:cNvPr id="13" name="Shape 11"/>
-          <p:cNvSpPr/>
-          <p:nvPr/>
-        </p:nvSpPr>
-        <p:spPr>
-          <a:xfrm>
-            <a:off x="8229600" y="2286000"/>
-            <a:ext cx="3273552" cy="3017520"/>
-          </a:xfrm>
-          <a:prstGeom prst="roundRect">
-            <a:avLst>
-              <a:gd name="adj" fmla="val 3636"/>
-            </a:avLst>
-          </a:prstGeom>
-          <a:solidFill>
-            <a:schemeClr val="accent6"/>
-          </a:solidFill>
-          <a:ln w="12700">
-            <a:solidFill>
-              <a:schemeClr val="accent6"/>
-            </a:solidFill>
-            <a:prstDash val="solid"/>
-          </a:ln>
-        </p:spPr>
-      </p:sp>
-      <p:sp>
-        <p:nvSpPr>
-          <p:cNvPr id="14" name="Text 12"/>
-          <p:cNvSpPr txBox="1"/>
-          <p:nvPr/>
-        </p:nvSpPr>
-        <p:spPr>
-          <a:xfrm>
-            <a:off x="8503920" y="2560320"/>
-            <a:ext cx="2743200" cy="274320"/>
-          </a:xfrm>
-          <a:prstGeom prst="rect">
-            <a:avLst/>
-          </a:prstGeom>
-          <a:noFill/>
-          <a:ln/>
-        </p:spPr>
-        <p:txBody>
-          <a:bodyPr wrap="square" lIns="0" tIns="0" rIns="0" bIns="0" rtlCol="0" anchor="t"/>
-          <a:lstStyle/>
-          <a:p>
-            <a:pPr indent="0" marL="0">
-              <a:buNone/>
-            </a:pPr>
-            <a:r>
-              <a:rPr lang="en-US" sz="1100" b="1" spc="200" kern="0" dirty="0">
-                <a:solidFill>
-                  <a:schemeClr val="accent1"/>
-                </a:solidFill>
-              </a:rPr>
-              <a:t>SÅDAN</a:t>
-            </a:r>
-            <a:endParaRPr lang="en-US" sz="1100" dirty="0"/>
-          </a:p>
-        </p:txBody>
-      </p:sp>
-      <p:sp>
-        <p:nvSpPr>
-          <p:cNvPr id="15" name="Text 13"/>
-          <p:cNvSpPr txBox="1"/>
-          <p:nvPr/>
-        </p:nvSpPr>
-        <p:spPr>
-          <a:xfrm>
-            <a:off x="8503920" y="2926080"/>
-            <a:ext cx="2743200" cy="1463040"/>
-          </a:xfrm>
-          <a:prstGeom prst="rect">
-            <a:avLst/>
-          </a:prstGeom>
-          <a:noFill/>
-          <a:ln/>
-        </p:spPr>
-        <p:txBody>
-          <a:bodyPr wrap="square" lIns="0" tIns="0" rIns="0" bIns="0" rtlCol="0" anchor="t"/>
-          <a:lstStyle/>
-          <a:p>
-            <a:pPr indent="0" marL="0">
-              <a:buNone/>
-            </a:pPr>
-            <a:r>
-              <a:rPr lang="en-US" sz="1500" dirty="0">
-                <a:solidFill>
-                  <a:schemeClr val="bg1"/>
-                </a:solidFill>
-              </a:rPr>
-              <a:t>Åbn ChatGPT i Excel under Hjem og Tilføjelsesprogrammer. Bed om formlen til række 2, sæt den ind, og træk den ned.</a:t>
-            </a:r>
-            <a:endParaRPr lang="en-US" sz="1500" dirty="0"/>
-          </a:p>
-        </p:txBody>
-      </p:sp>
-      <p:sp>
-        <p:nvSpPr>
-          <p:cNvPr id="16" name="Text 14"/>
-          <p:cNvSpPr txBox="1"/>
-          <p:nvPr/>
-        </p:nvSpPr>
-        <p:spPr>
-          <a:xfrm>
-            <a:off x="8503920" y="4434840"/>
-            <a:ext cx="2743200" cy="640080"/>
-          </a:xfrm>
-          <a:prstGeom prst="rect">
-            <a:avLst/>
-          </a:prstGeom>
-          <a:noFill/>
-          <a:ln/>
-        </p:spPr>
-        <p:txBody>
-          <a:bodyPr wrap="square" lIns="0" tIns="0" rIns="0" bIns="0" rtlCol="0" anchor="t"/>
-          <a:lstStyle/>
-          <a:p>
-            <a:pPr indent="0" marL="0">
-              <a:buNone/>
-            </a:pPr>
-            <a:r>
-              <a:rPr lang="en-US" sz="1400" dirty="0">
-                <a:solidFill>
-                  <a:schemeClr val="accent3"/>
-                </a:solidFill>
-              </a:rPr>
-              <a:t>Tjek T-07 mod jeres egen udregning.</a:t>
-            </a:r>
-            <a:endParaRPr lang="en-US" sz="1400" dirty="0"/>
-          </a:p>
-        </p:txBody>
-      </p:sp>
-      <p:sp>
-        <p:nvSpPr>
-          <p:cNvPr id="17" name="Text 15"/>
+              <a:t>Sparringsprompten sætter ChatGPT til at spørge og forklare uden at give facit. Her gælder studiereglen.</a:t>
+            </a:r>
+            <a:endParaRPr lang="en-US" sz="1700" dirty="0"/>
+          </a:p>
+        </p:txBody>
+      </p:sp>
+      <p:sp>
+        <p:nvSpPr>
+          <p:cNvPr id="13" name="Text 11"/>
           <p:cNvSpPr txBox="1"/>
           <p:nvPr/>
         </p:nvSpPr>
@@ -19857,7 +19722,7 @@
                   <a:schemeClr val="accent3"/>
                 </a:solidFill>
               </a:rPr>
-              <a:t>De tre spørgsmål fra Opgave 13 i fanen Opgave. Prompterne står på opgavearket.</a:t>
+              <a:t>Arket med prompter og opgaver ligger under Materialer.</a:t>
             </a:r>
             <a:endParaRPr lang="en-US" sz="1200" dirty="0"/>
           </a:p>
@@ -20004,7 +19869,7 @@
                   <a:schemeClr val="bg1"/>
                 </a:solidFill>
               </a:rPr>
-              <a:t>Åbn fanen </a:t>
+              <a:t>Tilføj </a:t>
             </a:r>
             <a:pPr indent="0" marL="0">
               <a:buNone/>
@@ -20015,7 +19880,7 @@
                   <a:schemeClr val="accent1"/>
                 </a:solidFill>
               </a:rPr>
-              <a:t>Opgave</a:t>
+              <a:t>ChatGPT</a:t>
             </a:r>
             <a:pPr indent="0" marL="0">
               <a:buNone/>
@@ -20026,7 +19891,7 @@
                   <a:schemeClr val="bg1"/>
                 </a:solidFill>
               </a:rPr>
-              <a:t>, og lad ChatGPT i Excel skrive de tre formler. Tjek T-07 mod jeres udregning fra Opgave 13.</a:t>
+              <a:t> til Excel. Få overblik med tre prompts, og løs tre opgaver, hvor ChatGPT må spørge, men ikke give facit.</a:t>
             </a:r>
             <a:endParaRPr lang="en-US" sz="2600" dirty="0"/>
           </a:p>
@@ -20062,7 +19927,7 @@
                   <a:schemeClr val="accent3"/>
                 </a:solidFill>
               </a:rPr>
-              <a:t>Tjek tallet, før I tror på det.</a:t>
+              <a:t>Opgave 1 er Opgave 13. I kender facit.</a:t>
             </a:r>
             <a:endParaRPr lang="en-US" sz="2000" dirty="0"/>
           </a:p>
@@ -20157,12 +20022,13 @@
               <a:buNone/>
             </a:pPr>
             <a:r>
-              <a:rPr lang="en-US" sz="6600" b="1" dirty="0">
+              <a:rPr lang="en-US" sz="7200" b="1" dirty="0">
                 <a:solidFill>
                   <a:schemeClr val="bg1"/>
                 </a:solidFill>
               </a:rPr>
-              <a:t>Lad AI skrive formlen. </a:t>
+              <a:t>ChatGPT spørger.
+</a:t>
             </a:r>
             <a:pPr indent="0" marL="0">
               <a:lnSpc>
@@ -20171,14 +20037,14 @@
               <a:buNone/>
             </a:pPr>
             <a:r>
-              <a:rPr lang="en-US" sz="6600" b="1" dirty="0">
+              <a:rPr lang="en-US" sz="7200" b="1" dirty="0">
                 <a:solidFill>
                   <a:schemeClr val="accent1"/>
                 </a:solidFill>
               </a:rPr>
-              <a:t>Tjek tallet selv.</a:t>
-            </a:r>
-            <a:endParaRPr lang="en-US" sz="6600" dirty="0"/>
+              <a:t>I regner.</a:t>
+            </a:r>
+            <a:endParaRPr lang="en-US" sz="7200" dirty="0"/>
           </a:p>
         </p:txBody>
       </p:sp>

--- a/private/proces/praesentation.pptx
+++ b/private/proces/praesentation.pptx
@@ -151,7 +151,7 @@
   <p:extLst>
     <p:ext uri="{521415D9-36F7-43E2-AB2F-B90AF26B5E84}">
       <p14:sectionLst xmlns:p14="http://schemas.microsoft.com/office/powerpoint/2010/main">
-        <p14:section name="Åbning" id="{3bc350fd-bd78-c2f9-7fb8-c9f1117497f6}">
+        <p14:section name="Åbning" id="{5b481082-e512-f844-94d2-9b55ddd54c51}">
           <p14:sldIdLst>
             <p14:sldId id="256"/>
             <p14:sldId id="257"/>
@@ -161,7 +161,7 @@
             <p14:sldId id="261"/>
           </p14:sldIdLst>
         </p14:section>
-        <p14:section name="Som studerende" id="{45d56ec3-1f0e-a7bb-2c03-523b0dd28407}">
+        <p14:section name="Som studerende" id="{668d0c4d-4743-9816-3cc8-a69bb4fa0237}">
           <p14:sldIdLst>
             <p14:sldId id="262"/>
             <p14:sldId id="263"/>
@@ -173,7 +173,7 @@
             <p14:sldId id="269"/>
           </p14:sldIdLst>
         </p14:section>
-        <p14:section name="Prompting" id="{1d490e1d-cef8-68c5-0d60-1963fe74c933}">
+        <p14:section name="Prompting" id="{e973c81d-46f2-be5e-2b7d-fb966c49dce7}">
           <p14:sldIdLst>
             <p14:sldId id="270"/>
             <p14:sldId id="271"/>
@@ -184,7 +184,7 @@
             <p14:sldId id="276"/>
           </p14:sldIdLst>
         </p14:section>
-        <p14:section name="Excel og data" id="{59cae7a7-b293-3cee-698c-3d2d4a53922c}">
+        <p14:section name="Excel og data" id="{d4e9e7c2-e0d7-0ec1-394c-1ef6d134ce94}">
           <p14:sldIdLst>
             <p14:sldId id="277"/>
             <p14:sldId id="278"/>
@@ -194,7 +194,7 @@
             <p14:sldId id="282"/>
           </p14:sldIdLst>
         </p14:section>
-        <p14:section name="AI i jobbet" id="{c01a538f-3a11-c805-7cca-5340bb06b563}">
+        <p14:section name="AI i jobbet" id="{f53b0457-c8bd-115f-a3e1-a0e8d3772a20}">
           <p14:sldIdLst>
             <p14:sldId id="283"/>
             <p14:sldId id="284"/>
@@ -207,7 +207,7 @@
             <p14:sldId id="291"/>
           </p14:sldIdLst>
         </p14:section>
-        <p14:section name="Vibecoding" id="{546da49e-10c5-8a4f-e1c8-f4836f298b9c}">
+        <p14:section name="Vibecoding" id="{8ef2c89d-b34e-5f79-73e5-98cae912c872}">
           <p14:sldIdLst>
             <p14:sldId id="292"/>
             <p14:sldId id="293"/>
@@ -217,7 +217,7 @@
             <p14:sldId id="297"/>
           </p14:sldIdLst>
         </p14:section>
-        <p14:section name="Afrunding" id="{cbdf887a-0669-825e-3a22-336280309eca}">
+        <p14:section name="Afrunding" id="{fa1e5ed4-7c95-71c4-d36c-d4f1ee72b667}">
           <p14:sldIdLst>
             <p14:sldId id="298"/>
             <p14:sldId id="299"/>
@@ -3796,7 +3796,7 @@
           <a:p>
             <a:r>
               <a:rPr lang="en-US" dirty="0"/>
-              <a:t>Erstat den stiplede firkant med en QR-kode til appens Vercel-adresse, før du underviser. Opret repo og Vercel-projekt på forhånd, så adressen er kendt. Tag ét forslag fra salen, og lav én runde mere.</a:t>
+              <a:t>QR-koden peger på proces-fugtlog.vercel.app. Opret repo og Vercel-projekt på forhånd, så adressen er kendt. Tag ét forslag fra salen, og lav én runde mere.</a:t>
             </a:r>
             <a:endParaRPr lang="en-US" dirty="0"/>
           </a:p>
@@ -18315,49 +18315,73 @@
             </a:avLst>
           </a:prstGeom>
           <a:solidFill>
-            <a:srgbClr val="1C1C1E"/>
+            <a:srgbClr val="FFFFFF"/>
           </a:solidFill>
-          <a:ln w="15875">
+          <a:ln w="12700">
             <a:solidFill>
-              <a:srgbClr val="A1A1A6"/>
+              <a:srgbClr val="FFFFFF"/>
             </a:solidFill>
-            <a:prstDash val="dash"/>
+            <a:prstDash val="solid"/>
           </a:ln>
         </p:spPr>
       </p:sp>
-      <p:sp>
-        <p:nvSpPr>
-          <p:cNvPr id="6" name="Text 4"/>
-          <p:cNvSpPr txBox="1"/>
-          <p:nvPr/>
-        </p:nvSpPr>
-        <p:spPr>
-          <a:xfrm>
-            <a:off x="8138160" y="3383280"/>
-            <a:ext cx="2743200" cy="914400"/>
-          </a:xfrm>
-          <a:prstGeom prst="rect">
-            <a:avLst/>
-          </a:prstGeom>
-          <a:noFill/>
-          <a:ln/>
-        </p:spPr>
-        <p:txBody>
-          <a:bodyPr wrap="square" lIns="0" tIns="0" rIns="0" bIns="0" rtlCol="0" anchor="ctr"/>
+      <p:pic>
+        <p:nvPicPr>
+          <p:cNvPr id="6" name="Image 0" descr="qr_proces_fugtlog.png">    </p:cNvPr>
+          <p:cNvPicPr>
+            <a:picLocks noChangeAspect="1"/>
+          </p:cNvPicPr>
+          <p:nvPr/>
+        </p:nvPicPr>
+        <p:blipFill>
+          <a:blip r:embed="rId1"/>
+          <a:stretch>
+            <a:fillRect/>
+          </a:stretch>
+        </p:blipFill>
+        <p:spPr>
+          <a:xfrm>
+            <a:off x="8001000" y="2377440"/>
+            <a:ext cx="3017520" cy="3017520"/>
+          </a:xfrm>
+          <a:prstGeom prst="rect">
+            <a:avLst/>
+          </a:prstGeom>
+        </p:spPr>
+      </p:pic>
+      <p:sp>
+        <p:nvSpPr>
+          <p:cNvPr id="7" name="Text 4"/>
+          <p:cNvSpPr txBox="1"/>
+          <p:nvPr/>
+        </p:nvSpPr>
+        <p:spPr>
+          <a:xfrm>
+            <a:off x="7863840" y="5623560"/>
+            <a:ext cx="3291840" cy="320040"/>
+          </a:xfrm>
+          <a:prstGeom prst="rect">
+            <a:avLst/>
+          </a:prstGeom>
+          <a:noFill/>
+          <a:ln/>
+        </p:spPr>
+        <p:txBody>
+          <a:bodyPr wrap="square" lIns="0" tIns="0" rIns="0" bIns="0" rtlCol="0" anchor="t"/>
           <a:lstStyle/>
           <a:p>
             <a:pPr algn="ctr" indent="0" marL="0">
               <a:buNone/>
             </a:pPr>
             <a:r>
-              <a:rPr lang="en-US" sz="1500" dirty="0">
+              <a:rPr lang="en-US" sz="1300" dirty="0">
                 <a:solidFill>
                   <a:schemeClr val="accent3"/>
                 </a:solidFill>
               </a:rPr>
-              <a:t>Indsæt QR-kode til Vercel-adressen</a:t>
-            </a:r>
-            <a:endParaRPr lang="en-US" sz="1500" dirty="0"/>
+              <a:t>proces-fugtlog.vercel.app</a:t>
+            </a:r>
+            <a:endParaRPr lang="en-US" sz="1300" dirty="0"/>
           </a:p>
         </p:txBody>
       </p:sp>

--- a/private/proces/praesentation.pptx
+++ b/private/proces/praesentation.pptx
@@ -50,9 +50,10 @@
     <p:sldId id="298" r:id="rId44"/>
     <p:sldId id="299" r:id="rId45"/>
     <p:sldId id="300" r:id="rId46"/>
+    <p:sldId id="301" r:id="rId47"/>
   </p:sldIdLst>
   <p:notesMasterIdLst>
-    <p:notesMasterId r:id="rId47"/>
+    <p:notesMasterId r:id="rId48"/>
   </p:notesMasterIdLst>
   <p:sldSz cx="12192000" cy="6858000"/>
   <p:notesSz cx="6858000" cy="12192000"/>
@@ -151,7 +152,7 @@
   <p:extLst>
     <p:ext uri="{521415D9-36F7-43E2-AB2F-B90AF26B5E84}">
       <p14:sectionLst xmlns:p14="http://schemas.microsoft.com/office/powerpoint/2010/main">
-        <p14:section name="Åbning" id="{5b481082-e512-f844-94d2-9b55ddd54c51}">
+        <p14:section name="Åbning" id="{b4229779-b561-27b2-4cbc-186b46434d52}">
           <p14:sldIdLst>
             <p14:sldId id="256"/>
             <p14:sldId id="257"/>
@@ -161,7 +162,7 @@
             <p14:sldId id="261"/>
           </p14:sldIdLst>
         </p14:section>
-        <p14:section name="Som studerende" id="{668d0c4d-4743-9816-3cc8-a69bb4fa0237}">
+        <p14:section name="Som studerende" id="{2a16b47a-f43e-585a-b61f-56f4bf3c4dc1}">
           <p14:sldIdLst>
             <p14:sldId id="262"/>
             <p14:sldId id="263"/>
@@ -173,7 +174,7 @@
             <p14:sldId id="269"/>
           </p14:sldIdLst>
         </p14:section>
-        <p14:section name="Prompting" id="{e973c81d-46f2-be5e-2b7d-fb966c49dce7}">
+        <p14:section name="Prompting" id="{1fccd9e6-1f83-f318-3dcc-5eb2f0ee3598}">
           <p14:sldIdLst>
             <p14:sldId id="270"/>
             <p14:sldId id="271"/>
@@ -184,7 +185,7 @@
             <p14:sldId id="276"/>
           </p14:sldIdLst>
         </p14:section>
-        <p14:section name="Excel og data" id="{d4e9e7c2-e0d7-0ec1-394c-1ef6d134ce94}">
+        <p14:section name="Excel og data" id="{fcd12f97-d186-22a7-83a4-f931f1063b98}">
           <p14:sldIdLst>
             <p14:sldId id="277"/>
             <p14:sldId id="278"/>
@@ -194,7 +195,7 @@
             <p14:sldId id="282"/>
           </p14:sldIdLst>
         </p14:section>
-        <p14:section name="AI i jobbet" id="{f53b0457-c8bd-115f-a3e1-a0e8d3772a20}">
+        <p14:section name="AI i jobbet" id="{421a7ca5-2471-ebd4-0a4b-1971af178080}">
           <p14:sldIdLst>
             <p14:sldId id="283"/>
             <p14:sldId id="284"/>
@@ -207,7 +208,7 @@
             <p14:sldId id="291"/>
           </p14:sldIdLst>
         </p14:section>
-        <p14:section name="Vibecoding" id="{8ef2c89d-b34e-5f79-73e5-98cae912c872}">
+        <p14:section name="Vibecoding" id="{09f69cb4-cac1-4b79-b1e8-9f4f2a2b7856}">
           <p14:sldIdLst>
             <p14:sldId id="292"/>
             <p14:sldId id="293"/>
@@ -215,13 +216,14 @@
             <p14:sldId id="295"/>
             <p14:sldId id="296"/>
             <p14:sldId id="297"/>
+            <p14:sldId id="298"/>
           </p14:sldIdLst>
         </p14:section>
-        <p14:section name="Afrunding" id="{fa1e5ed4-7c95-71c4-d36c-d4f1ee72b667}">
+        <p14:section name="Afrunding" id="{ee7edad7-f2c5-e4cf-d408-66ad24fda912}">
           <p14:sldIdLst>
-            <p14:sldId id="298"/>
             <p14:sldId id="299"/>
             <p14:sldId id="300"/>
+            <p14:sldId id="301"/>
           </p14:sldIdLst>
         </p14:section>
       </p14:sectionLst>
@@ -3796,7 +3798,7 @@
           <a:p>
             <a:r>
               <a:rPr lang="en-US" dirty="0"/>
-              <a:t>QR-koden peger på proces-fugtlog.vercel.app. Opret repo og Vercel-projekt på forhånd, så adressen er kendt. Tag ét forslag fra salen, og lav én runde mere.</a:t>
+              <a:t>På Fjordtørreriet i hverdagen. Operatøren går runden med telefonen i lommen. Ved hvert planlager trykker han lager og vare, taster vandindhold og lagtemperatur og gemmer. Det tager få sekunder, og dato, tid og initialer kommer automatisk med. Er en måling i orden, sker der ikke mere. Er den uden for grænsen, bliver skærmen rød, og appen nægter at gemme, før operatøren har skrevet, hvad han gør ved det. Det er hele pointen. Afvigelsen kan ikke bare noteres og glemmes, for den korrigerende handling bliver tvunget frem i samme øjeblik. Tælleren øverst giver formanden et hurtigt overblik. Står der 0, kører det. Står der 3 med rød baggrund, skal nogen kigge nærmere på det i dag.</a:t>
             </a:r>
             <a:endParaRPr lang="en-US" dirty="0"/>
           </a:p>
@@ -3884,7 +3886,7 @@
           <a:p>
             <a:r>
               <a:rPr lang="en-US" dirty="0"/>
-              <a:t>Afrunding. To regler, ét værktøj. Som studerende tænker I selv og bruger AI som sparringspartner. I jobbet bruger I AI fuldt ud, tager svarene, kører arbejdsgangene og bygger jeres egne værktøjer.</a:t>
+              <a:t>QR-koden peger på proces-fugtlog.vercel.app. Opret repo og Vercel-projekt på forhånd, så adressen er kendt. Tag ét forslag fra salen, og lav én runde mere.</a:t>
             </a:r>
             <a:endParaRPr lang="en-US" dirty="0"/>
           </a:p>
@@ -3972,7 +3974,7 @@
           <a:p>
             <a:r>
               <a:rPr lang="en-US" dirty="0"/>
-              <a:t>Exit ticket i Mentimeter eller på en seddel. Del datasæt, promptkort og promptbanken til studiet på læringsplatformen.</a:t>
+              <a:t>Afrunding. To regler, ét værktøj. Som studerende tænker I selv og bruger AI som sparringspartner. I jobbet bruger I AI fuldt ud, tager svarene, kører arbejdsgangene og bygger jeres egne værktøjer.</a:t>
             </a:r>
             <a:endParaRPr lang="en-US" dirty="0"/>
           </a:p>
@@ -4060,7 +4062,7 @@
           <a:p>
             <a:r>
               <a:rPr lang="en-US" dirty="0"/>
-              <a:t>Tak for i dag.</a:t>
+              <a:t>Exit ticket i Mentimeter eller på en seddel. Del datasæt, promptkort og promptbanken til studiet på læringsplatformen.</a:t>
             </a:r>
             <a:endParaRPr lang="en-US" dirty="0"/>
           </a:p>
@@ -4084,6 +4086,94 @@
             <a:fld id="{F7021451-1387-4CA6-816F-3879F97B5CBC}" type="slidenum">
               <a:rPr lang="en-US"/>
               <a:t>45</a:t>
+            </a:fld>
+            <a:endParaRPr lang="en-US"/>
+          </a:p>
+        </p:txBody>
+      </p:sp>
+    </p:spTree>
+    <p:extLst>
+      <p:ext uri="{BB962C8B-B14F-4D97-AF65-F5344CB8AC3E}">
+        <p14:creationId xmlns:p14="http://schemas.microsoft.com/office/powerpoint/2010/main" val="1024086991"/>
+      </p:ext>
+    </p:extLst>
+  </p:cSld>
+  <p:clrMapOvr>
+    <a:masterClrMapping/>
+  </p:clrMapOvr>
+</p:notes>
+</file>
+
+<file path=ppt/notesSlides/notesSlide46.xml><?xml version="1.0" encoding="utf-8"?>
+<p:notes xmlns:a="http://schemas.openxmlformats.org/drawingml/2006/main" xmlns:r="http://schemas.openxmlformats.org/officeDocument/2006/relationships" xmlns:p="http://schemas.openxmlformats.org/presentationml/2006/main">
+  <p:cSld>
+    <p:spTree>
+      <p:nvGrpSpPr>
+        <p:cNvPr id="1" name=""/>
+        <p:cNvGrpSpPr/>
+        <p:nvPr/>
+      </p:nvGrpSpPr>
+      <p:grpSpPr>
+        <a:xfrm>
+          <a:off x="0" y="0"/>
+          <a:ext cx="0" cy="0"/>
+          <a:chOff x="0" y="0"/>
+          <a:chExt cx="0" cy="0"/>
+        </a:xfrm>
+      </p:grpSpPr>
+      <p:sp>
+        <p:nvSpPr>
+          <p:cNvPr id="2" name="Slide Image Placeholder 1"/>
+          <p:cNvSpPr>
+            <a:spLocks noGrp="1" noRot="1" noChangeAspect="1"/>
+          </p:cNvSpPr>
+          <p:nvPr>
+            <p:ph type="sldImg"/>
+          </p:nvPr>
+        </p:nvSpPr>
+        <p:spPr/>
+      </p:sp>
+      <p:sp>
+        <p:nvSpPr>
+          <p:cNvPr id="3" name="Notes Placeholder 2"/>
+          <p:cNvSpPr>
+            <a:spLocks noGrp="1"/>
+          </p:cNvSpPr>
+          <p:nvPr>
+            <p:ph type="body" idx="1"/>
+          </p:nvPr>
+        </p:nvSpPr>
+        <p:spPr/>
+        <p:txBody>
+          <a:bodyPr/>
+          <a:lstStyle/>
+          <a:p>
+            <a:r>
+              <a:rPr lang="en-US" dirty="0"/>
+              <a:t>Tak for i dag.</a:t>
+            </a:r>
+            <a:endParaRPr lang="en-US" dirty="0"/>
+          </a:p>
+        </p:txBody>
+      </p:sp>
+      <p:sp>
+        <p:nvSpPr>
+          <p:cNvPr id="4" name="Slide Number Placeholder 3"/>
+          <p:cNvSpPr>
+            <a:spLocks noGrp="1"/>
+          </p:cNvSpPr>
+          <p:nvPr>
+            <p:ph type="sldNum" sz="quarter" idx="10"/>
+          </p:nvPr>
+        </p:nvSpPr>
+        <p:spPr/>
+        <p:txBody>
+          <a:bodyPr/>
+          <a:lstStyle/>
+          <a:p>
+            <a:fld id="{F7021451-1387-4CA6-816F-3879F97B5CBC}" type="slidenum">
+              <a:rPr lang="en-US"/>
+              <a:t>46</a:t>
             </a:fld>
             <a:endParaRPr lang="en-US"/>
           </a:p>
@@ -18201,7 +18291,7 @@
                   <a:schemeClr val="accent3"/>
                 </a:solidFill>
               </a:rPr>
-              <a:t>LIVE BUILD</a:t>
+              <a:t>FUGTLOGGEN  ·  PÅ FJORDTØRRERIET I HVERDAGEN</a:t>
             </a:r>
             <a:endParaRPr lang="en-US" sz="1200" dirty="0"/>
           </a:p>
@@ -18242,7 +18332,7 @@
                   <a:schemeClr val="bg1"/>
                 </a:solidFill>
               </a:rPr>
-              <a:t>Scan koden, og test appen, </a:t>
+              <a:t>Afvigelsen kan ikke </a:t>
             </a:r>
             <a:pPr algn="l" indent="0" marL="0">
               <a:lnSpc>
@@ -18256,7 +18346,7 @@
                   <a:schemeClr val="accent1"/>
                 </a:solidFill>
               </a:rPr>
-              <a:t>når den er online</a:t>
+              <a:t>noteres og glemmes</a:t>
             </a:r>
             <a:endParaRPr lang="en-US" sz="3400" dirty="0"/>
           </a:p>
@@ -18270,118 +18360,355 @@
         </p:nvSpPr>
         <p:spPr>
           <a:xfrm>
-            <a:off x="685800" y="2560320"/>
-            <a:ext cx="5669280" cy="1280160"/>
-          </a:xfrm>
-          <a:prstGeom prst="rect">
-            <a:avLst/>
-          </a:prstGeom>
-          <a:noFill/>
-          <a:ln/>
-        </p:spPr>
-        <p:txBody>
-          <a:bodyPr wrap="square" lIns="0" tIns="0" rIns="0" bIns="0" rtlCol="0" anchor="t"/>
-          <a:lstStyle/>
-          <a:p>
-            <a:pPr indent="0" marL="0">
-              <a:buNone/>
-            </a:pPr>
-            <a:r>
-              <a:rPr lang="en-US" sz="2400" dirty="0">
+            <a:off x="685800" y="2468880"/>
+            <a:ext cx="914400" cy="365760"/>
+          </a:xfrm>
+          <a:prstGeom prst="rect">
+            <a:avLst/>
+          </a:prstGeom>
+          <a:noFill/>
+          <a:ln/>
+        </p:spPr>
+        <p:txBody>
+          <a:bodyPr wrap="square" lIns="0" tIns="0" rIns="0" bIns="0" rtlCol="0" anchor="t"/>
+          <a:lstStyle/>
+          <a:p>
+            <a:pPr indent="0" marL="0">
+              <a:buNone/>
+            </a:pPr>
+            <a:r>
+              <a:rPr lang="en-US" sz="1600" b="1" dirty="0">
+                <a:solidFill>
+                  <a:schemeClr val="accent1"/>
+                </a:solidFill>
+              </a:rPr>
+              <a:t>01</a:t>
+            </a:r>
+            <a:endParaRPr lang="en-US" sz="1600" dirty="0"/>
+          </a:p>
+        </p:txBody>
+      </p:sp>
+      <p:sp>
+        <p:nvSpPr>
+          <p:cNvPr id="5" name="Text 3"/>
+          <p:cNvSpPr txBox="1"/>
+          <p:nvPr/>
+        </p:nvSpPr>
+        <p:spPr>
+          <a:xfrm>
+            <a:off x="685800" y="2880360"/>
+            <a:ext cx="3240938" cy="731520"/>
+          </a:xfrm>
+          <a:prstGeom prst="rect">
+            <a:avLst/>
+          </a:prstGeom>
+          <a:noFill/>
+          <a:ln/>
+        </p:spPr>
+        <p:txBody>
+          <a:bodyPr wrap="square" lIns="0" tIns="0" rIns="0" bIns="0" rtlCol="0" anchor="t"/>
+          <a:lstStyle/>
+          <a:p>
+            <a:pPr indent="0" marL="0">
+              <a:buNone/>
+            </a:pPr>
+            <a:r>
+              <a:rPr lang="en-US" sz="3400" b="1" dirty="0">
                 <a:solidFill>
                   <a:schemeClr val="bg1"/>
                 </a:solidFill>
               </a:rPr>
-              <a:t>Find en fejl, eller foreslå en forbedring. Så bygger vi én runde mere.</a:t>
-            </a:r>
-            <a:endParaRPr lang="en-US" sz="2400" dirty="0"/>
-          </a:p>
-        </p:txBody>
-      </p:sp>
-      <p:sp>
-        <p:nvSpPr>
-          <p:cNvPr id="5" name="Shape 3"/>
-          <p:cNvSpPr/>
-          <p:nvPr/>
-        </p:nvSpPr>
-        <p:spPr>
-          <a:xfrm>
-            <a:off x="7863840" y="2240280"/>
-            <a:ext cx="3291840" cy="3291840"/>
-          </a:xfrm>
-          <a:prstGeom prst="roundRect">
-            <a:avLst>
-              <a:gd name="adj" fmla="val 3333"/>
-            </a:avLst>
-          </a:prstGeom>
-          <a:solidFill>
-            <a:srgbClr val="FFFFFF"/>
-          </a:solidFill>
-          <a:ln w="12700">
-            <a:solidFill>
-              <a:srgbClr val="FFFFFF"/>
-            </a:solidFill>
-            <a:prstDash val="solid"/>
-          </a:ln>
-        </p:spPr>
-      </p:sp>
-      <p:pic>
-        <p:nvPicPr>
-          <p:cNvPr id="6" name="Image 0" descr="qr_proces_fugtlog.png">    </p:cNvPr>
-          <p:cNvPicPr>
-            <a:picLocks noChangeAspect="1"/>
-          </p:cNvPicPr>
-          <p:nvPr/>
-        </p:nvPicPr>
-        <p:blipFill>
-          <a:blip r:embed="rId1"/>
-          <a:stretch>
-            <a:fillRect/>
-          </a:stretch>
-        </p:blipFill>
-        <p:spPr>
-          <a:xfrm>
-            <a:off x="8001000" y="2377440"/>
-            <a:ext cx="3017520" cy="3017520"/>
-          </a:xfrm>
-          <a:prstGeom prst="rect">
-            <a:avLst/>
-          </a:prstGeom>
-        </p:spPr>
-      </p:pic>
-      <p:sp>
-        <p:nvSpPr>
-          <p:cNvPr id="7" name="Text 4"/>
-          <p:cNvSpPr txBox="1"/>
-          <p:nvPr/>
-        </p:nvSpPr>
-        <p:spPr>
-          <a:xfrm>
-            <a:off x="7863840" y="5623560"/>
-            <a:ext cx="3291840" cy="320040"/>
-          </a:xfrm>
-          <a:prstGeom prst="rect">
-            <a:avLst/>
-          </a:prstGeom>
-          <a:noFill/>
-          <a:ln/>
-        </p:spPr>
-        <p:txBody>
-          <a:bodyPr wrap="square" lIns="0" tIns="0" rIns="0" bIns="0" rtlCol="0" anchor="t"/>
-          <a:lstStyle/>
-          <a:p>
-            <a:pPr algn="ctr" indent="0" marL="0">
-              <a:buNone/>
-            </a:pPr>
-            <a:r>
-              <a:rPr lang="en-US" sz="1300" dirty="0">
+              <a:t>Runden</a:t>
+            </a:r>
+            <a:endParaRPr lang="en-US" sz="3400" dirty="0"/>
+          </a:p>
+        </p:txBody>
+      </p:sp>
+      <p:sp>
+        <p:nvSpPr>
+          <p:cNvPr id="6" name="Text 4"/>
+          <p:cNvSpPr txBox="1"/>
+          <p:nvPr/>
+        </p:nvSpPr>
+        <p:spPr>
+          <a:xfrm>
+            <a:off x="685800" y="3749040"/>
+            <a:ext cx="3149498" cy="1737360"/>
+          </a:xfrm>
+          <a:prstGeom prst="rect">
+            <a:avLst/>
+          </a:prstGeom>
+          <a:noFill/>
+          <a:ln/>
+        </p:spPr>
+        <p:txBody>
+          <a:bodyPr wrap="square" lIns="0" tIns="0" rIns="0" bIns="0" rtlCol="0" anchor="t"/>
+          <a:lstStyle/>
+          <a:p>
+            <a:pPr indent="0" marL="0">
+              <a:buNone/>
+            </a:pPr>
+            <a:r>
+              <a:rPr lang="en-US" sz="1700" dirty="0">
                 <a:solidFill>
                   <a:schemeClr val="accent3"/>
                 </a:solidFill>
               </a:rPr>
-              <a:t>proces-fugtlog.vercel.app</a:t>
-            </a:r>
-            <a:endParaRPr lang="en-US" sz="1300" dirty="0"/>
+              <a:t>Operatøren trykker lager og vare, taster vandindhold og lagtemperatur og gemmer. Få sekunder. Dato, tid og initialer kommer af sig selv.</a:t>
+            </a:r>
+            <a:endParaRPr lang="en-US" sz="1700" dirty="0"/>
+          </a:p>
+        </p:txBody>
+      </p:sp>
+      <p:sp>
+        <p:nvSpPr>
+          <p:cNvPr id="7" name="Text 5"/>
+          <p:cNvSpPr txBox="1"/>
+          <p:nvPr/>
+        </p:nvSpPr>
+        <p:spPr>
+          <a:xfrm>
+            <a:off x="4292498" y="2468880"/>
+            <a:ext cx="914400" cy="365760"/>
+          </a:xfrm>
+          <a:prstGeom prst="rect">
+            <a:avLst/>
+          </a:prstGeom>
+          <a:noFill/>
+          <a:ln/>
+        </p:spPr>
+        <p:txBody>
+          <a:bodyPr wrap="square" lIns="0" tIns="0" rIns="0" bIns="0" rtlCol="0" anchor="t"/>
+          <a:lstStyle/>
+          <a:p>
+            <a:pPr indent="0" marL="0">
+              <a:buNone/>
+            </a:pPr>
+            <a:r>
+              <a:rPr lang="en-US" sz="1600" b="1" dirty="0">
+                <a:solidFill>
+                  <a:schemeClr val="accent1"/>
+                </a:solidFill>
+              </a:rPr>
+              <a:t>02</a:t>
+            </a:r>
+            <a:endParaRPr lang="en-US" sz="1600" dirty="0"/>
+          </a:p>
+        </p:txBody>
+      </p:sp>
+      <p:sp>
+        <p:nvSpPr>
+          <p:cNvPr id="8" name="Text 6"/>
+          <p:cNvSpPr txBox="1"/>
+          <p:nvPr/>
+        </p:nvSpPr>
+        <p:spPr>
+          <a:xfrm>
+            <a:off x="4292498" y="2880360"/>
+            <a:ext cx="3240938" cy="731520"/>
+          </a:xfrm>
+          <a:prstGeom prst="rect">
+            <a:avLst/>
+          </a:prstGeom>
+          <a:noFill/>
+          <a:ln/>
+        </p:spPr>
+        <p:txBody>
+          <a:bodyPr wrap="square" lIns="0" tIns="0" rIns="0" bIns="0" rtlCol="0" anchor="t"/>
+          <a:lstStyle/>
+          <a:p>
+            <a:pPr indent="0" marL="0">
+              <a:buNone/>
+            </a:pPr>
+            <a:r>
+              <a:rPr lang="en-US" sz="3400" b="1" dirty="0">
+                <a:solidFill>
+                  <a:schemeClr val="bg1"/>
+                </a:solidFill>
+              </a:rPr>
+              <a:t>Afvigelsen</a:t>
+            </a:r>
+            <a:endParaRPr lang="en-US" sz="3400" dirty="0"/>
+          </a:p>
+        </p:txBody>
+      </p:sp>
+      <p:sp>
+        <p:nvSpPr>
+          <p:cNvPr id="9" name="Text 7"/>
+          <p:cNvSpPr txBox="1"/>
+          <p:nvPr/>
+        </p:nvSpPr>
+        <p:spPr>
+          <a:xfrm>
+            <a:off x="4292498" y="3749040"/>
+            <a:ext cx="3149498" cy="1737360"/>
+          </a:xfrm>
+          <a:prstGeom prst="rect">
+            <a:avLst/>
+          </a:prstGeom>
+          <a:noFill/>
+          <a:ln/>
+        </p:spPr>
+        <p:txBody>
+          <a:bodyPr wrap="square" lIns="0" tIns="0" rIns="0" bIns="0" rtlCol="0" anchor="t"/>
+          <a:lstStyle/>
+          <a:p>
+            <a:pPr indent="0" marL="0">
+              <a:buNone/>
+            </a:pPr>
+            <a:r>
+              <a:rPr lang="en-US" sz="1700" dirty="0">
+                <a:solidFill>
+                  <a:schemeClr val="accent3"/>
+                </a:solidFill>
+              </a:rPr>
+              <a:t>Er målingen uden for grænsen, bliver skærmen rød, og appen nægter at gemme, før operatøren har skrevet, hvad han gør ved det.</a:t>
+            </a:r>
+            <a:endParaRPr lang="en-US" sz="1700" dirty="0"/>
+          </a:p>
+        </p:txBody>
+      </p:sp>
+      <p:sp>
+        <p:nvSpPr>
+          <p:cNvPr id="10" name="Text 8"/>
+          <p:cNvSpPr txBox="1"/>
+          <p:nvPr/>
+        </p:nvSpPr>
+        <p:spPr>
+          <a:xfrm>
+            <a:off x="7899197" y="2468880"/>
+            <a:ext cx="914400" cy="365760"/>
+          </a:xfrm>
+          <a:prstGeom prst="rect">
+            <a:avLst/>
+          </a:prstGeom>
+          <a:noFill/>
+          <a:ln/>
+        </p:spPr>
+        <p:txBody>
+          <a:bodyPr wrap="square" lIns="0" tIns="0" rIns="0" bIns="0" rtlCol="0" anchor="t"/>
+          <a:lstStyle/>
+          <a:p>
+            <a:pPr indent="0" marL="0">
+              <a:buNone/>
+            </a:pPr>
+            <a:r>
+              <a:rPr lang="en-US" sz="1600" b="1" dirty="0">
+                <a:solidFill>
+                  <a:schemeClr val="accent1"/>
+                </a:solidFill>
+              </a:rPr>
+              <a:t>03</a:t>
+            </a:r>
+            <a:endParaRPr lang="en-US" sz="1600" dirty="0"/>
+          </a:p>
+        </p:txBody>
+      </p:sp>
+      <p:sp>
+        <p:nvSpPr>
+          <p:cNvPr id="11" name="Text 9"/>
+          <p:cNvSpPr txBox="1"/>
+          <p:nvPr/>
+        </p:nvSpPr>
+        <p:spPr>
+          <a:xfrm>
+            <a:off x="7899197" y="2880360"/>
+            <a:ext cx="3240938" cy="731520"/>
+          </a:xfrm>
+          <a:prstGeom prst="rect">
+            <a:avLst/>
+          </a:prstGeom>
+          <a:noFill/>
+          <a:ln/>
+        </p:spPr>
+        <p:txBody>
+          <a:bodyPr wrap="square" lIns="0" tIns="0" rIns="0" bIns="0" rtlCol="0" anchor="t"/>
+          <a:lstStyle/>
+          <a:p>
+            <a:pPr indent="0" marL="0">
+              <a:buNone/>
+            </a:pPr>
+            <a:r>
+              <a:rPr lang="en-US" sz="3400" b="1" dirty="0">
+                <a:solidFill>
+                  <a:schemeClr val="bg1"/>
+                </a:solidFill>
+              </a:rPr>
+              <a:t>Tælleren</a:t>
+            </a:r>
+            <a:endParaRPr lang="en-US" sz="3400" dirty="0"/>
+          </a:p>
+        </p:txBody>
+      </p:sp>
+      <p:sp>
+        <p:nvSpPr>
+          <p:cNvPr id="12" name="Text 10"/>
+          <p:cNvSpPr txBox="1"/>
+          <p:nvPr/>
+        </p:nvSpPr>
+        <p:spPr>
+          <a:xfrm>
+            <a:off x="7899197" y="3749040"/>
+            <a:ext cx="3149498" cy="1737360"/>
+          </a:xfrm>
+          <a:prstGeom prst="rect">
+            <a:avLst/>
+          </a:prstGeom>
+          <a:noFill/>
+          <a:ln/>
+        </p:spPr>
+        <p:txBody>
+          <a:bodyPr wrap="square" lIns="0" tIns="0" rIns="0" bIns="0" rtlCol="0" anchor="t"/>
+          <a:lstStyle/>
+          <a:p>
+            <a:pPr indent="0" marL="0">
+              <a:buNone/>
+            </a:pPr>
+            <a:r>
+              <a:rPr lang="en-US" sz="1700" dirty="0">
+                <a:solidFill>
+                  <a:schemeClr val="accent3"/>
+                </a:solidFill>
+              </a:rPr>
+              <a:t>0 betyder, at det kører. 3 med rød baggrund betyder, at nogen skal kigge nærmere på det i dag.</a:t>
+            </a:r>
+            <a:endParaRPr lang="en-US" sz="1700" dirty="0"/>
+          </a:p>
+        </p:txBody>
+      </p:sp>
+      <p:sp>
+        <p:nvSpPr>
+          <p:cNvPr id="13" name="Text 11"/>
+          <p:cNvSpPr txBox="1"/>
+          <p:nvPr/>
+        </p:nvSpPr>
+        <p:spPr>
+          <a:xfrm>
+            <a:off x="685800" y="6144768"/>
+            <a:ext cx="10820095" cy="320040"/>
+          </a:xfrm>
+          <a:prstGeom prst="rect">
+            <a:avLst/>
+          </a:prstGeom>
+          <a:noFill/>
+          <a:ln/>
+        </p:spPr>
+        <p:txBody>
+          <a:bodyPr wrap="square" lIns="0" tIns="0" rIns="0" bIns="0" rtlCol="0" anchor="t"/>
+          <a:lstStyle/>
+          <a:p>
+            <a:pPr indent="0" marL="0">
+              <a:buNone/>
+            </a:pPr>
+            <a:r>
+              <a:rPr lang="en-US" sz="1200" dirty="0">
+                <a:solidFill>
+                  <a:schemeClr val="accent3"/>
+                </a:solidFill>
+              </a:rPr>
+              <a:t>Den korrigerende handling bliver tvunget frem i samme øjeblik. Det er hele pointen.</a:t>
+            </a:r>
+            <a:endParaRPr lang="en-US" sz="1200" dirty="0"/>
           </a:p>
         </p:txBody>
       </p:sp>
@@ -18412,282 +18739,215 @@
       </p:grpSpPr>
       <p:sp>
         <p:nvSpPr>
-          <p:cNvPr id="2" name="Shape 0"/>
+          <p:cNvPr id="2" name="Text 0"/>
+          <p:cNvSpPr txBox="1"/>
+          <p:nvPr/>
+        </p:nvSpPr>
+        <p:spPr>
+          <a:xfrm>
+            <a:off x="685800" y="411480"/>
+            <a:ext cx="8229600" cy="274320"/>
+          </a:xfrm>
+          <a:prstGeom prst="rect">
+            <a:avLst/>
+          </a:prstGeom>
+          <a:noFill/>
+          <a:ln/>
+        </p:spPr>
+        <p:txBody>
+          <a:bodyPr wrap="square" lIns="0" tIns="0" rIns="0" bIns="0" rtlCol="0" anchor="t"/>
+          <a:lstStyle/>
+          <a:p>
+            <a:pPr indent="0" marL="0">
+              <a:buNone/>
+            </a:pPr>
+            <a:r>
+              <a:rPr lang="en-US" sz="1200" b="1" spc="200" kern="0" dirty="0">
+                <a:solidFill>
+                  <a:schemeClr val="accent3"/>
+                </a:solidFill>
+              </a:rPr>
+              <a:t>LIVE BUILD</a:t>
+            </a:r>
+            <a:endParaRPr lang="en-US" sz="1200" dirty="0"/>
+          </a:p>
+        </p:txBody>
+      </p:sp>
+      <p:sp>
+        <p:nvSpPr>
+          <p:cNvPr id="3" name="Text 0"/>
           <p:cNvSpPr/>
-          <p:nvPr/>
-        </p:nvSpPr>
-        <p:spPr>
-          <a:xfrm>
-            <a:off x="6095848" y="0"/>
-            <a:ext cx="6095848" cy="6858000"/>
-          </a:xfrm>
-          <a:prstGeom prst="rect">
-            <a:avLst/>
+          <p:nvPr>
+            <p:ph idx="100" type="title" hasCustomPrompt="1"/>
+          </p:nvPr>
+        </p:nvSpPr>
+        <p:spPr>
+          <a:xfrm>
+            <a:off x="685800" y="804672"/>
+            <a:ext cx="10820095" cy="1280160"/>
+          </a:xfrm>
+          <a:prstGeom prst="rect">
+            <a:avLst/>
+          </a:prstGeom>
+          <a:noFill/>
+          <a:ln/>
+        </p:spPr>
+        <p:txBody>
+          <a:bodyPr wrap="square" lIns="0" tIns="0" rIns="0" bIns="0" rtlCol="0" anchor="t"/>
+          <a:lstStyle/>
+          <a:p>
+            <a:pPr algn="l" indent="0" marL="0">
+              <a:lnSpc>
+                <a:spcPct val="93000"/>
+              </a:lnSpc>
+              <a:buNone/>
+            </a:pPr>
+            <a:r>
+              <a:rPr lang="en-US" sz="3400" b="1" dirty="0">
+                <a:solidFill>
+                  <a:schemeClr val="bg1"/>
+                </a:solidFill>
+              </a:rPr>
+              <a:t>Scan koden, og test appen, </a:t>
+            </a:r>
+            <a:pPr algn="l" indent="0" marL="0">
+              <a:lnSpc>
+                <a:spcPct val="93000"/>
+              </a:lnSpc>
+              <a:buNone/>
+            </a:pPr>
+            <a:r>
+              <a:rPr lang="en-US" sz="3400" b="1" dirty="0">
+                <a:solidFill>
+                  <a:schemeClr val="accent1"/>
+                </a:solidFill>
+              </a:rPr>
+              <a:t>når den er online</a:t>
+            </a:r>
+            <a:endParaRPr lang="en-US" sz="3400" dirty="0"/>
+          </a:p>
+        </p:txBody>
+      </p:sp>
+      <p:sp>
+        <p:nvSpPr>
+          <p:cNvPr id="4" name="Text 2"/>
+          <p:cNvSpPr txBox="1"/>
+          <p:nvPr/>
+        </p:nvSpPr>
+        <p:spPr>
+          <a:xfrm>
+            <a:off x="685800" y="2560320"/>
+            <a:ext cx="5669280" cy="1280160"/>
+          </a:xfrm>
+          <a:prstGeom prst="rect">
+            <a:avLst/>
+          </a:prstGeom>
+          <a:noFill/>
+          <a:ln/>
+        </p:spPr>
+        <p:txBody>
+          <a:bodyPr wrap="square" lIns="0" tIns="0" rIns="0" bIns="0" rtlCol="0" anchor="t"/>
+          <a:lstStyle/>
+          <a:p>
+            <a:pPr indent="0" marL="0">
+              <a:buNone/>
+            </a:pPr>
+            <a:r>
+              <a:rPr lang="en-US" sz="2400" dirty="0">
+                <a:solidFill>
+                  <a:schemeClr val="bg1"/>
+                </a:solidFill>
+              </a:rPr>
+              <a:t>Find en fejl, eller foreslå en forbedring. Så bygger vi én runde mere.</a:t>
+            </a:r>
+            <a:endParaRPr lang="en-US" sz="2400" dirty="0"/>
+          </a:p>
+        </p:txBody>
+      </p:sp>
+      <p:sp>
+        <p:nvSpPr>
+          <p:cNvPr id="5" name="Shape 3"/>
+          <p:cNvSpPr/>
+          <p:nvPr/>
+        </p:nvSpPr>
+        <p:spPr>
+          <a:xfrm>
+            <a:off x="7863840" y="2240280"/>
+            <a:ext cx="3291840" cy="3291840"/>
+          </a:xfrm>
+          <a:prstGeom prst="roundRect">
+            <a:avLst>
+              <a:gd name="adj" fmla="val 3333"/>
+            </a:avLst>
           </a:prstGeom>
           <a:solidFill>
-            <a:srgbClr val="0B0B0C"/>
+            <a:srgbClr val="FFFFFF"/>
           </a:solidFill>
           <a:ln w="12700">
             <a:solidFill>
-              <a:srgbClr val="0B0B0C"/>
+              <a:srgbClr val="FFFFFF"/>
             </a:solidFill>
             <a:prstDash val="solid"/>
           </a:ln>
         </p:spPr>
       </p:sp>
-      <p:sp>
-        <p:nvSpPr>
-          <p:cNvPr id="3" name="Text 1"/>
-          <p:cNvSpPr txBox="1"/>
-          <p:nvPr/>
-        </p:nvSpPr>
-        <p:spPr>
-          <a:xfrm>
-            <a:off x="685800" y="1737360"/>
-            <a:ext cx="4572000" cy="274320"/>
-          </a:xfrm>
-          <a:prstGeom prst="rect">
-            <a:avLst/>
-          </a:prstGeom>
-          <a:noFill/>
-          <a:ln/>
-        </p:spPr>
-        <p:txBody>
-          <a:bodyPr wrap="square" lIns="0" tIns="0" rIns="0" bIns="0" rtlCol="0" anchor="t"/>
-          <a:lstStyle/>
-          <a:p>
-            <a:pPr indent="0" marL="0">
-              <a:buNone/>
-            </a:pPr>
-            <a:r>
-              <a:rPr lang="en-US" sz="1200" b="1" spc="200" kern="0" dirty="0">
-                <a:solidFill>
-                  <a:schemeClr val="accent2"/>
-                </a:solidFill>
-              </a:rPr>
-              <a:t>SOM STUDERENDE</a:t>
-            </a:r>
-            <a:endParaRPr lang="en-US" sz="1200" dirty="0"/>
-          </a:p>
-        </p:txBody>
-      </p:sp>
-      <p:sp>
-        <p:nvSpPr>
-          <p:cNvPr id="4" name="Text 2"/>
-          <p:cNvSpPr txBox="1"/>
-          <p:nvPr/>
-        </p:nvSpPr>
-        <p:spPr>
-          <a:xfrm>
-            <a:off x="685800" y="2103120"/>
-            <a:ext cx="5044288" cy="2194560"/>
-          </a:xfrm>
-          <a:prstGeom prst="rect">
-            <a:avLst/>
-          </a:prstGeom>
-          <a:noFill/>
-          <a:ln/>
-        </p:spPr>
-        <p:txBody>
-          <a:bodyPr wrap="square" lIns="0" tIns="0" rIns="0" bIns="0" rtlCol="0" anchor="t"/>
-          <a:lstStyle/>
-          <a:p>
-            <a:pPr indent="0" marL="0">
-              <a:lnSpc>
-                <a:spcPct val="90000"/>
-              </a:lnSpc>
-              <a:buNone/>
-            </a:pPr>
-            <a:r>
-              <a:rPr lang="en-US" sz="6400" b="1" dirty="0">
-                <a:solidFill>
-                  <a:schemeClr val="tx1"/>
-                </a:solidFill>
-              </a:rPr>
-              <a:t>Tænk</a:t>
-            </a:r>
-            <a:endParaRPr lang="en-US" sz="6400" dirty="0"/>
-          </a:p>
-          <a:p>
-            <a:pPr indent="0" marL="0">
-              <a:lnSpc>
-                <a:spcPct val="90000"/>
-              </a:lnSpc>
-              <a:buNone/>
-            </a:pPr>
-            <a:r>
-              <a:rPr lang="en-US" sz="6400" b="1" dirty="0">
-                <a:solidFill>
-                  <a:schemeClr val="tx1"/>
-                </a:solidFill>
-              </a:rPr>
-              <a:t>selv.</a:t>
-            </a:r>
-            <a:endParaRPr lang="en-US" sz="6400" dirty="0"/>
-          </a:p>
-        </p:txBody>
-      </p:sp>
-      <p:sp>
-        <p:nvSpPr>
-          <p:cNvPr id="5" name="Text 3"/>
-          <p:cNvSpPr txBox="1"/>
-          <p:nvPr/>
-        </p:nvSpPr>
-        <p:spPr>
-          <a:xfrm>
-            <a:off x="685800" y="4526280"/>
-            <a:ext cx="4678528" cy="914400"/>
-          </a:xfrm>
-          <a:prstGeom prst="rect">
-            <a:avLst/>
-          </a:prstGeom>
-          <a:noFill/>
-          <a:ln/>
-        </p:spPr>
-        <p:txBody>
-          <a:bodyPr wrap="square" lIns="0" tIns="0" rIns="0" bIns="0" rtlCol="0" anchor="t"/>
-          <a:lstStyle/>
-          <a:p>
-            <a:pPr indent="0" marL="0">
-              <a:buNone/>
-            </a:pPr>
-            <a:r>
-              <a:rPr lang="en-US" sz="1900" dirty="0">
-                <a:solidFill>
-                  <a:schemeClr val="accent2"/>
-                </a:solidFill>
-              </a:rPr>
-              <a:t>Lær det først. Brug AI som sparringspartner.</a:t>
-            </a:r>
-            <a:endParaRPr lang="en-US" sz="1900" dirty="0"/>
-          </a:p>
-        </p:txBody>
-      </p:sp>
-      <p:sp>
-        <p:nvSpPr>
-          <p:cNvPr id="6" name="Text 4"/>
-          <p:cNvSpPr txBox="1"/>
-          <p:nvPr/>
-        </p:nvSpPr>
-        <p:spPr>
-          <a:xfrm>
-            <a:off x="6644488" y="1737360"/>
-            <a:ext cx="4572000" cy="274320"/>
-          </a:xfrm>
-          <a:prstGeom prst="rect">
-            <a:avLst/>
-          </a:prstGeom>
-          <a:noFill/>
-          <a:ln/>
-        </p:spPr>
-        <p:txBody>
-          <a:bodyPr wrap="square" lIns="0" tIns="0" rIns="0" bIns="0" rtlCol="0" anchor="t"/>
-          <a:lstStyle/>
-          <a:p>
-            <a:pPr indent="0" marL="0">
-              <a:buNone/>
-            </a:pPr>
-            <a:r>
-              <a:rPr lang="en-US" sz="1200" b="1" spc="200" kern="0" dirty="0">
-                <a:solidFill>
-                  <a:schemeClr val="accent1"/>
-                </a:solidFill>
-              </a:rPr>
-              <a:t>I JOBBET</a:t>
-            </a:r>
-            <a:endParaRPr lang="en-US" sz="1200" dirty="0"/>
-          </a:p>
-        </p:txBody>
-      </p:sp>
-      <p:sp>
-        <p:nvSpPr>
-          <p:cNvPr id="7" name="Text 5"/>
-          <p:cNvSpPr txBox="1"/>
-          <p:nvPr/>
-        </p:nvSpPr>
-        <p:spPr>
-          <a:xfrm>
-            <a:off x="6644488" y="2103120"/>
-            <a:ext cx="4998568" cy="2194560"/>
-          </a:xfrm>
-          <a:prstGeom prst="rect">
-            <a:avLst/>
-          </a:prstGeom>
-          <a:noFill/>
-          <a:ln/>
-        </p:spPr>
-        <p:txBody>
-          <a:bodyPr wrap="square" lIns="0" tIns="0" rIns="0" bIns="0" rtlCol="0" anchor="t"/>
-          <a:lstStyle/>
-          <a:p>
-            <a:pPr indent="0" marL="0">
-              <a:lnSpc>
-                <a:spcPct val="90000"/>
-              </a:lnSpc>
-              <a:buNone/>
-            </a:pPr>
-            <a:r>
-              <a:rPr lang="en-US" sz="6400" b="1" dirty="0">
-                <a:solidFill>
-                  <a:schemeClr val="bg1"/>
-                </a:solidFill>
-              </a:rPr>
-              <a:t>Brug AI</a:t>
-            </a:r>
-            <a:endParaRPr lang="en-US" sz="6400" dirty="0"/>
-          </a:p>
-          <a:p>
-            <a:pPr indent="0" marL="0">
-              <a:lnSpc>
-                <a:spcPct val="90000"/>
-              </a:lnSpc>
-              <a:buNone/>
-            </a:pPr>
-            <a:r>
-              <a:rPr lang="en-US" sz="6400" b="1" dirty="0">
-                <a:solidFill>
-                  <a:schemeClr val="accent1"/>
-                </a:solidFill>
-              </a:rPr>
-              <a:t>fuldt ud.</a:t>
-            </a:r>
-            <a:endParaRPr lang="en-US" sz="6400" dirty="0"/>
-          </a:p>
-        </p:txBody>
-      </p:sp>
-      <p:sp>
-        <p:nvSpPr>
-          <p:cNvPr id="8" name="Text 6"/>
-          <p:cNvSpPr txBox="1"/>
-          <p:nvPr/>
-        </p:nvSpPr>
-        <p:spPr>
-          <a:xfrm>
-            <a:off x="6644488" y="4526280"/>
-            <a:ext cx="4815688" cy="914400"/>
-          </a:xfrm>
-          <a:prstGeom prst="rect">
-            <a:avLst/>
-          </a:prstGeom>
-          <a:noFill/>
-          <a:ln/>
-        </p:spPr>
-        <p:txBody>
-          <a:bodyPr wrap="square" lIns="0" tIns="0" rIns="0" bIns="0" rtlCol="0" anchor="t"/>
-          <a:lstStyle/>
-          <a:p>
-            <a:pPr indent="0" marL="0">
-              <a:buNone/>
-            </a:pPr>
-            <a:r>
-              <a:rPr lang="en-US" sz="1900" dirty="0">
+      <p:pic>
+        <p:nvPicPr>
+          <p:cNvPr id="6" name="Image 0" descr="qr_proces_fugtlog.png">    </p:cNvPr>
+          <p:cNvPicPr>
+            <a:picLocks noChangeAspect="1"/>
+          </p:cNvPicPr>
+          <p:nvPr/>
+        </p:nvPicPr>
+        <p:blipFill>
+          <a:blip r:embed="rId1"/>
+          <a:stretch>
+            <a:fillRect/>
+          </a:stretch>
+        </p:blipFill>
+        <p:spPr>
+          <a:xfrm>
+            <a:off x="8001000" y="2377440"/>
+            <a:ext cx="3017520" cy="3017520"/>
+          </a:xfrm>
+          <a:prstGeom prst="rect">
+            <a:avLst/>
+          </a:prstGeom>
+        </p:spPr>
+      </p:pic>
+      <p:sp>
+        <p:nvSpPr>
+          <p:cNvPr id="7" name="Text 4"/>
+          <p:cNvSpPr txBox="1"/>
+          <p:nvPr/>
+        </p:nvSpPr>
+        <p:spPr>
+          <a:xfrm>
+            <a:off x="7863840" y="5623560"/>
+            <a:ext cx="3291840" cy="320040"/>
+          </a:xfrm>
+          <a:prstGeom prst="rect">
+            <a:avLst/>
+          </a:prstGeom>
+          <a:noFill/>
+          <a:ln/>
+        </p:spPr>
+        <p:txBody>
+          <a:bodyPr wrap="square" lIns="0" tIns="0" rIns="0" bIns="0" rtlCol="0" anchor="t"/>
+          <a:lstStyle/>
+          <a:p>
+            <a:pPr algn="ctr" indent="0" marL="0">
+              <a:buNone/>
+            </a:pPr>
+            <a:r>
+              <a:rPr lang="en-US" sz="1300" dirty="0">
                 <a:solidFill>
                   <a:schemeClr val="accent3"/>
                 </a:solidFill>
               </a:rPr>
-              <a:t>Tag svarene. Kør arbejdsgangene. Byg dine egne værktøjer.</a:t>
-            </a:r>
-            <a:endParaRPr lang="en-US" sz="1900" dirty="0"/>
+              <a:t>proces-fugtlog.vercel.app</a:t>
+            </a:r>
+            <a:endParaRPr lang="en-US" sz="1300" dirty="0"/>
           </a:p>
         </p:txBody>
       </p:sp>
@@ -18718,14 +18978,39 @@
       </p:grpSpPr>
       <p:sp>
         <p:nvSpPr>
-          <p:cNvPr id="2" name="Text 0"/>
-          <p:cNvSpPr txBox="1"/>
-          <p:nvPr/>
-        </p:nvSpPr>
-        <p:spPr>
-          <a:xfrm>
-            <a:off x="685800" y="411480"/>
-            <a:ext cx="8229600" cy="274320"/>
+          <p:cNvPr id="2" name="Shape 0"/>
+          <p:cNvSpPr/>
+          <p:nvPr/>
+        </p:nvSpPr>
+        <p:spPr>
+          <a:xfrm>
+            <a:off x="6095848" y="0"/>
+            <a:ext cx="6095848" cy="6858000"/>
+          </a:xfrm>
+          <a:prstGeom prst="rect">
+            <a:avLst/>
+          </a:prstGeom>
+          <a:solidFill>
+            <a:srgbClr val="0B0B0C"/>
+          </a:solidFill>
+          <a:ln w="12700">
+            <a:solidFill>
+              <a:srgbClr val="0B0B0C"/>
+            </a:solidFill>
+            <a:prstDash val="solid"/>
+          </a:ln>
+        </p:spPr>
+      </p:sp>
+      <p:sp>
+        <p:nvSpPr>
+          <p:cNvPr id="3" name="Text 1"/>
+          <p:cNvSpPr txBox="1"/>
+          <p:nvPr/>
+        </p:nvSpPr>
+        <p:spPr>
+          <a:xfrm>
+            <a:off x="685800" y="1737360"/>
+            <a:ext cx="4572000" cy="274320"/>
           </a:xfrm>
           <a:prstGeom prst="rect">
             <a:avLst/>
@@ -18746,7 +19031,7 @@
                   <a:schemeClr val="accent2"/>
                 </a:solidFill>
               </a:rPr>
-              <a:t>EXIT TICKET</a:t>
+              <a:t>SOM STUDERENDE</a:t>
             </a:r>
             <a:endParaRPr lang="en-US" sz="1200" dirty="0"/>
           </a:p>
@@ -18754,214 +19039,221 @@
       </p:sp>
       <p:sp>
         <p:nvSpPr>
-          <p:cNvPr id="3" name="Text 0"/>
-          <p:cNvSpPr/>
-          <p:nvPr>
-            <p:ph idx="100" type="title" hasCustomPrompt="1"/>
-          </p:nvPr>
-        </p:nvSpPr>
-        <p:spPr>
-          <a:xfrm>
-            <a:off x="685800" y="804672"/>
-            <a:ext cx="10820095" cy="1280160"/>
-          </a:xfrm>
-          <a:prstGeom prst="rect">
-            <a:avLst/>
-          </a:prstGeom>
-          <a:noFill/>
-          <a:ln/>
-        </p:spPr>
-        <p:txBody>
-          <a:bodyPr wrap="square" lIns="0" tIns="0" rIns="0" bIns="0" rtlCol="0" anchor="t"/>
-          <a:lstStyle/>
-          <a:p>
-            <a:pPr algn="l" indent="0" marL="0">
+          <p:cNvPr id="4" name="Text 2"/>
+          <p:cNvSpPr txBox="1"/>
+          <p:nvPr/>
+        </p:nvSpPr>
+        <p:spPr>
+          <a:xfrm>
+            <a:off x="685800" y="2103120"/>
+            <a:ext cx="5044288" cy="2194560"/>
+          </a:xfrm>
+          <a:prstGeom prst="rect">
+            <a:avLst/>
+          </a:prstGeom>
+          <a:noFill/>
+          <a:ln/>
+        </p:spPr>
+        <p:txBody>
+          <a:bodyPr wrap="square" lIns="0" tIns="0" rIns="0" bIns="0" rtlCol="0" anchor="t"/>
+          <a:lstStyle/>
+          <a:p>
+            <a:pPr indent="0" marL="0">
               <a:lnSpc>
-                <a:spcPct val="93000"/>
+                <a:spcPct val="90000"/>
               </a:lnSpc>
               <a:buNone/>
             </a:pPr>
             <a:r>
-              <a:rPr lang="en-US" sz="3400" b="1" dirty="0">
+              <a:rPr lang="en-US" sz="6400" b="1" dirty="0">
                 <a:solidFill>
                   <a:schemeClr val="tx1"/>
                 </a:solidFill>
               </a:rPr>
-              <a:t>Skriv </a:t>
-            </a:r>
-            <a:pPr algn="l" indent="0" marL="0">
+              <a:t>Tænk</a:t>
+            </a:r>
+            <a:endParaRPr lang="en-US" sz="6400" dirty="0"/>
+          </a:p>
+          <a:p>
+            <a:pPr indent="0" marL="0">
               <a:lnSpc>
-                <a:spcPct val="93000"/>
+                <a:spcPct val="90000"/>
               </a:lnSpc>
               <a:buNone/>
             </a:pPr>
             <a:r>
-              <a:rPr lang="en-US" sz="3400" b="1" dirty="0">
+              <a:rPr lang="en-US" sz="6400" b="1" dirty="0">
+                <a:solidFill>
+                  <a:schemeClr val="tx1"/>
+                </a:solidFill>
+              </a:rPr>
+              <a:t>selv.</a:t>
+            </a:r>
+            <a:endParaRPr lang="en-US" sz="6400" dirty="0"/>
+          </a:p>
+        </p:txBody>
+      </p:sp>
+      <p:sp>
+        <p:nvSpPr>
+          <p:cNvPr id="5" name="Text 3"/>
+          <p:cNvSpPr txBox="1"/>
+          <p:nvPr/>
+        </p:nvSpPr>
+        <p:spPr>
+          <a:xfrm>
+            <a:off x="685800" y="4526280"/>
+            <a:ext cx="4678528" cy="914400"/>
+          </a:xfrm>
+          <a:prstGeom prst="rect">
+            <a:avLst/>
+          </a:prstGeom>
+          <a:noFill/>
+          <a:ln/>
+        </p:spPr>
+        <p:txBody>
+          <a:bodyPr wrap="square" lIns="0" tIns="0" rIns="0" bIns="0" rtlCol="0" anchor="t"/>
+          <a:lstStyle/>
+          <a:p>
+            <a:pPr indent="0" marL="0">
+              <a:buNone/>
+            </a:pPr>
+            <a:r>
+              <a:rPr lang="en-US" sz="1900" dirty="0">
+                <a:solidFill>
+                  <a:schemeClr val="accent2"/>
+                </a:solidFill>
+              </a:rPr>
+              <a:t>Lær det først. Brug AI som sparringspartner.</a:t>
+            </a:r>
+            <a:endParaRPr lang="en-US" sz="1900" dirty="0"/>
+          </a:p>
+        </p:txBody>
+      </p:sp>
+      <p:sp>
+        <p:nvSpPr>
+          <p:cNvPr id="6" name="Text 4"/>
+          <p:cNvSpPr txBox="1"/>
+          <p:nvPr/>
+        </p:nvSpPr>
+        <p:spPr>
+          <a:xfrm>
+            <a:off x="6644488" y="1737360"/>
+            <a:ext cx="4572000" cy="274320"/>
+          </a:xfrm>
+          <a:prstGeom prst="rect">
+            <a:avLst/>
+          </a:prstGeom>
+          <a:noFill/>
+          <a:ln/>
+        </p:spPr>
+        <p:txBody>
+          <a:bodyPr wrap="square" lIns="0" tIns="0" rIns="0" bIns="0" rtlCol="0" anchor="t"/>
+          <a:lstStyle/>
+          <a:p>
+            <a:pPr indent="0" marL="0">
+              <a:buNone/>
+            </a:pPr>
+            <a:r>
+              <a:rPr lang="en-US" sz="1200" b="1" spc="200" kern="0" dirty="0">
                 <a:solidFill>
                   <a:schemeClr val="accent1"/>
                 </a:solidFill>
               </a:rPr>
-              <a:t>to ting</a:t>
-            </a:r>
-            <a:pPr algn="l" indent="0" marL="0">
+              <a:t>I JOBBET</a:t>
+            </a:r>
+            <a:endParaRPr lang="en-US" sz="1200" dirty="0"/>
+          </a:p>
+        </p:txBody>
+      </p:sp>
+      <p:sp>
+        <p:nvSpPr>
+          <p:cNvPr id="7" name="Text 5"/>
+          <p:cNvSpPr txBox="1"/>
+          <p:nvPr/>
+        </p:nvSpPr>
+        <p:spPr>
+          <a:xfrm>
+            <a:off x="6644488" y="2103120"/>
+            <a:ext cx="4998568" cy="2194560"/>
+          </a:xfrm>
+          <a:prstGeom prst="rect">
+            <a:avLst/>
+          </a:prstGeom>
+          <a:noFill/>
+          <a:ln/>
+        </p:spPr>
+        <p:txBody>
+          <a:bodyPr wrap="square" lIns="0" tIns="0" rIns="0" bIns="0" rtlCol="0" anchor="t"/>
+          <a:lstStyle/>
+          <a:p>
+            <a:pPr indent="0" marL="0">
               <a:lnSpc>
-                <a:spcPct val="93000"/>
+                <a:spcPct val="90000"/>
               </a:lnSpc>
               <a:buNone/>
             </a:pPr>
             <a:r>
-              <a:rPr lang="en-US" sz="3400" b="1" dirty="0">
-                <a:solidFill>
-                  <a:schemeClr val="tx1"/>
-                </a:solidFill>
-              </a:rPr>
-              <a:t>, før du går</a:t>
-            </a:r>
-            <a:endParaRPr lang="en-US" sz="3400" dirty="0"/>
-          </a:p>
-        </p:txBody>
-      </p:sp>
-      <p:sp>
-        <p:nvSpPr>
-          <p:cNvPr id="4" name="Text 2"/>
-          <p:cNvSpPr txBox="1"/>
-          <p:nvPr/>
-        </p:nvSpPr>
-        <p:spPr>
-          <a:xfrm>
-            <a:off x="685800" y="2377440"/>
-            <a:ext cx="914400" cy="1097280"/>
-          </a:xfrm>
-          <a:prstGeom prst="rect">
-            <a:avLst/>
-          </a:prstGeom>
-          <a:noFill/>
-          <a:ln/>
-        </p:spPr>
-        <p:txBody>
-          <a:bodyPr wrap="square" lIns="0" tIns="0" rIns="0" bIns="0" rtlCol="0" anchor="t"/>
-          <a:lstStyle/>
-          <a:p>
-            <a:pPr indent="0" marL="0">
-              <a:buNone/>
-            </a:pPr>
-            <a:r>
-              <a:rPr lang="en-US" sz="8000" b="1" dirty="0">
+              <a:rPr lang="en-US" sz="6400" b="1" dirty="0">
+                <a:solidFill>
+                  <a:schemeClr val="bg1"/>
+                </a:solidFill>
+              </a:rPr>
+              <a:t>Brug AI</a:t>
+            </a:r>
+            <a:endParaRPr lang="en-US" sz="6400" dirty="0"/>
+          </a:p>
+          <a:p>
+            <a:pPr indent="0" marL="0">
+              <a:lnSpc>
+                <a:spcPct val="90000"/>
+              </a:lnSpc>
+              <a:buNone/>
+            </a:pPr>
+            <a:r>
+              <a:rPr lang="en-US" sz="6400" b="1" dirty="0">
                 <a:solidFill>
                   <a:schemeClr val="accent1"/>
                 </a:solidFill>
               </a:rPr>
-              <a:t>1</a:t>
-            </a:r>
-            <a:endParaRPr lang="en-US" sz="8000" dirty="0"/>
-          </a:p>
-        </p:txBody>
-      </p:sp>
-      <p:sp>
-        <p:nvSpPr>
-          <p:cNvPr id="5" name="Text 3"/>
-          <p:cNvSpPr txBox="1"/>
-          <p:nvPr/>
-        </p:nvSpPr>
-        <p:spPr>
-          <a:xfrm>
-            <a:off x="1874520" y="2606040"/>
-            <a:ext cx="8686800" cy="1097280"/>
-          </a:xfrm>
-          <a:prstGeom prst="rect">
-            <a:avLst/>
-          </a:prstGeom>
-          <a:noFill/>
-          <a:ln/>
-        </p:spPr>
-        <p:txBody>
-          <a:bodyPr wrap="square" lIns="0" tIns="0" rIns="0" bIns="0" rtlCol="0" anchor="t"/>
-          <a:lstStyle/>
-          <a:p>
-            <a:pPr indent="0" marL="0">
-              <a:buNone/>
-            </a:pPr>
-            <a:r>
-              <a:rPr lang="en-US" sz="2800" b="1" dirty="0">
-                <a:solidFill>
-                  <a:schemeClr val="tx1"/>
-                </a:solidFill>
-              </a:rPr>
-              <a:t>Én arbejdsgang fra i dag, du vil bruge i dit studiejob eller din praktik.</a:t>
-            </a:r>
-            <a:endParaRPr lang="en-US" sz="2800" dirty="0"/>
-          </a:p>
-        </p:txBody>
-      </p:sp>
-      <p:sp>
-        <p:nvSpPr>
-          <p:cNvPr id="6" name="Text 4"/>
-          <p:cNvSpPr txBox="1"/>
-          <p:nvPr/>
-        </p:nvSpPr>
-        <p:spPr>
-          <a:xfrm>
-            <a:off x="685800" y="3977640"/>
-            <a:ext cx="914400" cy="1097280"/>
-          </a:xfrm>
-          <a:prstGeom prst="rect">
-            <a:avLst/>
-          </a:prstGeom>
-          <a:noFill/>
-          <a:ln/>
-        </p:spPr>
-        <p:txBody>
-          <a:bodyPr wrap="square" lIns="0" tIns="0" rIns="0" bIns="0" rtlCol="0" anchor="t"/>
-          <a:lstStyle/>
-          <a:p>
-            <a:pPr indent="0" marL="0">
-              <a:buNone/>
-            </a:pPr>
-            <a:r>
-              <a:rPr lang="en-US" sz="8000" b="1" dirty="0">
-                <a:solidFill>
-                  <a:schemeClr val="accent1"/>
-                </a:solidFill>
-              </a:rPr>
-              <a:t>2</a:t>
-            </a:r>
-            <a:endParaRPr lang="en-US" sz="8000" dirty="0"/>
-          </a:p>
-        </p:txBody>
-      </p:sp>
-      <p:sp>
-        <p:nvSpPr>
-          <p:cNvPr id="7" name="Text 5"/>
-          <p:cNvSpPr txBox="1"/>
-          <p:nvPr/>
-        </p:nvSpPr>
-        <p:spPr>
-          <a:xfrm>
-            <a:off x="1874520" y="4206240"/>
-            <a:ext cx="8686800" cy="1097280"/>
-          </a:xfrm>
-          <a:prstGeom prst="rect">
-            <a:avLst/>
-          </a:prstGeom>
-          <a:noFill/>
-          <a:ln/>
-        </p:spPr>
-        <p:txBody>
-          <a:bodyPr wrap="square" lIns="0" tIns="0" rIns="0" bIns="0" rtlCol="0" anchor="t"/>
-          <a:lstStyle/>
-          <a:p>
-            <a:pPr indent="0" marL="0">
-              <a:buNone/>
-            </a:pPr>
-            <a:r>
-              <a:rPr lang="en-US" sz="2800" b="1" dirty="0">
-                <a:solidFill>
-                  <a:schemeClr val="tx1"/>
-                </a:solidFill>
-              </a:rPr>
-              <a:t>Én ting, du vil lære selv, før du lader AI gøre det.</a:t>
-            </a:r>
-            <a:endParaRPr lang="en-US" sz="2800" dirty="0"/>
+              <a:t>fuldt ud.</a:t>
+            </a:r>
+            <a:endParaRPr lang="en-US" sz="6400" dirty="0"/>
+          </a:p>
+        </p:txBody>
+      </p:sp>
+      <p:sp>
+        <p:nvSpPr>
+          <p:cNvPr id="8" name="Text 6"/>
+          <p:cNvSpPr txBox="1"/>
+          <p:nvPr/>
+        </p:nvSpPr>
+        <p:spPr>
+          <a:xfrm>
+            <a:off x="6644488" y="4526280"/>
+            <a:ext cx="4815688" cy="914400"/>
+          </a:xfrm>
+          <a:prstGeom prst="rect">
+            <a:avLst/>
+          </a:prstGeom>
+          <a:noFill/>
+          <a:ln/>
+        </p:spPr>
+        <p:txBody>
+          <a:bodyPr wrap="square" lIns="0" tIns="0" rIns="0" bIns="0" rtlCol="0" anchor="t"/>
+          <a:lstStyle/>
+          <a:p>
+            <a:pPr indent="0" marL="0">
+              <a:buNone/>
+            </a:pPr>
+            <a:r>
+              <a:rPr lang="en-US" sz="1900" dirty="0">
+                <a:solidFill>
+                  <a:schemeClr val="accent3"/>
+                </a:solidFill>
+              </a:rPr>
+              <a:t>Tag svarene. Kør arbejdsgangene. Byg dine egne værktøjer.</a:t>
+            </a:r>
+            <a:endParaRPr lang="en-US" sz="1900" dirty="0"/>
           </a:p>
         </p:txBody>
       </p:sp>
@@ -18976,6 +19268,280 @@
 <file path=ppt/slides/slide45.xml><?xml version="1.0" encoding="utf-8"?>
 <p:sld xmlns:a="http://schemas.openxmlformats.org/drawingml/2006/main" xmlns:r="http://schemas.openxmlformats.org/officeDocument/2006/relationships" xmlns:p="http://schemas.openxmlformats.org/presentationml/2006/main">
   <p:cSld name="Slide 45">
+    <p:spTree>
+      <p:nvGrpSpPr>
+        <p:cNvPr id="1" name=""/>
+        <p:cNvGrpSpPr/>
+        <p:nvPr/>
+      </p:nvGrpSpPr>
+      <p:grpSpPr>
+        <a:xfrm>
+          <a:off x="0" y="0"/>
+          <a:ext cx="0" cy="0"/>
+          <a:chOff x="0" y="0"/>
+          <a:chExt cx="0" cy="0"/>
+        </a:xfrm>
+      </p:grpSpPr>
+      <p:sp>
+        <p:nvSpPr>
+          <p:cNvPr id="2" name="Text 0"/>
+          <p:cNvSpPr txBox="1"/>
+          <p:nvPr/>
+        </p:nvSpPr>
+        <p:spPr>
+          <a:xfrm>
+            <a:off x="685800" y="411480"/>
+            <a:ext cx="8229600" cy="274320"/>
+          </a:xfrm>
+          <a:prstGeom prst="rect">
+            <a:avLst/>
+          </a:prstGeom>
+          <a:noFill/>
+          <a:ln/>
+        </p:spPr>
+        <p:txBody>
+          <a:bodyPr wrap="square" lIns="0" tIns="0" rIns="0" bIns="0" rtlCol="0" anchor="t"/>
+          <a:lstStyle/>
+          <a:p>
+            <a:pPr indent="0" marL="0">
+              <a:buNone/>
+            </a:pPr>
+            <a:r>
+              <a:rPr lang="en-US" sz="1200" b="1" spc="200" kern="0" dirty="0">
+                <a:solidFill>
+                  <a:schemeClr val="accent2"/>
+                </a:solidFill>
+              </a:rPr>
+              <a:t>EXIT TICKET</a:t>
+            </a:r>
+            <a:endParaRPr lang="en-US" sz="1200" dirty="0"/>
+          </a:p>
+        </p:txBody>
+      </p:sp>
+      <p:sp>
+        <p:nvSpPr>
+          <p:cNvPr id="3" name="Text 0"/>
+          <p:cNvSpPr/>
+          <p:nvPr>
+            <p:ph idx="100" type="title" hasCustomPrompt="1"/>
+          </p:nvPr>
+        </p:nvSpPr>
+        <p:spPr>
+          <a:xfrm>
+            <a:off x="685800" y="804672"/>
+            <a:ext cx="10820095" cy="1280160"/>
+          </a:xfrm>
+          <a:prstGeom prst="rect">
+            <a:avLst/>
+          </a:prstGeom>
+          <a:noFill/>
+          <a:ln/>
+        </p:spPr>
+        <p:txBody>
+          <a:bodyPr wrap="square" lIns="0" tIns="0" rIns="0" bIns="0" rtlCol="0" anchor="t"/>
+          <a:lstStyle/>
+          <a:p>
+            <a:pPr algn="l" indent="0" marL="0">
+              <a:lnSpc>
+                <a:spcPct val="93000"/>
+              </a:lnSpc>
+              <a:buNone/>
+            </a:pPr>
+            <a:r>
+              <a:rPr lang="en-US" sz="3400" b="1" dirty="0">
+                <a:solidFill>
+                  <a:schemeClr val="tx1"/>
+                </a:solidFill>
+              </a:rPr>
+              <a:t>Skriv </a:t>
+            </a:r>
+            <a:pPr algn="l" indent="0" marL="0">
+              <a:lnSpc>
+                <a:spcPct val="93000"/>
+              </a:lnSpc>
+              <a:buNone/>
+            </a:pPr>
+            <a:r>
+              <a:rPr lang="en-US" sz="3400" b="1" dirty="0">
+                <a:solidFill>
+                  <a:schemeClr val="accent1"/>
+                </a:solidFill>
+              </a:rPr>
+              <a:t>to ting</a:t>
+            </a:r>
+            <a:pPr algn="l" indent="0" marL="0">
+              <a:lnSpc>
+                <a:spcPct val="93000"/>
+              </a:lnSpc>
+              <a:buNone/>
+            </a:pPr>
+            <a:r>
+              <a:rPr lang="en-US" sz="3400" b="1" dirty="0">
+                <a:solidFill>
+                  <a:schemeClr val="tx1"/>
+                </a:solidFill>
+              </a:rPr>
+              <a:t>, før du går</a:t>
+            </a:r>
+            <a:endParaRPr lang="en-US" sz="3400" dirty="0"/>
+          </a:p>
+        </p:txBody>
+      </p:sp>
+      <p:sp>
+        <p:nvSpPr>
+          <p:cNvPr id="4" name="Text 2"/>
+          <p:cNvSpPr txBox="1"/>
+          <p:nvPr/>
+        </p:nvSpPr>
+        <p:spPr>
+          <a:xfrm>
+            <a:off x="685800" y="2377440"/>
+            <a:ext cx="914400" cy="1097280"/>
+          </a:xfrm>
+          <a:prstGeom prst="rect">
+            <a:avLst/>
+          </a:prstGeom>
+          <a:noFill/>
+          <a:ln/>
+        </p:spPr>
+        <p:txBody>
+          <a:bodyPr wrap="square" lIns="0" tIns="0" rIns="0" bIns="0" rtlCol="0" anchor="t"/>
+          <a:lstStyle/>
+          <a:p>
+            <a:pPr indent="0" marL="0">
+              <a:buNone/>
+            </a:pPr>
+            <a:r>
+              <a:rPr lang="en-US" sz="8000" b="1" dirty="0">
+                <a:solidFill>
+                  <a:schemeClr val="accent1"/>
+                </a:solidFill>
+              </a:rPr>
+              <a:t>1</a:t>
+            </a:r>
+            <a:endParaRPr lang="en-US" sz="8000" dirty="0"/>
+          </a:p>
+        </p:txBody>
+      </p:sp>
+      <p:sp>
+        <p:nvSpPr>
+          <p:cNvPr id="5" name="Text 3"/>
+          <p:cNvSpPr txBox="1"/>
+          <p:nvPr/>
+        </p:nvSpPr>
+        <p:spPr>
+          <a:xfrm>
+            <a:off x="1874520" y="2606040"/>
+            <a:ext cx="8686800" cy="1097280"/>
+          </a:xfrm>
+          <a:prstGeom prst="rect">
+            <a:avLst/>
+          </a:prstGeom>
+          <a:noFill/>
+          <a:ln/>
+        </p:spPr>
+        <p:txBody>
+          <a:bodyPr wrap="square" lIns="0" tIns="0" rIns="0" bIns="0" rtlCol="0" anchor="t"/>
+          <a:lstStyle/>
+          <a:p>
+            <a:pPr indent="0" marL="0">
+              <a:buNone/>
+            </a:pPr>
+            <a:r>
+              <a:rPr lang="en-US" sz="2800" b="1" dirty="0">
+                <a:solidFill>
+                  <a:schemeClr val="tx1"/>
+                </a:solidFill>
+              </a:rPr>
+              <a:t>Én arbejdsgang fra i dag, du vil bruge i dit studiejob eller din praktik.</a:t>
+            </a:r>
+            <a:endParaRPr lang="en-US" sz="2800" dirty="0"/>
+          </a:p>
+        </p:txBody>
+      </p:sp>
+      <p:sp>
+        <p:nvSpPr>
+          <p:cNvPr id="6" name="Text 4"/>
+          <p:cNvSpPr txBox="1"/>
+          <p:nvPr/>
+        </p:nvSpPr>
+        <p:spPr>
+          <a:xfrm>
+            <a:off x="685800" y="3977640"/>
+            <a:ext cx="914400" cy="1097280"/>
+          </a:xfrm>
+          <a:prstGeom prst="rect">
+            <a:avLst/>
+          </a:prstGeom>
+          <a:noFill/>
+          <a:ln/>
+        </p:spPr>
+        <p:txBody>
+          <a:bodyPr wrap="square" lIns="0" tIns="0" rIns="0" bIns="0" rtlCol="0" anchor="t"/>
+          <a:lstStyle/>
+          <a:p>
+            <a:pPr indent="0" marL="0">
+              <a:buNone/>
+            </a:pPr>
+            <a:r>
+              <a:rPr lang="en-US" sz="8000" b="1" dirty="0">
+                <a:solidFill>
+                  <a:schemeClr val="accent1"/>
+                </a:solidFill>
+              </a:rPr>
+              <a:t>2</a:t>
+            </a:r>
+            <a:endParaRPr lang="en-US" sz="8000" dirty="0"/>
+          </a:p>
+        </p:txBody>
+      </p:sp>
+      <p:sp>
+        <p:nvSpPr>
+          <p:cNvPr id="7" name="Text 5"/>
+          <p:cNvSpPr txBox="1"/>
+          <p:nvPr/>
+        </p:nvSpPr>
+        <p:spPr>
+          <a:xfrm>
+            <a:off x="1874520" y="4206240"/>
+            <a:ext cx="8686800" cy="1097280"/>
+          </a:xfrm>
+          <a:prstGeom prst="rect">
+            <a:avLst/>
+          </a:prstGeom>
+          <a:noFill/>
+          <a:ln/>
+        </p:spPr>
+        <p:txBody>
+          <a:bodyPr wrap="square" lIns="0" tIns="0" rIns="0" bIns="0" rtlCol="0" anchor="t"/>
+          <a:lstStyle/>
+          <a:p>
+            <a:pPr indent="0" marL="0">
+              <a:buNone/>
+            </a:pPr>
+            <a:r>
+              <a:rPr lang="en-US" sz="2800" b="1" dirty="0">
+                <a:solidFill>
+                  <a:schemeClr val="tx1"/>
+                </a:solidFill>
+              </a:rPr>
+              <a:t>Én ting, du vil lære selv, før du lader AI gøre det.</a:t>
+            </a:r>
+            <a:endParaRPr lang="en-US" sz="2800" dirty="0"/>
+          </a:p>
+        </p:txBody>
+      </p:sp>
+    </p:spTree>
+  </p:cSld>
+  <p:clrMapOvr>
+    <a:masterClrMapping/>
+  </p:clrMapOvr>
+</p:sld>
+</file>
+
+<file path=ppt/slides/slide46.xml><?xml version="1.0" encoding="utf-8"?>
+<p:sld xmlns:a="http://schemas.openxmlformats.org/drawingml/2006/main" xmlns:r="http://schemas.openxmlformats.org/officeDocument/2006/relationships" xmlns:p="http://schemas.openxmlformats.org/presentationml/2006/main">
+  <p:cSld name="Slide 46">
     <p:bg>
       <p:bgPr>
         <a:blipFill dpi="0" rotWithShape="1">
